--- a/output/wordlabs-round-3day.pptx
+++ b/output/wordlabs-round-3day.pptx
@@ -4240,7 +4240,7 @@
                 <a:ea typeface="Calibri" pitchFamily="34" charset="-122"/>
                 <a:cs typeface="Calibri" pitchFamily="34" charset="-120"/>
               </a:rPr>
-              <a:t>"circular shape or movement"</a:t>
+              <a:t>"shaped like a circle"</a:t>
             </a:r>
             <a:endParaRPr lang="en-US" sz="2200" dirty="0"/>
           </a:p>
@@ -4279,7 +4279,7 @@
                 <a:ea typeface="Calibri" pitchFamily="34" charset="-122"/>
                 <a:cs typeface="Calibri" pitchFamily="34" charset="-120"/>
               </a:rPr>
-              <a:t>Origin: Latin: rotundus</a:t>
+              <a:t>Origin: Anglo-Saxon (Old English) root</a:t>
             </a:r>
             <a:endParaRPr lang="en-US" sz="1300" dirty="0"/>
           </a:p>
@@ -5288,7 +5288,7 @@
                 <a:ea typeface="Calibri" pitchFamily="34" charset="-122"/>
                 <a:cs typeface="Calibri" pitchFamily="34" charset="-120"/>
               </a:rPr>
-              <a:t>Word Labs  •  wordlabs.app  •  Root: 'round' = circular shape or movement</a:t>
+              <a:t>Word Labs  •  wordlabs.app  •  Root: 'round' = shaped like a circle</a:t>
             </a:r>
             <a:endParaRPr lang="en-US" sz="800" dirty="0"/>
           </a:p>
@@ -5622,7 +5622,7 @@
                 <a:ea typeface="Trebuchet MS" pitchFamily="34" charset="-122"/>
                 <a:cs typeface="Trebuchet MS" pitchFamily="34" charset="-120"/>
               </a:rPr>
-              <a:t>0</a:t>
+              <a:t>1</a:t>
             </a:r>
             <a:pPr algn="ctr" indent="0" marL="0">
               <a:buNone/>
@@ -5928,7 +5928,7 @@
                 <a:ea typeface="Calibri" pitchFamily="34" charset="-122"/>
                 <a:cs typeface="Calibri" pitchFamily="34" charset="-120"/>
               </a:rPr>
-              <a:t>Word Labs  •  wordlabs.app  •  Root: 'round' = circular shape or movement</a:t>
+              <a:t>Word Labs  •  wordlabs.app  •  Root: 'round' = shaped like a circle</a:t>
             </a:r>
             <a:endParaRPr lang="en-US" sz="800" dirty="0"/>
           </a:p>
@@ -6040,7 +6040,7 @@
                 <a:ea typeface="Calibri" pitchFamily="34" charset="-122"/>
                 <a:cs typeface="Calibri" pitchFamily="34" charset="-120"/>
               </a:rPr>
-              <a:t>The </a:t>
+              <a:t>The team was </a:t>
             </a:r>
             <a:pPr algn="l" indent="0" marL="0">
               <a:buNone/>
@@ -6057,7 +6057,7 @@
                 <a:ea typeface="Calibri" pitchFamily="34" charset="-122"/>
                 <a:cs typeface="Calibri" pitchFamily="34" charset="-120"/>
               </a:rPr>
-              <a:t>rounded</a:t>
+              <a:t>roundly</a:t>
             </a:r>
             <a:pPr algn="l" indent="0" marL="0">
               <a:buNone/>
@@ -6071,7 +6071,7 @@
                 <a:ea typeface="Calibri" pitchFamily="34" charset="-122"/>
                 <a:cs typeface="Calibri" pitchFamily="34" charset="-120"/>
               </a:rPr>
-              <a:t> pebbles </a:t>
+              <a:t> beaten in the final match. Of all the pumpkins, this one is the </a:t>
             </a:r>
             <a:pPr algn="l" indent="0" marL="0">
               <a:buNone/>
@@ -6088,7 +6088,7 @@
                 <a:ea typeface="Calibri" pitchFamily="34" charset="-122"/>
                 <a:cs typeface="Calibri" pitchFamily="34" charset="-120"/>
               </a:rPr>
-              <a:t>surround</a:t>
+              <a:t>roundest</a:t>
             </a:r>
             <a:pPr algn="l" indent="0" marL="0">
               <a:buNone/>
@@ -6102,7 +6102,7 @@
                 <a:ea typeface="Calibri" pitchFamily="34" charset="-122"/>
                 <a:cs typeface="Calibri" pitchFamily="34" charset="-120"/>
               </a:rPr>
-              <a:t> the garden bed near the school gate.</a:t>
+              <a:t>.</a:t>
             </a:r>
             <a:endParaRPr lang="en-US" sz="1800" dirty="0"/>
           </a:p>
@@ -6257,7 +6257,7 @@
                 <a:ea typeface="Trebuchet MS" pitchFamily="34" charset="-122"/>
                 <a:cs typeface="Trebuchet MS" pitchFamily="34" charset="-120"/>
               </a:rPr>
-              <a:t>rounded</a:t>
+              <a:t>roundly</a:t>
             </a:r>
             <a:endParaRPr lang="en-US" sz="1400" dirty="0"/>
           </a:p>
@@ -6385,7 +6385,7 @@
                 <a:ea typeface="Trebuchet MS" pitchFamily="34" charset="-122"/>
                 <a:cs typeface="Trebuchet MS" pitchFamily="34" charset="-120"/>
               </a:rPr>
-              <a:t>surround</a:t>
+              <a:t>roundest</a:t>
             </a:r>
             <a:endParaRPr lang="en-US" sz="1400" dirty="0"/>
           </a:p>
@@ -6716,7 +6716,7 @@
                 <a:ea typeface="Calibri" pitchFamily="34" charset="-122"/>
                 <a:cs typeface="Calibri" pitchFamily="34" charset="-120"/>
               </a:rPr>
-              <a:t>Word Labs  •  wordlabs.app  •  Root: 'round' = circular shape or movement</a:t>
+              <a:t>Word Labs  •  wordlabs.app  •  Root: 'round' = shaped like a circle</a:t>
             </a:r>
             <a:endParaRPr lang="en-US" sz="800" dirty="0"/>
           </a:p>
@@ -6855,7 +6855,7 @@
                 <a:ea typeface="Trebuchet MS" pitchFamily="34" charset="-122"/>
                 <a:cs typeface="Trebuchet MS" pitchFamily="34" charset="-120"/>
               </a:rPr>
-              <a:t>rounded</a:t>
+              <a:t>roundly</a:t>
             </a:r>
             <a:endParaRPr lang="en-US" sz="2800" dirty="0"/>
           </a:p>
@@ -7543,7 +7543,7 @@
                 <a:ea typeface="Calibri" pitchFamily="34" charset="-122"/>
                 <a:cs typeface="Calibri" pitchFamily="34" charset="-120"/>
               </a:rPr>
-              <a:t>Word Labs  •  wordlabs.app  •  Root: 'round' = circular shape or movement</a:t>
+              <a:t>Word Labs  •  wordlabs.app  •  Root: 'round' = shaped like a circle</a:t>
             </a:r>
             <a:endParaRPr lang="en-US" sz="800" dirty="0"/>
           </a:p>
@@ -7682,7 +7682,7 @@
                 <a:ea typeface="Trebuchet MS" pitchFamily="34" charset="-122"/>
                 <a:cs typeface="Trebuchet MS" pitchFamily="34" charset="-120"/>
               </a:rPr>
-              <a:t>rounded</a:t>
+              <a:t>roundly</a:t>
             </a:r>
             <a:endParaRPr lang="en-US" sz="2800" dirty="0"/>
           </a:p>
@@ -7860,7 +7860,7 @@
                 <a:ea typeface="Calibri" pitchFamily="34" charset="-122"/>
                 <a:cs typeface="Calibri" pitchFamily="34" charset="-120"/>
               </a:rPr>
-              <a:t>circular shape</a:t>
+              <a:t>shaped like a circle</a:t>
             </a:r>
             <a:endParaRPr lang="en-US" sz="850" dirty="0"/>
           </a:p>
@@ -7933,7 +7933,7 @@
                 <a:ea typeface="Trebuchet MS" pitchFamily="34" charset="-122"/>
                 <a:cs typeface="Trebuchet MS" pitchFamily="34" charset="-120"/>
               </a:rPr>
-              <a:t>ed</a:t>
+              <a:t>ly</a:t>
             </a:r>
             <a:endParaRPr lang="en-US" sz="1300" dirty="0"/>
           </a:p>
@@ -7972,7 +7972,7 @@
                 <a:ea typeface="Calibri" pitchFamily="34" charset="-122"/>
                 <a:cs typeface="Calibri" pitchFamily="34" charset="-120"/>
               </a:rPr>
-              <a:t>past tense or describing a state</a:t>
+              <a:t>in a way</a:t>
             </a:r>
             <a:endParaRPr lang="en-US" sz="850" dirty="0"/>
           </a:p>
@@ -8528,7 +8528,7 @@
                 <a:ea typeface="Calibri" pitchFamily="34" charset="-122"/>
                 <a:cs typeface="Calibri" pitchFamily="34" charset="-120"/>
               </a:rPr>
-              <a:t>Word Labs  •  wordlabs.app  •  Root: 'round' = circular shape or movement</a:t>
+              <a:t>Word Labs  •  wordlabs.app  •  Root: 'round' = shaped like a circle</a:t>
             </a:r>
             <a:endParaRPr lang="en-US" sz="800" dirty="0"/>
           </a:p>
@@ -8667,7 +8667,7 @@
                 <a:ea typeface="Trebuchet MS" pitchFamily="34" charset="-122"/>
                 <a:cs typeface="Trebuchet MS" pitchFamily="34" charset="-120"/>
               </a:rPr>
-              <a:t>rounded</a:t>
+              <a:t>roundly</a:t>
             </a:r>
             <a:endParaRPr lang="en-US" sz="2800" dirty="0"/>
           </a:p>
@@ -8845,7 +8845,7 @@
                 <a:ea typeface="Calibri" pitchFamily="34" charset="-122"/>
                 <a:cs typeface="Calibri" pitchFamily="34" charset="-120"/>
               </a:rPr>
-              <a:t>circular shape</a:t>
+              <a:t>shaped like a circle</a:t>
             </a:r>
             <a:endParaRPr lang="en-US" sz="850" dirty="0"/>
           </a:p>
@@ -8918,7 +8918,7 @@
                 <a:ea typeface="Trebuchet MS" pitchFamily="34" charset="-122"/>
                 <a:cs typeface="Trebuchet MS" pitchFamily="34" charset="-120"/>
               </a:rPr>
-              <a:t>ed</a:t>
+              <a:t>ly</a:t>
             </a:r>
             <a:endParaRPr lang="en-US" sz="1300" dirty="0"/>
           </a:p>
@@ -8957,7 +8957,7 @@
                 <a:ea typeface="Calibri" pitchFamily="34" charset="-122"/>
                 <a:cs typeface="Calibri" pitchFamily="34" charset="-120"/>
               </a:rPr>
-              <a:t>past tense or describing a state</a:t>
+              <a:t>in a way</a:t>
             </a:r>
             <a:endParaRPr lang="en-US" sz="850" dirty="0"/>
           </a:p>
@@ -9221,7 +9221,7 @@
                 <a:ea typeface="Trebuchet MS" pitchFamily="34" charset="-122"/>
                 <a:cs typeface="Trebuchet MS" pitchFamily="34" charset="-120"/>
               </a:rPr>
-              <a:t>ed</a:t>
+              <a:t>ly</a:t>
             </a:r>
             <a:endParaRPr lang="en-US" sz="1400" dirty="0"/>
           </a:p>
@@ -9645,7 +9645,7 @@
                 <a:ea typeface="Calibri" pitchFamily="34" charset="-122"/>
                 <a:cs typeface="Calibri" pitchFamily="34" charset="-120"/>
               </a:rPr>
-              <a:t>Word Labs  •  wordlabs.app  •  Root: 'round' = circular shape or movement</a:t>
+              <a:t>Word Labs  •  wordlabs.app  •  Root: 'round' = shaped like a circle</a:t>
             </a:r>
             <a:endParaRPr lang="en-US" sz="800" dirty="0"/>
           </a:p>
@@ -9784,7 +9784,7 @@
                 <a:ea typeface="Trebuchet MS" pitchFamily="34" charset="-122"/>
                 <a:cs typeface="Trebuchet MS" pitchFamily="34" charset="-120"/>
               </a:rPr>
-              <a:t>rounded</a:t>
+              <a:t>roundly</a:t>
             </a:r>
             <a:endParaRPr lang="en-US" sz="2800" dirty="0"/>
           </a:p>
@@ -9962,7 +9962,7 @@
                 <a:ea typeface="Calibri" pitchFamily="34" charset="-122"/>
                 <a:cs typeface="Calibri" pitchFamily="34" charset="-120"/>
               </a:rPr>
-              <a:t>circular shape</a:t>
+              <a:t>shaped like a circle</a:t>
             </a:r>
             <a:endParaRPr lang="en-US" sz="850" dirty="0"/>
           </a:p>
@@ -10035,7 +10035,7 @@
                 <a:ea typeface="Trebuchet MS" pitchFamily="34" charset="-122"/>
                 <a:cs typeface="Trebuchet MS" pitchFamily="34" charset="-120"/>
               </a:rPr>
-              <a:t>ed</a:t>
+              <a:t>ly</a:t>
             </a:r>
             <a:endParaRPr lang="en-US" sz="1300" dirty="0"/>
           </a:p>
@@ -10074,7 +10074,7 @@
                 <a:ea typeface="Calibri" pitchFamily="34" charset="-122"/>
                 <a:cs typeface="Calibri" pitchFamily="34" charset="-120"/>
               </a:rPr>
-              <a:t>past tense or describing a state</a:t>
+              <a:t>in a way</a:t>
             </a:r>
             <a:endParaRPr lang="en-US" sz="850" dirty="0"/>
           </a:p>
@@ -10338,7 +10338,7 @@
                 <a:ea typeface="Trebuchet MS" pitchFamily="34" charset="-122"/>
                 <a:cs typeface="Trebuchet MS" pitchFamily="34" charset="-120"/>
               </a:rPr>
-              <a:t>ed</a:t>
+              <a:t>ly</a:t>
             </a:r>
             <a:endParaRPr lang="en-US" sz="1400" dirty="0"/>
           </a:p>
@@ -10445,7 +10445,7 @@
         </p:nvSpPr>
         <p:spPr>
           <a:xfrm>
-            <a:off x="2427732" y="4169664"/>
+            <a:off x="2254649" y="4169664"/>
             <a:ext cx="685800" cy="475488"/>
           </a:xfrm>
           <a:prstGeom prst="rect">
@@ -10472,7 +10472,7 @@
         </p:nvSpPr>
         <p:spPr>
           <a:xfrm>
-            <a:off x="2427732" y="4169664"/>
+            <a:off x="2254649" y="4169664"/>
             <a:ext cx="685800" cy="475488"/>
           </a:xfrm>
           <a:prstGeom prst="rect">
@@ -10511,7 +10511,7 @@
         </p:nvSpPr>
         <p:spPr>
           <a:xfrm>
-            <a:off x="3639312" y="4169664"/>
+            <a:off x="3293146" y="4169664"/>
             <a:ext cx="685800" cy="475488"/>
           </a:xfrm>
           <a:prstGeom prst="rect">
@@ -10538,7 +10538,7 @@
         </p:nvSpPr>
         <p:spPr>
           <a:xfrm>
-            <a:off x="3639312" y="4169664"/>
+            <a:off x="3293146" y="4169664"/>
             <a:ext cx="685800" cy="475488"/>
           </a:xfrm>
           <a:prstGeom prst="rect">
@@ -10577,7 +10577,7 @@
         </p:nvSpPr>
         <p:spPr>
           <a:xfrm>
-            <a:off x="4850892" y="4169664"/>
+            <a:off x="4331643" y="4169664"/>
             <a:ext cx="685800" cy="475488"/>
           </a:xfrm>
           <a:prstGeom prst="rect">
@@ -10604,7 +10604,7 @@
         </p:nvSpPr>
         <p:spPr>
           <a:xfrm>
-            <a:off x="4850892" y="4169664"/>
+            <a:off x="4331643" y="4169664"/>
             <a:ext cx="685800" cy="475488"/>
           </a:xfrm>
           <a:prstGeom prst="rect">
@@ -10629,7 +10629,7 @@
                 <a:ea typeface="Trebuchet MS" pitchFamily="34" charset="-122"/>
                 <a:cs typeface="Trebuchet MS" pitchFamily="34" charset="-120"/>
               </a:rPr>
-              <a:t>nd</a:t>
+              <a:t>n</a:t>
             </a:r>
             <a:endParaRPr lang="en-US" sz="900" dirty="0"/>
           </a:p>
@@ -10643,7 +10643,7 @@
         </p:nvSpPr>
         <p:spPr>
           <a:xfrm>
-            <a:off x="6062472" y="4169664"/>
+            <a:off x="5370141" y="4169664"/>
             <a:ext cx="685800" cy="475488"/>
           </a:xfrm>
           <a:prstGeom prst="rect">
@@ -10670,7 +10670,7 @@
         </p:nvSpPr>
         <p:spPr>
           <a:xfrm>
-            <a:off x="6062472" y="4169664"/>
+            <a:off x="5370141" y="4169664"/>
             <a:ext cx="685800" cy="475488"/>
           </a:xfrm>
           <a:prstGeom prst="rect">
@@ -10695,7 +10695,7 @@
                 <a:ea typeface="Trebuchet MS" pitchFamily="34" charset="-122"/>
                 <a:cs typeface="Trebuchet MS" pitchFamily="34" charset="-120"/>
               </a:rPr>
-              <a:t>e</a:t>
+              <a:t>d</a:t>
             </a:r>
             <a:endParaRPr lang="en-US" sz="900" dirty="0"/>
           </a:p>
@@ -10709,7 +10709,7 @@
         </p:nvSpPr>
         <p:spPr>
           <a:xfrm>
-            <a:off x="7274052" y="4169664"/>
+            <a:off x="6408638" y="4169664"/>
             <a:ext cx="685800" cy="475488"/>
           </a:xfrm>
           <a:prstGeom prst="rect">
@@ -10736,7 +10736,7 @@
         </p:nvSpPr>
         <p:spPr>
           <a:xfrm>
-            <a:off x="7274052" y="4169664"/>
+            <a:off x="6408638" y="4169664"/>
             <a:ext cx="685800" cy="475488"/>
           </a:xfrm>
           <a:prstGeom prst="rect">
@@ -10761,7 +10761,73 @@
                 <a:ea typeface="Trebuchet MS" pitchFamily="34" charset="-122"/>
                 <a:cs typeface="Trebuchet MS" pitchFamily="34" charset="-120"/>
               </a:rPr>
-              <a:t>d</a:t>
+              <a:t>l</a:t>
+            </a:r>
+            <a:endParaRPr lang="en-US" sz="900" dirty="0"/>
+          </a:p>
+        </p:txBody>
+      </p:sp>
+      <p:sp>
+        <p:nvSpPr>
+          <p:cNvPr id="43" name="Shape 41"/>
+          <p:cNvSpPr/>
+          <p:nvPr/>
+        </p:nvSpPr>
+        <p:spPr>
+          <a:xfrm>
+            <a:off x="7447135" y="4169664"/>
+            <a:ext cx="685800" cy="475488"/>
+          </a:xfrm>
+          <a:prstGeom prst="rect">
+            <a:avLst>
+              <a:gd name="adj" fmla="val 7692"/>
+            </a:avLst>
+          </a:prstGeom>
+          <a:solidFill>
+            <a:srgbClr val="FFFFFF"/>
+          </a:solidFill>
+          <a:ln w="12700">
+            <a:solidFill>
+              <a:srgbClr val="DB2777"/>
+            </a:solidFill>
+            <a:prstDash val="solid"/>
+          </a:ln>
+        </p:spPr>
+      </p:sp>
+      <p:sp>
+        <p:nvSpPr>
+          <p:cNvPr id="44" name="Text 42"/>
+          <p:cNvSpPr/>
+          <p:nvPr/>
+        </p:nvSpPr>
+        <p:spPr>
+          <a:xfrm>
+            <a:off x="7447135" y="4169664"/>
+            <a:ext cx="685800" cy="475488"/>
+          </a:xfrm>
+          <a:prstGeom prst="rect">
+            <a:avLst/>
+          </a:prstGeom>
+          <a:noFill/>
+          <a:ln/>
+        </p:spPr>
+        <p:txBody>
+          <a:bodyPr wrap="square" lIns="0" tIns="0" rIns="0" bIns="0" rtlCol="0" anchor="ctr"/>
+          <a:lstStyle/>
+          <a:p>
+            <a:pPr algn="ctr" indent="0" marL="0">
+              <a:buNone/>
+            </a:pPr>
+            <a:r>
+              <a:rPr lang="en-US" sz="900" b="1" dirty="0">
+                <a:solidFill>
+                  <a:srgbClr val="9D174D"/>
+                </a:solidFill>
+                <a:latin typeface="Trebuchet MS" pitchFamily="34" charset="0"/>
+                <a:ea typeface="Trebuchet MS" pitchFamily="34" charset="-122"/>
+                <a:cs typeface="Trebuchet MS" pitchFamily="34" charset="-120"/>
+              </a:rPr>
+              <a:t>y</a:t>
             </a:r>
             <a:endParaRPr lang="en-US" sz="900" dirty="0"/>
           </a:p>
@@ -11053,7 +11119,7 @@
                 <a:ea typeface="Calibri" pitchFamily="34" charset="-122"/>
                 <a:cs typeface="Calibri" pitchFamily="34" charset="-120"/>
               </a:rPr>
-              <a:t>Word Labs  •  wordlabs.app  •  Root: 'round' = circular shape or movement</a:t>
+              <a:t>Word Labs  •  wordlabs.app  •  Root: 'round' = shaped like a circle</a:t>
             </a:r>
             <a:endParaRPr lang="en-US" sz="800" dirty="0"/>
           </a:p>
@@ -11192,7 +11258,7 @@
                 <a:ea typeface="Trebuchet MS" pitchFamily="34" charset="-122"/>
                 <a:cs typeface="Trebuchet MS" pitchFamily="34" charset="-120"/>
               </a:rPr>
-              <a:t>surround</a:t>
+              <a:t>roundest</a:t>
             </a:r>
             <a:endParaRPr lang="en-US" sz="2800" dirty="0"/>
           </a:p>
@@ -11880,7 +11946,7 @@
                 <a:ea typeface="Calibri" pitchFamily="34" charset="-122"/>
                 <a:cs typeface="Calibri" pitchFamily="34" charset="-120"/>
               </a:rPr>
-              <a:t>Word Labs  •  wordlabs.app  •  Root: 'round' = circular shape or movement</a:t>
+              <a:t>Word Labs  •  wordlabs.app  •  Root: 'round' = shaped like a circle</a:t>
             </a:r>
             <a:endParaRPr lang="en-US" sz="800" dirty="0"/>
           </a:p>
@@ -12019,7 +12085,7 @@
                 <a:ea typeface="Trebuchet MS" pitchFamily="34" charset="-122"/>
                 <a:cs typeface="Trebuchet MS" pitchFamily="34" charset="-120"/>
               </a:rPr>
-              <a:t>surround</a:t>
+              <a:t>roundest</a:t>
             </a:r>
             <a:endParaRPr lang="en-US" sz="2800" dirty="0"/>
           </a:p>
@@ -12108,11 +12174,11 @@
             </a:avLst>
           </a:prstGeom>
           <a:solidFill>
-            <a:srgbClr val="DDD6FE"/>
+            <a:srgbClr val="CCFBF1"/>
           </a:solidFill>
           <a:ln w="19050">
             <a:solidFill>
-              <a:srgbClr val="7C3AED"/>
+              <a:srgbClr val="0D9488"/>
             </a:solidFill>
             <a:prstDash val="solid"/>
           </a:ln>
@@ -12152,13 +12218,13 @@
             <a:r>
               <a:rPr lang="en-US" sz="1300" b="1" dirty="0">
                 <a:solidFill>
-                  <a:srgbClr val="4C1D95"/>
+                  <a:srgbClr val="0F766E"/>
                 </a:solidFill>
                 <a:latin typeface="Trebuchet MS" pitchFamily="34" charset="0"/>
                 <a:ea typeface="Trebuchet MS" pitchFamily="34" charset="-122"/>
                 <a:cs typeface="Trebuchet MS" pitchFamily="34" charset="-120"/>
               </a:rPr>
-              <a:t>sur</a:t>
+              <a:t>round</a:t>
             </a:r>
             <a:endParaRPr lang="en-US" sz="1300" dirty="0"/>
           </a:p>
@@ -12197,7 +12263,7 @@
                 <a:ea typeface="Calibri" pitchFamily="34" charset="-122"/>
                 <a:cs typeface="Calibri" pitchFamily="34" charset="-120"/>
               </a:rPr>
-              <a:t>over or above</a:t>
+              <a:t>shaped like a circle</a:t>
             </a:r>
             <a:endParaRPr lang="en-US" sz="850" dirty="0"/>
           </a:p>
@@ -12220,11 +12286,11 @@
             </a:avLst>
           </a:prstGeom>
           <a:solidFill>
-            <a:srgbClr val="CCFBF1"/>
+            <a:srgbClr val="FCE7F3"/>
           </a:solidFill>
           <a:ln w="19050">
             <a:solidFill>
-              <a:srgbClr val="0D9488"/>
+              <a:srgbClr val="DB2777"/>
             </a:solidFill>
             <a:prstDash val="solid"/>
           </a:ln>
@@ -12264,13 +12330,13 @@
             <a:r>
               <a:rPr lang="en-US" sz="1300" b="1" dirty="0">
                 <a:solidFill>
-                  <a:srgbClr val="0F766E"/>
+                  <a:srgbClr val="9D174D"/>
                 </a:solidFill>
                 <a:latin typeface="Trebuchet MS" pitchFamily="34" charset="0"/>
                 <a:ea typeface="Trebuchet MS" pitchFamily="34" charset="-122"/>
                 <a:cs typeface="Trebuchet MS" pitchFamily="34" charset="-120"/>
               </a:rPr>
-              <a:t>round</a:t>
+              <a:t>est</a:t>
             </a:r>
             <a:endParaRPr lang="en-US" sz="1300" dirty="0"/>
           </a:p>
@@ -12309,7 +12375,7 @@
                 <a:ea typeface="Calibri" pitchFamily="34" charset="-122"/>
                 <a:cs typeface="Calibri" pitchFamily="34" charset="-120"/>
               </a:rPr>
-              <a:t>circular shape</a:t>
+              <a:t>most</a:t>
             </a:r>
             <a:endParaRPr lang="en-US" sz="850" dirty="0"/>
           </a:p>
@@ -12865,7 +12931,7 @@
                 <a:ea typeface="Calibri" pitchFamily="34" charset="-122"/>
                 <a:cs typeface="Calibri" pitchFamily="34" charset="-120"/>
               </a:rPr>
-              <a:t>Word Labs  •  wordlabs.app  •  Root: 'round' = circular shape or movement</a:t>
+              <a:t>Word Labs  •  wordlabs.app  •  Root: 'round' = shaped like a circle</a:t>
             </a:r>
             <a:endParaRPr lang="en-US" sz="800" dirty="0"/>
           </a:p>
@@ -13004,7 +13070,7 @@
                 <a:ea typeface="Trebuchet MS" pitchFamily="34" charset="-122"/>
                 <a:cs typeface="Trebuchet MS" pitchFamily="34" charset="-120"/>
               </a:rPr>
-              <a:t>surround</a:t>
+              <a:t>roundest</a:t>
             </a:r>
             <a:endParaRPr lang="en-US" sz="2800" dirty="0"/>
           </a:p>
@@ -13093,11 +13159,11 @@
             </a:avLst>
           </a:prstGeom>
           <a:solidFill>
-            <a:srgbClr val="DDD6FE"/>
+            <a:srgbClr val="CCFBF1"/>
           </a:solidFill>
           <a:ln w="19050">
             <a:solidFill>
-              <a:srgbClr val="7C3AED"/>
+              <a:srgbClr val="0D9488"/>
             </a:solidFill>
             <a:prstDash val="solid"/>
           </a:ln>
@@ -13137,13 +13203,13 @@
             <a:r>
               <a:rPr lang="en-US" sz="1300" b="1" dirty="0">
                 <a:solidFill>
-                  <a:srgbClr val="4C1D95"/>
+                  <a:srgbClr val="0F766E"/>
                 </a:solidFill>
                 <a:latin typeface="Trebuchet MS" pitchFamily="34" charset="0"/>
                 <a:ea typeface="Trebuchet MS" pitchFamily="34" charset="-122"/>
                 <a:cs typeface="Trebuchet MS" pitchFamily="34" charset="-120"/>
               </a:rPr>
-              <a:t>sur</a:t>
+              <a:t>round</a:t>
             </a:r>
             <a:endParaRPr lang="en-US" sz="1300" dirty="0"/>
           </a:p>
@@ -13182,7 +13248,7 @@
                 <a:ea typeface="Calibri" pitchFamily="34" charset="-122"/>
                 <a:cs typeface="Calibri" pitchFamily="34" charset="-120"/>
               </a:rPr>
-              <a:t>over or above</a:t>
+              <a:t>shaped like a circle</a:t>
             </a:r>
             <a:endParaRPr lang="en-US" sz="850" dirty="0"/>
           </a:p>
@@ -13205,11 +13271,11 @@
             </a:avLst>
           </a:prstGeom>
           <a:solidFill>
-            <a:srgbClr val="CCFBF1"/>
+            <a:srgbClr val="FCE7F3"/>
           </a:solidFill>
           <a:ln w="19050">
             <a:solidFill>
-              <a:srgbClr val="0D9488"/>
+              <a:srgbClr val="DB2777"/>
             </a:solidFill>
             <a:prstDash val="solid"/>
           </a:ln>
@@ -13249,13 +13315,13 @@
             <a:r>
               <a:rPr lang="en-US" sz="1300" b="1" dirty="0">
                 <a:solidFill>
-                  <a:srgbClr val="0F766E"/>
+                  <a:srgbClr val="9D174D"/>
                 </a:solidFill>
                 <a:latin typeface="Trebuchet MS" pitchFamily="34" charset="0"/>
                 <a:ea typeface="Trebuchet MS" pitchFamily="34" charset="-122"/>
                 <a:cs typeface="Trebuchet MS" pitchFamily="34" charset="-120"/>
               </a:rPr>
-              <a:t>round</a:t>
+              <a:t>est</a:t>
             </a:r>
             <a:endParaRPr lang="en-US" sz="1300" dirty="0"/>
           </a:p>
@@ -13294,7 +13360,7 @@
                 <a:ea typeface="Calibri" pitchFamily="34" charset="-122"/>
                 <a:cs typeface="Calibri" pitchFamily="34" charset="-120"/>
               </a:rPr>
-              <a:t>circular shape</a:t>
+              <a:t>most</a:t>
             </a:r>
             <a:endParaRPr lang="en-US" sz="850" dirty="0"/>
           </a:p>
@@ -13453,7 +13519,7 @@
                 <a:ea typeface="Trebuchet MS" pitchFamily="34" charset="-122"/>
                 <a:cs typeface="Trebuchet MS" pitchFamily="34" charset="-120"/>
               </a:rPr>
-              <a:t>sur</a:t>
+              <a:t>round</a:t>
             </a:r>
             <a:endParaRPr lang="en-US" sz="1400" dirty="0"/>
           </a:p>
@@ -13558,7 +13624,7 @@
                 <a:ea typeface="Trebuchet MS" pitchFamily="34" charset="-122"/>
                 <a:cs typeface="Trebuchet MS" pitchFamily="34" charset="-120"/>
               </a:rPr>
-              <a:t>round</a:t>
+              <a:t>est</a:t>
             </a:r>
             <a:endParaRPr lang="en-US" sz="1400" dirty="0"/>
           </a:p>
@@ -13891,7 +13957,7 @@
                 <a:ea typeface="Calibri" pitchFamily="34" charset="-122"/>
                 <a:cs typeface="Calibri" pitchFamily="34" charset="-120"/>
               </a:rPr>
-              <a:t>Root 'round' — circular shape or movement</a:t>
+              <a:t>Root 'round' — shaped like a circle</a:t>
             </a:r>
             <a:endParaRPr lang="en-US" sz="1600" dirty="0"/>
           </a:p>
@@ -14247,7 +14313,7 @@
                 <a:ea typeface="Calibri" pitchFamily="34" charset="-122"/>
                 <a:cs typeface="Calibri" pitchFamily="34" charset="-120"/>
               </a:rPr>
-              <a:t>Word Labs  •  wordlabs.app  •  Root: 'round' = circular shape or movement</a:t>
+              <a:t>Word Labs  •  wordlabs.app  •  Root: 'round' = shaped like a circle</a:t>
             </a:r>
             <a:endParaRPr lang="en-US" sz="800" dirty="0"/>
           </a:p>
@@ -14386,7 +14452,7 @@
                 <a:ea typeface="Trebuchet MS" pitchFamily="34" charset="-122"/>
                 <a:cs typeface="Trebuchet MS" pitchFamily="34" charset="-120"/>
               </a:rPr>
-              <a:t>surround</a:t>
+              <a:t>roundest</a:t>
             </a:r>
             <a:endParaRPr lang="en-US" sz="2800" dirty="0"/>
           </a:p>
@@ -14475,11 +14541,11 @@
             </a:avLst>
           </a:prstGeom>
           <a:solidFill>
-            <a:srgbClr val="DDD6FE"/>
+            <a:srgbClr val="CCFBF1"/>
           </a:solidFill>
           <a:ln w="19050">
             <a:solidFill>
-              <a:srgbClr val="7C3AED"/>
+              <a:srgbClr val="0D9488"/>
             </a:solidFill>
             <a:prstDash val="solid"/>
           </a:ln>
@@ -14519,13 +14585,13 @@
             <a:r>
               <a:rPr lang="en-US" sz="1300" b="1" dirty="0">
                 <a:solidFill>
-                  <a:srgbClr val="4C1D95"/>
+                  <a:srgbClr val="0F766E"/>
                 </a:solidFill>
                 <a:latin typeface="Trebuchet MS" pitchFamily="34" charset="0"/>
                 <a:ea typeface="Trebuchet MS" pitchFamily="34" charset="-122"/>
                 <a:cs typeface="Trebuchet MS" pitchFamily="34" charset="-120"/>
               </a:rPr>
-              <a:t>sur</a:t>
+              <a:t>round</a:t>
             </a:r>
             <a:endParaRPr lang="en-US" sz="1300" dirty="0"/>
           </a:p>
@@ -14564,7 +14630,7 @@
                 <a:ea typeface="Calibri" pitchFamily="34" charset="-122"/>
                 <a:cs typeface="Calibri" pitchFamily="34" charset="-120"/>
               </a:rPr>
-              <a:t>over or above</a:t>
+              <a:t>shaped like a circle</a:t>
             </a:r>
             <a:endParaRPr lang="en-US" sz="850" dirty="0"/>
           </a:p>
@@ -14587,11 +14653,11 @@
             </a:avLst>
           </a:prstGeom>
           <a:solidFill>
-            <a:srgbClr val="CCFBF1"/>
+            <a:srgbClr val="FCE7F3"/>
           </a:solidFill>
           <a:ln w="19050">
             <a:solidFill>
-              <a:srgbClr val="0D9488"/>
+              <a:srgbClr val="DB2777"/>
             </a:solidFill>
             <a:prstDash val="solid"/>
           </a:ln>
@@ -14631,13 +14697,13 @@
             <a:r>
               <a:rPr lang="en-US" sz="1300" b="1" dirty="0">
                 <a:solidFill>
-                  <a:srgbClr val="0F766E"/>
+                  <a:srgbClr val="9D174D"/>
                 </a:solidFill>
                 <a:latin typeface="Trebuchet MS" pitchFamily="34" charset="0"/>
                 <a:ea typeface="Trebuchet MS" pitchFamily="34" charset="-122"/>
                 <a:cs typeface="Trebuchet MS" pitchFamily="34" charset="-120"/>
               </a:rPr>
-              <a:t>round</a:t>
+              <a:t>est</a:t>
             </a:r>
             <a:endParaRPr lang="en-US" sz="1300" dirty="0"/>
           </a:p>
@@ -14676,7 +14742,7 @@
                 <a:ea typeface="Calibri" pitchFamily="34" charset="-122"/>
                 <a:cs typeface="Calibri" pitchFamily="34" charset="-120"/>
               </a:rPr>
-              <a:t>circular shape</a:t>
+              <a:t>most</a:t>
             </a:r>
             <a:endParaRPr lang="en-US" sz="850" dirty="0"/>
           </a:p>
@@ -14835,7 +14901,7 @@
                 <a:ea typeface="Trebuchet MS" pitchFamily="34" charset="-122"/>
                 <a:cs typeface="Trebuchet MS" pitchFamily="34" charset="-120"/>
               </a:rPr>
-              <a:t>sur</a:t>
+              <a:t>round</a:t>
             </a:r>
             <a:endParaRPr lang="en-US" sz="1400" dirty="0"/>
           </a:p>
@@ -14940,7 +15006,7 @@
                 <a:ea typeface="Trebuchet MS" pitchFamily="34" charset="-122"/>
                 <a:cs typeface="Trebuchet MS" pitchFamily="34" charset="-120"/>
               </a:rPr>
-              <a:t>round</a:t>
+              <a:t>est</a:t>
             </a:r>
             <a:endParaRPr lang="en-US" sz="1400" dirty="0"/>
           </a:p>
@@ -15047,7 +15113,7 @@
         </p:nvSpPr>
         <p:spPr>
           <a:xfrm>
-            <a:off x="2427732" y="4169664"/>
+            <a:off x="2124837" y="4169664"/>
             <a:ext cx="685800" cy="475488"/>
           </a:xfrm>
           <a:prstGeom prst="rect">
@@ -15074,7 +15140,7 @@
         </p:nvSpPr>
         <p:spPr>
           <a:xfrm>
-            <a:off x="2427732" y="4169664"/>
+            <a:off x="2124837" y="4169664"/>
             <a:ext cx="685800" cy="475488"/>
           </a:xfrm>
           <a:prstGeom prst="rect">
@@ -15099,7 +15165,7 @@
                 <a:ea typeface="Trebuchet MS" pitchFamily="34" charset="-122"/>
                 <a:cs typeface="Trebuchet MS" pitchFamily="34" charset="-120"/>
               </a:rPr>
-              <a:t>s</a:t>
+              <a:t>r</a:t>
             </a:r>
             <a:endParaRPr lang="en-US" sz="900" dirty="0"/>
           </a:p>
@@ -15113,7 +15179,7 @@
         </p:nvSpPr>
         <p:spPr>
           <a:xfrm>
-            <a:off x="3639312" y="4169664"/>
+            <a:off x="3033522" y="4169664"/>
             <a:ext cx="685800" cy="475488"/>
           </a:xfrm>
           <a:prstGeom prst="rect">
@@ -15140,7 +15206,7 @@
         </p:nvSpPr>
         <p:spPr>
           <a:xfrm>
-            <a:off x="3639312" y="4169664"/>
+            <a:off x="3033522" y="4169664"/>
             <a:ext cx="685800" cy="475488"/>
           </a:xfrm>
           <a:prstGeom prst="rect">
@@ -15165,7 +15231,7 @@
                 <a:ea typeface="Trebuchet MS" pitchFamily="34" charset="-122"/>
                 <a:cs typeface="Trebuchet MS" pitchFamily="34" charset="-120"/>
               </a:rPr>
-              <a:t>ur</a:t>
+              <a:t>ou</a:t>
             </a:r>
             <a:endParaRPr lang="en-US" sz="900" dirty="0"/>
           </a:p>
@@ -15179,7 +15245,7 @@
         </p:nvSpPr>
         <p:spPr>
           <a:xfrm>
-            <a:off x="4850892" y="4169664"/>
+            <a:off x="3942207" y="4169664"/>
             <a:ext cx="685800" cy="475488"/>
           </a:xfrm>
           <a:prstGeom prst="rect">
@@ -15206,7 +15272,7 @@
         </p:nvSpPr>
         <p:spPr>
           <a:xfrm>
-            <a:off x="4850892" y="4169664"/>
+            <a:off x="3942207" y="4169664"/>
             <a:ext cx="685800" cy="475488"/>
           </a:xfrm>
           <a:prstGeom prst="rect">
@@ -15231,7 +15297,7 @@
                 <a:ea typeface="Trebuchet MS" pitchFamily="34" charset="-122"/>
                 <a:cs typeface="Trebuchet MS" pitchFamily="34" charset="-120"/>
               </a:rPr>
-              <a:t>r</a:t>
+              <a:t>n</a:t>
             </a:r>
             <a:endParaRPr lang="en-US" sz="900" dirty="0"/>
           </a:p>
@@ -15245,7 +15311,7 @@
         </p:nvSpPr>
         <p:spPr>
           <a:xfrm>
-            <a:off x="6062472" y="4169664"/>
+            <a:off x="4850892" y="4169664"/>
             <a:ext cx="685800" cy="475488"/>
           </a:xfrm>
           <a:prstGeom prst="rect">
@@ -15272,7 +15338,7 @@
         </p:nvSpPr>
         <p:spPr>
           <a:xfrm>
-            <a:off x="6062472" y="4169664"/>
+            <a:off x="4850892" y="4169664"/>
             <a:ext cx="685800" cy="475488"/>
           </a:xfrm>
           <a:prstGeom prst="rect">
@@ -15297,7 +15363,7 @@
                 <a:ea typeface="Trebuchet MS" pitchFamily="34" charset="-122"/>
                 <a:cs typeface="Trebuchet MS" pitchFamily="34" charset="-120"/>
               </a:rPr>
-              <a:t>ou</a:t>
+              <a:t>d</a:t>
             </a:r>
             <a:endParaRPr lang="en-US" sz="900" dirty="0"/>
           </a:p>
@@ -15311,7 +15377,7 @@
         </p:nvSpPr>
         <p:spPr>
           <a:xfrm>
-            <a:off x="7274052" y="4169664"/>
+            <a:off x="5759577" y="4169664"/>
             <a:ext cx="685800" cy="475488"/>
           </a:xfrm>
           <a:prstGeom prst="rect">
@@ -15338,7 +15404,7 @@
         </p:nvSpPr>
         <p:spPr>
           <a:xfrm>
-            <a:off x="7274052" y="4169664"/>
+            <a:off x="5759577" y="4169664"/>
             <a:ext cx="685800" cy="475488"/>
           </a:xfrm>
           <a:prstGeom prst="rect">
@@ -15363,7 +15429,139 @@
                 <a:ea typeface="Trebuchet MS" pitchFamily="34" charset="-122"/>
                 <a:cs typeface="Trebuchet MS" pitchFamily="34" charset="-120"/>
               </a:rPr>
-              <a:t>nd</a:t>
+              <a:t>e</a:t>
+            </a:r>
+            <a:endParaRPr lang="en-US" sz="900" dirty="0"/>
+          </a:p>
+        </p:txBody>
+      </p:sp>
+      <p:sp>
+        <p:nvSpPr>
+          <p:cNvPr id="43" name="Shape 41"/>
+          <p:cNvSpPr/>
+          <p:nvPr/>
+        </p:nvSpPr>
+        <p:spPr>
+          <a:xfrm>
+            <a:off x="6668262" y="4169664"/>
+            <a:ext cx="685800" cy="475488"/>
+          </a:xfrm>
+          <a:prstGeom prst="rect">
+            <a:avLst>
+              <a:gd name="adj" fmla="val 7692"/>
+            </a:avLst>
+          </a:prstGeom>
+          <a:solidFill>
+            <a:srgbClr val="FFFFFF"/>
+          </a:solidFill>
+          <a:ln w="12700">
+            <a:solidFill>
+              <a:srgbClr val="DB2777"/>
+            </a:solidFill>
+            <a:prstDash val="solid"/>
+          </a:ln>
+        </p:spPr>
+      </p:sp>
+      <p:sp>
+        <p:nvSpPr>
+          <p:cNvPr id="44" name="Text 42"/>
+          <p:cNvSpPr/>
+          <p:nvPr/>
+        </p:nvSpPr>
+        <p:spPr>
+          <a:xfrm>
+            <a:off x="6668262" y="4169664"/>
+            <a:ext cx="685800" cy="475488"/>
+          </a:xfrm>
+          <a:prstGeom prst="rect">
+            <a:avLst/>
+          </a:prstGeom>
+          <a:noFill/>
+          <a:ln/>
+        </p:spPr>
+        <p:txBody>
+          <a:bodyPr wrap="square" lIns="0" tIns="0" rIns="0" bIns="0" rtlCol="0" anchor="ctr"/>
+          <a:lstStyle/>
+          <a:p>
+            <a:pPr algn="ctr" indent="0" marL="0">
+              <a:buNone/>
+            </a:pPr>
+            <a:r>
+              <a:rPr lang="en-US" sz="900" b="1" dirty="0">
+                <a:solidFill>
+                  <a:srgbClr val="9D174D"/>
+                </a:solidFill>
+                <a:latin typeface="Trebuchet MS" pitchFamily="34" charset="0"/>
+                <a:ea typeface="Trebuchet MS" pitchFamily="34" charset="-122"/>
+                <a:cs typeface="Trebuchet MS" pitchFamily="34" charset="-120"/>
+              </a:rPr>
+              <a:t>s</a:t>
+            </a:r>
+            <a:endParaRPr lang="en-US" sz="900" dirty="0"/>
+          </a:p>
+        </p:txBody>
+      </p:sp>
+      <p:sp>
+        <p:nvSpPr>
+          <p:cNvPr id="45" name="Shape 43"/>
+          <p:cNvSpPr/>
+          <p:nvPr/>
+        </p:nvSpPr>
+        <p:spPr>
+          <a:xfrm>
+            <a:off x="7576947" y="4169664"/>
+            <a:ext cx="685800" cy="475488"/>
+          </a:xfrm>
+          <a:prstGeom prst="rect">
+            <a:avLst>
+              <a:gd name="adj" fmla="val 7692"/>
+            </a:avLst>
+          </a:prstGeom>
+          <a:solidFill>
+            <a:srgbClr val="FFFFFF"/>
+          </a:solidFill>
+          <a:ln w="12700">
+            <a:solidFill>
+              <a:srgbClr val="DB2777"/>
+            </a:solidFill>
+            <a:prstDash val="solid"/>
+          </a:ln>
+        </p:spPr>
+      </p:sp>
+      <p:sp>
+        <p:nvSpPr>
+          <p:cNvPr id="46" name="Text 44"/>
+          <p:cNvSpPr/>
+          <p:nvPr/>
+        </p:nvSpPr>
+        <p:spPr>
+          <a:xfrm>
+            <a:off x="7576947" y="4169664"/>
+            <a:ext cx="685800" cy="475488"/>
+          </a:xfrm>
+          <a:prstGeom prst="rect">
+            <a:avLst/>
+          </a:prstGeom>
+          <a:noFill/>
+          <a:ln/>
+        </p:spPr>
+        <p:txBody>
+          <a:bodyPr wrap="square" lIns="0" tIns="0" rIns="0" bIns="0" rtlCol="0" anchor="ctr"/>
+          <a:lstStyle/>
+          <a:p>
+            <a:pPr algn="ctr" indent="0" marL="0">
+              <a:buNone/>
+            </a:pPr>
+            <a:r>
+              <a:rPr lang="en-US" sz="900" b="1" dirty="0">
+                <a:solidFill>
+                  <a:srgbClr val="9D174D"/>
+                </a:solidFill>
+                <a:latin typeface="Trebuchet MS" pitchFamily="34" charset="0"/>
+                <a:ea typeface="Trebuchet MS" pitchFamily="34" charset="-122"/>
+                <a:cs typeface="Trebuchet MS" pitchFamily="34" charset="-120"/>
+              </a:rPr>
+              <a:t>t</a:t>
             </a:r>
             <a:endParaRPr lang="en-US" sz="900" dirty="0"/>
           </a:p>
@@ -15937,7 +16135,7 @@
                 <a:ea typeface="Calibri" pitchFamily="34" charset="-122"/>
                 <a:cs typeface="Calibri" pitchFamily="34" charset="-120"/>
               </a:rPr>
-              <a:t>Word Labs  •  wordlabs.app  •  Root: 'round' = circular shape or movement</a:t>
+              <a:t>Word Labs  •  wordlabs.app  •  Root: 'round' = shaped like a circle</a:t>
             </a:r>
             <a:endParaRPr lang="en-US" sz="800" dirty="0"/>
           </a:p>
@@ -16271,7 +16469,7 @@
                 <a:ea typeface="Trebuchet MS" pitchFamily="34" charset="-122"/>
                 <a:cs typeface="Trebuchet MS" pitchFamily="34" charset="-120"/>
               </a:rPr>
-              <a:t>1</a:t>
+              <a:t>0</a:t>
             </a:r>
             <a:pPr algn="ctr" indent="0" marL="0">
               <a:buNone/>
@@ -16577,7 +16775,7 @@
                 <a:ea typeface="Calibri" pitchFamily="34" charset="-122"/>
                 <a:cs typeface="Calibri" pitchFamily="34" charset="-120"/>
               </a:rPr>
-              <a:t>Word Labs  •  wordlabs.app  •  Root: 'round' = circular shape or movement</a:t>
+              <a:t>Word Labs  •  wordlabs.app  •  Root: 'round' = shaped like a circle</a:t>
             </a:r>
             <a:endParaRPr lang="en-US" sz="800" dirty="0"/>
           </a:p>
@@ -16689,7 +16887,7 @@
                 <a:ea typeface="Calibri" pitchFamily="34" charset="-122"/>
                 <a:cs typeface="Calibri" pitchFamily="34" charset="-120"/>
               </a:rPr>
-              <a:t>The </a:t>
+              <a:t>We practised </a:t>
             </a:r>
             <a:pPr algn="l" indent="0" marL="0">
               <a:buNone/>
@@ -16706,7 +16904,7 @@
                 <a:ea typeface="Calibri" pitchFamily="34" charset="-122"/>
                 <a:cs typeface="Calibri" pitchFamily="34" charset="-120"/>
               </a:rPr>
-              <a:t>surrounding</a:t>
+              <a:t>rounding</a:t>
             </a:r>
             <a:pPr algn="l" indent="0" marL="0">
               <a:buNone/>
@@ -16720,7 +16918,7 @@
                 <a:ea typeface="Calibri" pitchFamily="34" charset="-122"/>
                 <a:cs typeface="Calibri" pitchFamily="34" charset="-120"/>
               </a:rPr>
-              <a:t> hills are </a:t>
+              <a:t> numbers to the nearest ten in maths today. The </a:t>
             </a:r>
             <a:pPr algn="l" indent="0" marL="0">
               <a:buNone/>
@@ -16737,7 +16935,7 @@
                 <a:ea typeface="Calibri" pitchFamily="34" charset="-122"/>
                 <a:cs typeface="Calibri" pitchFamily="34" charset="-120"/>
               </a:rPr>
-              <a:t>roundly</a:t>
+              <a:t>roundness</a:t>
             </a:r>
             <a:pPr algn="l" indent="0" marL="0">
               <a:buNone/>
@@ -16751,7 +16949,7 @@
                 <a:ea typeface="Calibri" pitchFamily="34" charset="-122"/>
                 <a:cs typeface="Calibri" pitchFamily="34" charset="-120"/>
               </a:rPr>
-              <a:t> praised for their beauty, so tourists visit the </a:t>
+              <a:t> of the moon makes it easy to recognise in the sky. We walked </a:t>
             </a:r>
             <a:pPr algn="l" indent="0" marL="0">
               <a:buNone/>
@@ -16768,7 +16966,7 @@
                 <a:ea typeface="Calibri" pitchFamily="34" charset="-122"/>
                 <a:cs typeface="Calibri" pitchFamily="34" charset="-120"/>
               </a:rPr>
-              <a:t>roundabout</a:t>
+              <a:t>around</a:t>
             </a:r>
             <a:pPr algn="l" indent="0" marL="0">
               <a:buNone/>
@@ -16782,7 +16980,7 @@
                 <a:ea typeface="Calibri" pitchFamily="34" charset="-122"/>
                 <a:cs typeface="Calibri" pitchFamily="34" charset="-120"/>
               </a:rPr>
-              <a:t> town each year.</a:t>
+              <a:t> the lake before lunch.</a:t>
             </a:r>
             <a:endParaRPr lang="en-US" sz="1800" dirty="0"/>
           </a:p>
@@ -16937,7 +17135,7 @@
                 <a:ea typeface="Trebuchet MS" pitchFamily="34" charset="-122"/>
                 <a:cs typeface="Trebuchet MS" pitchFamily="34" charset="-120"/>
               </a:rPr>
-              <a:t>surrounding</a:t>
+              <a:t>rounding</a:t>
             </a:r>
             <a:endParaRPr lang="en-US" sz="1400" dirty="0"/>
           </a:p>
@@ -17065,7 +17263,7 @@
                 <a:ea typeface="Trebuchet MS" pitchFamily="34" charset="-122"/>
                 <a:cs typeface="Trebuchet MS" pitchFamily="34" charset="-120"/>
               </a:rPr>
-              <a:t>roundly</a:t>
+              <a:t>roundness</a:t>
             </a:r>
             <a:endParaRPr lang="en-US" sz="1400" dirty="0"/>
           </a:p>
@@ -17193,7 +17391,7 @@
                 <a:ea typeface="Trebuchet MS" pitchFamily="34" charset="-122"/>
                 <a:cs typeface="Trebuchet MS" pitchFamily="34" charset="-120"/>
               </a:rPr>
-              <a:t>roundabout</a:t>
+              <a:t>around</a:t>
             </a:r>
             <a:endParaRPr lang="en-US" sz="1400" dirty="0"/>
           </a:p>
@@ -17524,7 +17722,7 @@
                 <a:ea typeface="Calibri" pitchFamily="34" charset="-122"/>
                 <a:cs typeface="Calibri" pitchFamily="34" charset="-120"/>
               </a:rPr>
-              <a:t>Word Labs  •  wordlabs.app  •  Root: 'round' = circular shape or movement</a:t>
+              <a:t>Word Labs  •  wordlabs.app  •  Root: 'round' = shaped like a circle</a:t>
             </a:r>
             <a:endParaRPr lang="en-US" sz="800" dirty="0"/>
           </a:p>
@@ -17663,7 +17861,7 @@
                 <a:ea typeface="Trebuchet MS" pitchFamily="34" charset="-122"/>
                 <a:cs typeface="Trebuchet MS" pitchFamily="34" charset="-120"/>
               </a:rPr>
-              <a:t>surrounding</a:t>
+              <a:t>rounding</a:t>
             </a:r>
             <a:endParaRPr lang="en-US" sz="2800" dirty="0"/>
           </a:p>
@@ -18351,7 +18549,7 @@
                 <a:ea typeface="Calibri" pitchFamily="34" charset="-122"/>
                 <a:cs typeface="Calibri" pitchFamily="34" charset="-120"/>
               </a:rPr>
-              <a:t>Word Labs  •  wordlabs.app  •  Root: 'round' = circular shape or movement</a:t>
+              <a:t>Word Labs  •  wordlabs.app  •  Root: 'round' = shaped like a circle</a:t>
             </a:r>
             <a:endParaRPr lang="en-US" sz="800" dirty="0"/>
           </a:p>
@@ -18490,7 +18688,7 @@
                 <a:ea typeface="Trebuchet MS" pitchFamily="34" charset="-122"/>
                 <a:cs typeface="Trebuchet MS" pitchFamily="34" charset="-120"/>
               </a:rPr>
-              <a:t>surrounding</a:t>
+              <a:t>rounding</a:t>
             </a:r>
             <a:endParaRPr lang="en-US" sz="2800" dirty="0"/>
           </a:p>
@@ -18570,7 +18768,7 @@
         </p:nvSpPr>
         <p:spPr>
           <a:xfrm>
-            <a:off x="2221992" y="2258568"/>
+            <a:off x="2938272" y="2258568"/>
             <a:ext cx="1828800" cy="292608"/>
           </a:xfrm>
           <a:prstGeom prst="rect">
@@ -18579,11 +18777,11 @@
             </a:avLst>
           </a:prstGeom>
           <a:solidFill>
-            <a:srgbClr val="DDD6FE"/>
+            <a:srgbClr val="CCFBF1"/>
           </a:solidFill>
           <a:ln w="19050">
             <a:solidFill>
-              <a:srgbClr val="7C3AED"/>
+              <a:srgbClr val="0D9488"/>
             </a:solidFill>
             <a:prstDash val="solid"/>
           </a:ln>
@@ -18604,7 +18802,7 @@
         </p:nvSpPr>
         <p:spPr>
           <a:xfrm>
-            <a:off x="2221992" y="2258568"/>
+            <a:off x="2938272" y="2258568"/>
             <a:ext cx="1828800" cy="292608"/>
           </a:xfrm>
           <a:prstGeom prst="rect">
@@ -18623,13 +18821,13 @@
             <a:r>
               <a:rPr lang="en-US" sz="1300" b="1" dirty="0">
                 <a:solidFill>
-                  <a:srgbClr val="4C1D95"/>
+                  <a:srgbClr val="0F766E"/>
                 </a:solidFill>
                 <a:latin typeface="Trebuchet MS" pitchFamily="34" charset="0"/>
                 <a:ea typeface="Trebuchet MS" pitchFamily="34" charset="-122"/>
                 <a:cs typeface="Trebuchet MS" pitchFamily="34" charset="-120"/>
               </a:rPr>
-              <a:t>sur</a:t>
+              <a:t>round</a:t>
             </a:r>
             <a:endParaRPr lang="en-US" sz="1300" dirty="0"/>
           </a:p>
@@ -18643,7 +18841,7 @@
         </p:nvSpPr>
         <p:spPr>
           <a:xfrm>
-            <a:off x="2221992" y="2569464"/>
+            <a:off x="2938272" y="2569464"/>
             <a:ext cx="1828800" cy="201168"/>
           </a:xfrm>
           <a:prstGeom prst="rect">
@@ -18668,7 +18866,7 @@
                 <a:ea typeface="Calibri" pitchFamily="34" charset="-122"/>
                 <a:cs typeface="Calibri" pitchFamily="34" charset="-120"/>
               </a:rPr>
-              <a:t>over or above</a:t>
+              <a:t>shaped like a circle</a:t>
             </a:r>
             <a:endParaRPr lang="en-US" sz="850" dirty="0"/>
           </a:p>
@@ -18682,7 +18880,7 @@
         </p:nvSpPr>
         <p:spPr>
           <a:xfrm>
-            <a:off x="4370832" y="2258568"/>
+            <a:off x="5803392" y="2258568"/>
             <a:ext cx="1828800" cy="292608"/>
           </a:xfrm>
           <a:prstGeom prst="rect">
@@ -18691,11 +18889,11 @@
             </a:avLst>
           </a:prstGeom>
           <a:solidFill>
-            <a:srgbClr val="CCFBF1"/>
+            <a:srgbClr val="FCE7F3"/>
           </a:solidFill>
           <a:ln w="19050">
             <a:solidFill>
-              <a:srgbClr val="0D9488"/>
+              <a:srgbClr val="DB2777"/>
             </a:solidFill>
             <a:prstDash val="solid"/>
           </a:ln>
@@ -18716,7 +18914,7 @@
         </p:nvSpPr>
         <p:spPr>
           <a:xfrm>
-            <a:off x="4370832" y="2258568"/>
+            <a:off x="5803392" y="2258568"/>
             <a:ext cx="1828800" cy="292608"/>
           </a:xfrm>
           <a:prstGeom prst="rect">
@@ -18735,13 +18933,13 @@
             <a:r>
               <a:rPr lang="en-US" sz="1300" b="1" dirty="0">
                 <a:solidFill>
-                  <a:srgbClr val="0F766E"/>
+                  <a:srgbClr val="9D174D"/>
                 </a:solidFill>
                 <a:latin typeface="Trebuchet MS" pitchFamily="34" charset="0"/>
                 <a:ea typeface="Trebuchet MS" pitchFamily="34" charset="-122"/>
                 <a:cs typeface="Trebuchet MS" pitchFamily="34" charset="-120"/>
               </a:rPr>
-              <a:t>round</a:t>
+              <a:t>ing</a:t>
             </a:r>
             <a:endParaRPr lang="en-US" sz="1300" dirty="0"/>
           </a:p>
@@ -18755,7 +18953,7 @@
         </p:nvSpPr>
         <p:spPr>
           <a:xfrm>
-            <a:off x="4370832" y="2569464"/>
+            <a:off x="5803392" y="2569464"/>
             <a:ext cx="1828800" cy="201168"/>
           </a:xfrm>
           <a:prstGeom prst="rect">
@@ -18780,7 +18978,7 @@
                 <a:ea typeface="Calibri" pitchFamily="34" charset="-122"/>
                 <a:cs typeface="Calibri" pitchFamily="34" charset="-120"/>
               </a:rPr>
-              <a:t>circular shape</a:t>
+              <a:t>happening now</a:t>
             </a:r>
             <a:endParaRPr lang="en-US" sz="850" dirty="0"/>
           </a:p>
@@ -18794,30 +18992,23 @@
         </p:nvSpPr>
         <p:spPr>
           <a:xfrm>
-            <a:off x="6519672" y="2258568"/>
-            <a:ext cx="1828800" cy="292608"/>
+            <a:off x="365760" y="3273552"/>
+            <a:ext cx="1371600" cy="658368"/>
           </a:xfrm>
           <a:prstGeom prst="rect">
             <a:avLst>
-              <a:gd name="adj" fmla="val 25000"/>
+              <a:gd name="adj" fmla="val 8333"/>
             </a:avLst>
           </a:prstGeom>
           <a:solidFill>
-            <a:srgbClr val="FCE7F3"/>
-          </a:solidFill>
-          <a:ln w="19050">
-            <a:solidFill>
-              <a:srgbClr val="DB2777"/>
-            </a:solidFill>
-            <a:prstDash val="solid"/>
-          </a:ln>
-          <a:effectLst>
-            <a:outerShdw sx="100000" sy="100000" kx="0" ky="0" algn="bl" rotWithShape="0" blurRad="101600" dist="38100" dir="8100000">
-              <a:srgbClr val="000000">
-                <a:alpha val="12000"/>
-              </a:srgbClr>
-            </a:outerShdw>
-          </a:effectLst>
+            <a:srgbClr val="E2E8F0"/>
+          </a:solidFill>
+          <a:ln w="12700">
+            <a:solidFill>
+              <a:srgbClr val="E2E8F0"/>
+            </a:solidFill>
+            <a:prstDash val="solid"/>
+          </a:ln>
         </p:spPr>
       </p:sp>
       <p:sp>
@@ -18828,8 +19019,8 @@
         </p:nvSpPr>
         <p:spPr>
           <a:xfrm>
-            <a:off x="6519672" y="2258568"/>
-            <a:ext cx="1828800" cy="292608"/>
+            <a:off x="365760" y="3273552"/>
+            <a:ext cx="1371600" cy="658368"/>
           </a:xfrm>
           <a:prstGeom prst="rect">
             <a:avLst/>
@@ -18845,73 +19036,100 @@
               <a:buNone/>
             </a:pPr>
             <a:r>
-              <a:rPr lang="en-US" sz="1300" b="1" dirty="0">
-                <a:solidFill>
-                  <a:srgbClr val="9D174D"/>
+              <a:rPr lang="en-US" sz="1100" b="1" dirty="0">
+                <a:solidFill>
+                  <a:srgbClr val="475569"/>
                 </a:solidFill>
                 <a:latin typeface="Trebuchet MS" pitchFamily="34" charset="0"/>
                 <a:ea typeface="Trebuchet MS" pitchFamily="34" charset="-122"/>
                 <a:cs typeface="Trebuchet MS" pitchFamily="34" charset="-120"/>
               </a:rPr>
-              <a:t>ing</a:t>
-            </a:r>
-            <a:endParaRPr lang="en-US" sz="1300" dirty="0"/>
-          </a:p>
-        </p:txBody>
-      </p:sp>
-      <p:sp>
-        <p:nvSpPr>
-          <p:cNvPr id="24" name="Text 22"/>
-          <p:cNvSpPr/>
-          <p:nvPr/>
-        </p:nvSpPr>
-        <p:spPr>
-          <a:xfrm>
-            <a:off x="6519672" y="2569464"/>
-            <a:ext cx="1828800" cy="201168"/>
-          </a:xfrm>
-          <a:prstGeom prst="rect">
-            <a:avLst/>
-          </a:prstGeom>
-          <a:noFill/>
-          <a:ln/>
-        </p:spPr>
-        <p:txBody>
-          <a:bodyPr wrap="square" lIns="0" tIns="0" rIns="0" bIns="0" rtlCol="0" anchor="t"/>
-          <a:lstStyle/>
-          <a:p>
-            <a:pPr algn="ctr" indent="0" marL="0">
-              <a:buNone/>
-            </a:pPr>
-            <a:r>
-              <a:rPr lang="en-US" sz="850" dirty="0">
-                <a:solidFill>
-                  <a:srgbClr val="475569"/>
+              <a:t>Syllables</a:t>
+            </a:r>
+            <a:endParaRPr lang="en-US" sz="1100" dirty="0"/>
+          </a:p>
+        </p:txBody>
+      </p:sp>
+      <p:sp>
+        <p:nvSpPr>
+          <p:cNvPr id="24" name="Shape 22"/>
+          <p:cNvSpPr/>
+          <p:nvPr/>
+        </p:nvSpPr>
+        <p:spPr>
+          <a:xfrm>
+            <a:off x="1874520" y="3273552"/>
+            <a:ext cx="6903720" cy="658368"/>
+          </a:xfrm>
+          <a:prstGeom prst="rect">
+            <a:avLst>
+              <a:gd name="adj" fmla="val 8333"/>
+            </a:avLst>
+          </a:prstGeom>
+          <a:solidFill>
+            <a:srgbClr val="F8FAFC"/>
+          </a:solidFill>
+          <a:ln w="12700">
+            <a:solidFill>
+              <a:srgbClr val="E2E8F0"/>
+            </a:solidFill>
+            <a:prstDash val="dash"/>
+          </a:ln>
+        </p:spPr>
+      </p:sp>
+      <p:sp>
+        <p:nvSpPr>
+          <p:cNvPr id="25" name="Text 23"/>
+          <p:cNvSpPr/>
+          <p:nvPr/>
+        </p:nvSpPr>
+        <p:spPr>
+          <a:xfrm>
+            <a:off x="1874520" y="3273552"/>
+            <a:ext cx="6903720" cy="658368"/>
+          </a:xfrm>
+          <a:prstGeom prst="rect">
+            <a:avLst/>
+          </a:prstGeom>
+          <a:noFill/>
+          <a:ln/>
+        </p:spPr>
+        <p:txBody>
+          <a:bodyPr wrap="square" rtlCol="0" anchor="ctr"/>
+          <a:lstStyle/>
+          <a:p>
+            <a:pPr algn="ctr" indent="0" marL="0">
+              <a:buNone/>
+            </a:pPr>
+            <a:r>
+              <a:rPr lang="en-US" sz="1100" i="1" dirty="0">
+                <a:solidFill>
+                  <a:srgbClr val="CBD5E1"/>
                 </a:solidFill>
                 <a:latin typeface="Calibri" pitchFamily="34" charset="0"/>
                 <a:ea typeface="Calibri" pitchFamily="34" charset="-122"/>
                 <a:cs typeface="Calibri" pitchFamily="34" charset="-120"/>
               </a:rPr>
-              <a:t>ongoing action or describing a quality</a:t>
-            </a:r>
-            <a:endParaRPr lang="en-US" sz="850" dirty="0"/>
-          </a:p>
-        </p:txBody>
-      </p:sp>
-      <p:sp>
-        <p:nvSpPr>
-          <p:cNvPr id="25" name="Shape 23"/>
-          <p:cNvSpPr/>
-          <p:nvPr/>
-        </p:nvSpPr>
-        <p:spPr>
-          <a:xfrm>
-            <a:off x="365760" y="3273552"/>
-            <a:ext cx="1371600" cy="658368"/>
+              <a:t>Write here...</a:t>
+            </a:r>
+            <a:endParaRPr lang="en-US" sz="1100" dirty="0"/>
+          </a:p>
+        </p:txBody>
+      </p:sp>
+      <p:sp>
+        <p:nvSpPr>
+          <p:cNvPr id="26" name="Shape 24"/>
+          <p:cNvSpPr/>
+          <p:nvPr/>
+        </p:nvSpPr>
+        <p:spPr>
+          <a:xfrm>
+            <a:off x="365760" y="4096512"/>
+            <a:ext cx="1371600" cy="804672"/>
           </a:xfrm>
           <a:prstGeom prst="rect">
             <a:avLst>
-              <a:gd name="adj" fmla="val 8333"/>
+              <a:gd name="adj" fmla="val 6818"/>
             </a:avLst>
           </a:prstGeom>
           <a:solidFill>
@@ -18927,14 +19145,14 @@
       </p:sp>
       <p:sp>
         <p:nvSpPr>
-          <p:cNvPr id="26" name="Text 24"/>
-          <p:cNvSpPr/>
-          <p:nvPr/>
-        </p:nvSpPr>
-        <p:spPr>
-          <a:xfrm>
-            <a:off x="365760" y="3273552"/>
-            <a:ext cx="1371600" cy="658368"/>
+          <p:cNvPr id="27" name="Text 25"/>
+          <p:cNvSpPr/>
+          <p:nvPr/>
+        </p:nvSpPr>
+        <p:spPr>
+          <a:xfrm>
+            <a:off x="365760" y="4096512"/>
+            <a:ext cx="1371600" cy="804672"/>
           </a:xfrm>
           <a:prstGeom prst="rect">
             <a:avLst/>
@@ -18958,7 +19176,7 @@
                 <a:ea typeface="Trebuchet MS" pitchFamily="34" charset="-122"/>
                 <a:cs typeface="Trebuchet MS" pitchFamily="34" charset="-120"/>
               </a:rPr>
-              <a:t>Syllables</a:t>
+              <a:t>Phonemes</a:t>
             </a:r>
             <a:endParaRPr lang="en-US" sz="1100" dirty="0"/>
           </a:p>
@@ -18966,80 +19184,14 @@
       </p:sp>
       <p:sp>
         <p:nvSpPr>
-          <p:cNvPr id="27" name="Shape 25"/>
-          <p:cNvSpPr/>
-          <p:nvPr/>
-        </p:nvSpPr>
-        <p:spPr>
-          <a:xfrm>
-            <a:off x="1874520" y="3273552"/>
-            <a:ext cx="6903720" cy="658368"/>
-          </a:xfrm>
-          <a:prstGeom prst="rect">
-            <a:avLst>
-              <a:gd name="adj" fmla="val 8333"/>
-            </a:avLst>
-          </a:prstGeom>
-          <a:solidFill>
-            <a:srgbClr val="F8FAFC"/>
-          </a:solidFill>
-          <a:ln w="12700">
-            <a:solidFill>
-              <a:srgbClr val="E2E8F0"/>
-            </a:solidFill>
-            <a:prstDash val="dash"/>
-          </a:ln>
-        </p:spPr>
-      </p:sp>
-      <p:sp>
-        <p:nvSpPr>
-          <p:cNvPr id="28" name="Text 26"/>
-          <p:cNvSpPr/>
-          <p:nvPr/>
-        </p:nvSpPr>
-        <p:spPr>
-          <a:xfrm>
-            <a:off x="1874520" y="3273552"/>
-            <a:ext cx="6903720" cy="658368"/>
-          </a:xfrm>
-          <a:prstGeom prst="rect">
-            <a:avLst/>
-          </a:prstGeom>
-          <a:noFill/>
-          <a:ln/>
-        </p:spPr>
-        <p:txBody>
-          <a:bodyPr wrap="square" rtlCol="0" anchor="ctr"/>
-          <a:lstStyle/>
-          <a:p>
-            <a:pPr algn="ctr" indent="0" marL="0">
-              <a:buNone/>
-            </a:pPr>
-            <a:r>
-              <a:rPr lang="en-US" sz="1100" i="1" dirty="0">
-                <a:solidFill>
-                  <a:srgbClr val="CBD5E1"/>
-                </a:solidFill>
-                <a:latin typeface="Calibri" pitchFamily="34" charset="0"/>
-                <a:ea typeface="Calibri" pitchFamily="34" charset="-122"/>
-                <a:cs typeface="Calibri" pitchFamily="34" charset="-120"/>
-              </a:rPr>
-              <a:t>Write here...</a:t>
-            </a:r>
-            <a:endParaRPr lang="en-US" sz="1100" dirty="0"/>
-          </a:p>
-        </p:txBody>
-      </p:sp>
-      <p:sp>
-        <p:nvSpPr>
-          <p:cNvPr id="29" name="Shape 27"/>
-          <p:cNvSpPr/>
-          <p:nvPr/>
-        </p:nvSpPr>
-        <p:spPr>
-          <a:xfrm>
-            <a:off x="365760" y="4096512"/>
-            <a:ext cx="1371600" cy="804672"/>
+          <p:cNvPr id="28" name="Shape 26"/>
+          <p:cNvSpPr/>
+          <p:nvPr/>
+        </p:nvSpPr>
+        <p:spPr>
+          <a:xfrm>
+            <a:off x="1874520" y="4096512"/>
+            <a:ext cx="6903720" cy="804672"/>
           </a:xfrm>
           <a:prstGeom prst="rect">
             <a:avLst>
@@ -19047,85 +19199,19 @@
             </a:avLst>
           </a:prstGeom>
           <a:solidFill>
-            <a:srgbClr val="E2E8F0"/>
+            <a:srgbClr val="F8FAFC"/>
           </a:solidFill>
           <a:ln w="12700">
             <a:solidFill>
               <a:srgbClr val="E2E8F0"/>
             </a:solidFill>
-            <a:prstDash val="solid"/>
-          </a:ln>
-        </p:spPr>
-      </p:sp>
-      <p:sp>
-        <p:nvSpPr>
-          <p:cNvPr id="30" name="Text 28"/>
-          <p:cNvSpPr/>
-          <p:nvPr/>
-        </p:nvSpPr>
-        <p:spPr>
-          <a:xfrm>
-            <a:off x="365760" y="4096512"/>
-            <a:ext cx="1371600" cy="804672"/>
-          </a:xfrm>
-          <a:prstGeom prst="rect">
-            <a:avLst/>
-          </a:prstGeom>
-          <a:noFill/>
-          <a:ln/>
-        </p:spPr>
-        <p:txBody>
-          <a:bodyPr wrap="square" lIns="0" tIns="0" rIns="0" bIns="0" rtlCol="0" anchor="ctr"/>
-          <a:lstStyle/>
-          <a:p>
-            <a:pPr algn="ctr" indent="0" marL="0">
-              <a:buNone/>
-            </a:pPr>
-            <a:r>
-              <a:rPr lang="en-US" sz="1100" b="1" dirty="0">
-                <a:solidFill>
-                  <a:srgbClr val="475569"/>
-                </a:solidFill>
-                <a:latin typeface="Trebuchet MS" pitchFamily="34" charset="0"/>
-                <a:ea typeface="Trebuchet MS" pitchFamily="34" charset="-122"/>
-                <a:cs typeface="Trebuchet MS" pitchFamily="34" charset="-120"/>
-              </a:rPr>
-              <a:t>Phonemes</a:t>
-            </a:r>
-            <a:endParaRPr lang="en-US" sz="1100" dirty="0"/>
-          </a:p>
-        </p:txBody>
-      </p:sp>
-      <p:sp>
-        <p:nvSpPr>
-          <p:cNvPr id="31" name="Shape 29"/>
-          <p:cNvSpPr/>
-          <p:nvPr/>
-        </p:nvSpPr>
-        <p:spPr>
-          <a:xfrm>
-            <a:off x="1874520" y="4096512"/>
-            <a:ext cx="6903720" cy="804672"/>
-          </a:xfrm>
-          <a:prstGeom prst="rect">
-            <a:avLst>
-              <a:gd name="adj" fmla="val 6818"/>
-            </a:avLst>
-          </a:prstGeom>
-          <a:solidFill>
-            <a:srgbClr val="F8FAFC"/>
-          </a:solidFill>
-          <a:ln w="12700">
-            <a:solidFill>
-              <a:srgbClr val="E2E8F0"/>
-            </a:solidFill>
             <a:prstDash val="dash"/>
           </a:ln>
         </p:spPr>
       </p:sp>
       <p:sp>
         <p:nvSpPr>
-          <p:cNvPr id="32" name="Text 30"/>
+          <p:cNvPr id="29" name="Text 27"/>
           <p:cNvSpPr/>
           <p:nvPr/>
         </p:nvSpPr>
@@ -19448,7 +19534,7 @@
                 <a:ea typeface="Calibri" pitchFamily="34" charset="-122"/>
                 <a:cs typeface="Calibri" pitchFamily="34" charset="-120"/>
               </a:rPr>
-              <a:t>Word Labs  •  wordlabs.app  •  Root: 'round' = circular shape or movement</a:t>
+              <a:t>Word Labs  •  wordlabs.app  •  Root: 'round' = shaped like a circle</a:t>
             </a:r>
             <a:endParaRPr lang="en-US" sz="800" dirty="0"/>
           </a:p>
@@ -19587,7 +19673,7 @@
                 <a:ea typeface="Trebuchet MS" pitchFamily="34" charset="-122"/>
                 <a:cs typeface="Trebuchet MS" pitchFamily="34" charset="-120"/>
               </a:rPr>
-              <a:t>surrounding</a:t>
+              <a:t>rounding</a:t>
             </a:r>
             <a:endParaRPr lang="en-US" sz="2800" dirty="0"/>
           </a:p>
@@ -19667,7 +19753,7 @@
         </p:nvSpPr>
         <p:spPr>
           <a:xfrm>
-            <a:off x="2221992" y="2258568"/>
+            <a:off x="2938272" y="2258568"/>
             <a:ext cx="1828800" cy="292608"/>
           </a:xfrm>
           <a:prstGeom prst="rect">
@@ -19676,11 +19762,11 @@
             </a:avLst>
           </a:prstGeom>
           <a:solidFill>
-            <a:srgbClr val="DDD6FE"/>
+            <a:srgbClr val="CCFBF1"/>
           </a:solidFill>
           <a:ln w="19050">
             <a:solidFill>
-              <a:srgbClr val="7C3AED"/>
+              <a:srgbClr val="0D9488"/>
             </a:solidFill>
             <a:prstDash val="solid"/>
           </a:ln>
@@ -19701,7 +19787,7 @@
         </p:nvSpPr>
         <p:spPr>
           <a:xfrm>
-            <a:off x="2221992" y="2258568"/>
+            <a:off x="2938272" y="2258568"/>
             <a:ext cx="1828800" cy="292608"/>
           </a:xfrm>
           <a:prstGeom prst="rect">
@@ -19720,13 +19806,13 @@
             <a:r>
               <a:rPr lang="en-US" sz="1300" b="1" dirty="0">
                 <a:solidFill>
-                  <a:srgbClr val="4C1D95"/>
+                  <a:srgbClr val="0F766E"/>
                 </a:solidFill>
                 <a:latin typeface="Trebuchet MS" pitchFamily="34" charset="0"/>
                 <a:ea typeface="Trebuchet MS" pitchFamily="34" charset="-122"/>
                 <a:cs typeface="Trebuchet MS" pitchFamily="34" charset="-120"/>
               </a:rPr>
-              <a:t>sur</a:t>
+              <a:t>round</a:t>
             </a:r>
             <a:endParaRPr lang="en-US" sz="1300" dirty="0"/>
           </a:p>
@@ -19740,7 +19826,7 @@
         </p:nvSpPr>
         <p:spPr>
           <a:xfrm>
-            <a:off x="2221992" y="2569464"/>
+            <a:off x="2938272" y="2569464"/>
             <a:ext cx="1828800" cy="201168"/>
           </a:xfrm>
           <a:prstGeom prst="rect">
@@ -19765,7 +19851,7 @@
                 <a:ea typeface="Calibri" pitchFamily="34" charset="-122"/>
                 <a:cs typeface="Calibri" pitchFamily="34" charset="-120"/>
               </a:rPr>
-              <a:t>over or above</a:t>
+              <a:t>shaped like a circle</a:t>
             </a:r>
             <a:endParaRPr lang="en-US" sz="850" dirty="0"/>
           </a:p>
@@ -19779,7 +19865,7 @@
         </p:nvSpPr>
         <p:spPr>
           <a:xfrm>
-            <a:off x="4370832" y="2258568"/>
+            <a:off x="5803392" y="2258568"/>
             <a:ext cx="1828800" cy="292608"/>
           </a:xfrm>
           <a:prstGeom prst="rect">
@@ -19788,11 +19874,11 @@
             </a:avLst>
           </a:prstGeom>
           <a:solidFill>
-            <a:srgbClr val="CCFBF1"/>
+            <a:srgbClr val="FCE7F3"/>
           </a:solidFill>
           <a:ln w="19050">
             <a:solidFill>
-              <a:srgbClr val="0D9488"/>
+              <a:srgbClr val="DB2777"/>
             </a:solidFill>
             <a:prstDash val="solid"/>
           </a:ln>
@@ -19813,7 +19899,7 @@
         </p:nvSpPr>
         <p:spPr>
           <a:xfrm>
-            <a:off x="4370832" y="2258568"/>
+            <a:off x="5803392" y="2258568"/>
             <a:ext cx="1828800" cy="292608"/>
           </a:xfrm>
           <a:prstGeom prst="rect">
@@ -19832,13 +19918,13 @@
             <a:r>
               <a:rPr lang="en-US" sz="1300" b="1" dirty="0">
                 <a:solidFill>
-                  <a:srgbClr val="0F766E"/>
+                  <a:srgbClr val="9D174D"/>
                 </a:solidFill>
                 <a:latin typeface="Trebuchet MS" pitchFamily="34" charset="0"/>
                 <a:ea typeface="Trebuchet MS" pitchFamily="34" charset="-122"/>
                 <a:cs typeface="Trebuchet MS" pitchFamily="34" charset="-120"/>
               </a:rPr>
-              <a:t>round</a:t>
+              <a:t>ing</a:t>
             </a:r>
             <a:endParaRPr lang="en-US" sz="1300" dirty="0"/>
           </a:p>
@@ -19852,7 +19938,7 @@
         </p:nvSpPr>
         <p:spPr>
           <a:xfrm>
-            <a:off x="4370832" y="2569464"/>
+            <a:off x="5803392" y="2569464"/>
             <a:ext cx="1828800" cy="201168"/>
           </a:xfrm>
           <a:prstGeom prst="rect">
@@ -19877,7 +19963,7 @@
                 <a:ea typeface="Calibri" pitchFamily="34" charset="-122"/>
                 <a:cs typeface="Calibri" pitchFamily="34" charset="-120"/>
               </a:rPr>
-              <a:t>circular shape</a:t>
+              <a:t>happening now</a:t>
             </a:r>
             <a:endParaRPr lang="en-US" sz="850" dirty="0"/>
           </a:p>
@@ -19891,30 +19977,23 @@
         </p:nvSpPr>
         <p:spPr>
           <a:xfrm>
-            <a:off x="6519672" y="2258568"/>
-            <a:ext cx="1828800" cy="292608"/>
+            <a:off x="365760" y="3273552"/>
+            <a:ext cx="1371600" cy="658368"/>
           </a:xfrm>
           <a:prstGeom prst="rect">
             <a:avLst>
-              <a:gd name="adj" fmla="val 25000"/>
+              <a:gd name="adj" fmla="val 8333"/>
             </a:avLst>
           </a:prstGeom>
           <a:solidFill>
-            <a:srgbClr val="FCE7F3"/>
-          </a:solidFill>
-          <a:ln w="19050">
-            <a:solidFill>
-              <a:srgbClr val="DB2777"/>
-            </a:solidFill>
-            <a:prstDash val="solid"/>
-          </a:ln>
-          <a:effectLst>
-            <a:outerShdw sx="100000" sy="100000" kx="0" ky="0" algn="bl" rotWithShape="0" blurRad="101600" dist="38100" dir="8100000">
-              <a:srgbClr val="000000">
-                <a:alpha val="12000"/>
-              </a:srgbClr>
-            </a:outerShdw>
-          </a:effectLst>
+            <a:srgbClr val="E2E8F0"/>
+          </a:solidFill>
+          <a:ln w="12700">
+            <a:solidFill>
+              <a:srgbClr val="E2E8F0"/>
+            </a:solidFill>
+            <a:prstDash val="solid"/>
+          </a:ln>
         </p:spPr>
       </p:sp>
       <p:sp>
@@ -19925,8 +20004,8 @@
         </p:nvSpPr>
         <p:spPr>
           <a:xfrm>
-            <a:off x="6519672" y="2258568"/>
-            <a:ext cx="1828800" cy="292608"/>
+            <a:off x="365760" y="3273552"/>
+            <a:ext cx="1371600" cy="658368"/>
           </a:xfrm>
           <a:prstGeom prst="rect">
             <a:avLst/>
@@ -19942,69 +20021,30 @@
               <a:buNone/>
             </a:pPr>
             <a:r>
-              <a:rPr lang="en-US" sz="1300" b="1" dirty="0">
-                <a:solidFill>
-                  <a:srgbClr val="9D174D"/>
+              <a:rPr lang="en-US" sz="1100" b="1" dirty="0">
+                <a:solidFill>
+                  <a:srgbClr val="475569"/>
                 </a:solidFill>
                 <a:latin typeface="Trebuchet MS" pitchFamily="34" charset="0"/>
                 <a:ea typeface="Trebuchet MS" pitchFamily="34" charset="-122"/>
                 <a:cs typeface="Trebuchet MS" pitchFamily="34" charset="-120"/>
               </a:rPr>
-              <a:t>ing</a:t>
-            </a:r>
-            <a:endParaRPr lang="en-US" sz="1300" dirty="0"/>
-          </a:p>
-        </p:txBody>
-      </p:sp>
-      <p:sp>
-        <p:nvSpPr>
-          <p:cNvPr id="24" name="Text 22"/>
-          <p:cNvSpPr/>
-          <p:nvPr/>
-        </p:nvSpPr>
-        <p:spPr>
-          <a:xfrm>
-            <a:off x="6519672" y="2569464"/>
-            <a:ext cx="1828800" cy="201168"/>
-          </a:xfrm>
-          <a:prstGeom prst="rect">
-            <a:avLst/>
-          </a:prstGeom>
-          <a:noFill/>
-          <a:ln/>
-        </p:spPr>
-        <p:txBody>
-          <a:bodyPr wrap="square" lIns="0" tIns="0" rIns="0" bIns="0" rtlCol="0" anchor="t"/>
-          <a:lstStyle/>
-          <a:p>
-            <a:pPr algn="ctr" indent="0" marL="0">
-              <a:buNone/>
-            </a:pPr>
-            <a:r>
-              <a:rPr lang="en-US" sz="850" dirty="0">
-                <a:solidFill>
-                  <a:srgbClr val="475569"/>
-                </a:solidFill>
-                <a:latin typeface="Calibri" pitchFamily="34" charset="0"/>
-                <a:ea typeface="Calibri" pitchFamily="34" charset="-122"/>
-                <a:cs typeface="Calibri" pitchFamily="34" charset="-120"/>
-              </a:rPr>
-              <a:t>ongoing action or describing a quality</a:t>
-            </a:r>
-            <a:endParaRPr lang="en-US" sz="850" dirty="0"/>
-          </a:p>
-        </p:txBody>
-      </p:sp>
-      <p:sp>
-        <p:nvSpPr>
-          <p:cNvPr id="25" name="Shape 23"/>
-          <p:cNvSpPr/>
-          <p:nvPr/>
-        </p:nvSpPr>
-        <p:spPr>
-          <a:xfrm>
-            <a:off x="365760" y="3273552"/>
-            <a:ext cx="1371600" cy="658368"/>
+              <a:t>Syllables</a:t>
+            </a:r>
+            <a:endParaRPr lang="en-US" sz="1100" dirty="0"/>
+          </a:p>
+        </p:txBody>
+      </p:sp>
+      <p:sp>
+        <p:nvSpPr>
+          <p:cNvPr id="24" name="Shape 22"/>
+          <p:cNvSpPr/>
+          <p:nvPr/>
+        </p:nvSpPr>
+        <p:spPr>
+          <a:xfrm>
+            <a:off x="1874520" y="3273552"/>
+            <a:ext cx="6903720" cy="658368"/>
           </a:xfrm>
           <a:prstGeom prst="rect">
             <a:avLst>
@@ -20012,11 +20052,38 @@
             </a:avLst>
           </a:prstGeom>
           <a:solidFill>
-            <a:srgbClr val="E2E8F0"/>
-          </a:solidFill>
-          <a:ln w="12700">
-            <a:solidFill>
-              <a:srgbClr val="E2E8F0"/>
+            <a:srgbClr val="CCFBF1"/>
+          </a:solidFill>
+          <a:ln w="12700">
+            <a:solidFill>
+              <a:srgbClr val="0D9488"/>
+            </a:solidFill>
+            <a:prstDash val="solid"/>
+          </a:ln>
+        </p:spPr>
+      </p:sp>
+      <p:sp>
+        <p:nvSpPr>
+          <p:cNvPr id="25" name="Shape 23"/>
+          <p:cNvSpPr/>
+          <p:nvPr/>
+        </p:nvSpPr>
+        <p:spPr>
+          <a:xfrm>
+            <a:off x="2999232" y="3364992"/>
+            <a:ext cx="1645920" cy="475488"/>
+          </a:xfrm>
+          <a:prstGeom prst="rect">
+            <a:avLst>
+              <a:gd name="adj" fmla="val 9615"/>
+            </a:avLst>
+          </a:prstGeom>
+          <a:solidFill>
+            <a:srgbClr val="FFFFFF"/>
+          </a:solidFill>
+          <a:ln w="12700">
+            <a:solidFill>
+              <a:srgbClr val="0D9488"/>
             </a:solidFill>
             <a:prstDash val="solid"/>
           </a:ln>
@@ -20030,8 +20097,8 @@
         </p:nvSpPr>
         <p:spPr>
           <a:xfrm>
-            <a:off x="365760" y="3273552"/>
-            <a:ext cx="1371600" cy="658368"/>
+            <a:off x="2999232" y="3364992"/>
+            <a:ext cx="1645920" cy="475488"/>
           </a:xfrm>
           <a:prstGeom prst="rect">
             <a:avLst/>
@@ -20047,46 +20114,58 @@
               <a:buNone/>
             </a:pPr>
             <a:r>
-              <a:rPr lang="en-US" sz="1100" b="1" dirty="0">
-                <a:solidFill>
-                  <a:srgbClr val="475569"/>
+              <a:rPr lang="en-US" sz="1400" b="1" dirty="0">
+                <a:solidFill>
+                  <a:srgbClr val="0D9488"/>
                 </a:solidFill>
                 <a:latin typeface="Trebuchet MS" pitchFamily="34" charset="0"/>
                 <a:ea typeface="Trebuchet MS" pitchFamily="34" charset="-122"/>
                 <a:cs typeface="Trebuchet MS" pitchFamily="34" charset="-120"/>
               </a:rPr>
-              <a:t>Syllables</a:t>
-            </a:r>
-            <a:endParaRPr lang="en-US" sz="1100" dirty="0"/>
-          </a:p>
-        </p:txBody>
-      </p:sp>
-      <p:sp>
-        <p:nvSpPr>
-          <p:cNvPr id="27" name="Shape 25"/>
-          <p:cNvSpPr/>
-          <p:nvPr/>
-        </p:nvSpPr>
-        <p:spPr>
-          <a:xfrm>
-            <a:off x="1874520" y="3273552"/>
-            <a:ext cx="6903720" cy="658368"/>
-          </a:xfrm>
-          <a:prstGeom prst="rect">
-            <a:avLst>
-              <a:gd name="adj" fmla="val 8333"/>
-            </a:avLst>
-          </a:prstGeom>
-          <a:solidFill>
-            <a:srgbClr val="CCFBF1"/>
-          </a:solidFill>
-          <a:ln w="12700">
-            <a:solidFill>
-              <a:srgbClr val="0D9488"/>
-            </a:solidFill>
-            <a:prstDash val="solid"/>
-          </a:ln>
-        </p:spPr>
+              <a:t>round</a:t>
+            </a:r>
+            <a:endParaRPr lang="en-US" sz="1400" dirty="0"/>
+          </a:p>
+        </p:txBody>
+      </p:sp>
+      <p:sp>
+        <p:nvSpPr>
+          <p:cNvPr id="27" name="Text 25"/>
+          <p:cNvSpPr/>
+          <p:nvPr/>
+        </p:nvSpPr>
+        <p:spPr>
+          <a:xfrm>
+            <a:off x="4645152" y="3364992"/>
+            <a:ext cx="1097280" cy="475488"/>
+          </a:xfrm>
+          <a:prstGeom prst="rect">
+            <a:avLst/>
+          </a:prstGeom>
+          <a:noFill/>
+          <a:ln/>
+        </p:spPr>
+        <p:txBody>
+          <a:bodyPr wrap="square" lIns="0" tIns="0" rIns="0" bIns="0" rtlCol="0" anchor="ctr"/>
+          <a:lstStyle/>
+          <a:p>
+            <a:pPr algn="ctr" indent="0" marL="0">
+              <a:buNone/>
+            </a:pPr>
+            <a:r>
+              <a:rPr lang="en-US" sz="1600" b="1" dirty="0">
+                <a:solidFill>
+                  <a:srgbClr val="0D9488"/>
+                </a:solidFill>
+                <a:latin typeface="Trebuchet MS" pitchFamily="34" charset="0"/>
+                <a:ea typeface="Trebuchet MS" pitchFamily="34" charset="-122"/>
+                <a:cs typeface="Trebuchet MS" pitchFamily="34" charset="-120"/>
+              </a:rPr>
+              <a:t>·</a:t>
+            </a:r>
+            <a:endParaRPr lang="en-US" sz="1600" dirty="0"/>
+          </a:p>
+        </p:txBody>
       </p:sp>
       <p:sp>
         <p:nvSpPr>
@@ -20096,7 +20175,7 @@
         </p:nvSpPr>
         <p:spPr>
           <a:xfrm>
-            <a:off x="2313432" y="3364992"/>
+            <a:off x="5742432" y="3364992"/>
             <a:ext cx="1645920" cy="475488"/>
           </a:xfrm>
           <a:prstGeom prst="rect">
@@ -20123,7 +20202,7 @@
         </p:nvSpPr>
         <p:spPr>
           <a:xfrm>
-            <a:off x="2313432" y="3364992"/>
+            <a:off x="5742432" y="3364992"/>
             <a:ext cx="1645920" cy="475488"/>
           </a:xfrm>
           <a:prstGeom prst="rect">
@@ -20148,7 +20227,7 @@
                 <a:ea typeface="Trebuchet MS" pitchFamily="34" charset="-122"/>
                 <a:cs typeface="Trebuchet MS" pitchFamily="34" charset="-120"/>
               </a:rPr>
-              <a:t>sur</a:t>
+              <a:t>ing</a:t>
             </a:r>
             <a:endParaRPr lang="en-US" sz="1400" dirty="0"/>
           </a:p>
@@ -20156,14 +20235,41 @@
       </p:sp>
       <p:sp>
         <p:nvSpPr>
-          <p:cNvPr id="30" name="Text 28"/>
-          <p:cNvSpPr/>
-          <p:nvPr/>
-        </p:nvSpPr>
-        <p:spPr>
-          <a:xfrm>
-            <a:off x="3959352" y="3364992"/>
-            <a:ext cx="411480" cy="475488"/>
+          <p:cNvPr id="30" name="Shape 28"/>
+          <p:cNvSpPr/>
+          <p:nvPr/>
+        </p:nvSpPr>
+        <p:spPr>
+          <a:xfrm>
+            <a:off x="365760" y="4096512"/>
+            <a:ext cx="1371600" cy="804672"/>
+          </a:xfrm>
+          <a:prstGeom prst="rect">
+            <a:avLst>
+              <a:gd name="adj" fmla="val 6818"/>
+            </a:avLst>
+          </a:prstGeom>
+          <a:solidFill>
+            <a:srgbClr val="E2E8F0"/>
+          </a:solidFill>
+          <a:ln w="12700">
+            <a:solidFill>
+              <a:srgbClr val="E2E8F0"/>
+            </a:solidFill>
+            <a:prstDash val="solid"/>
+          </a:ln>
+        </p:spPr>
+      </p:sp>
+      <p:sp>
+        <p:nvSpPr>
+          <p:cNvPr id="31" name="Text 29"/>
+          <p:cNvSpPr/>
+          <p:nvPr/>
+        </p:nvSpPr>
+        <p:spPr>
+          <a:xfrm>
+            <a:off x="365760" y="4096512"/>
+            <a:ext cx="1371600" cy="804672"/>
           </a:xfrm>
           <a:prstGeom prst="rect">
             <a:avLst/>
@@ -20179,201 +20285,30 @@
               <a:buNone/>
             </a:pPr>
             <a:r>
-              <a:rPr lang="en-US" sz="1600" b="1" dirty="0">
-                <a:solidFill>
-                  <a:srgbClr val="0D9488"/>
+              <a:rPr lang="en-US" sz="1100" b="1" dirty="0">
+                <a:solidFill>
+                  <a:srgbClr val="475569"/>
                 </a:solidFill>
                 <a:latin typeface="Trebuchet MS" pitchFamily="34" charset="0"/>
                 <a:ea typeface="Trebuchet MS" pitchFamily="34" charset="-122"/>
                 <a:cs typeface="Trebuchet MS" pitchFamily="34" charset="-120"/>
               </a:rPr>
-              <a:t>·</a:t>
-            </a:r>
-            <a:endParaRPr lang="en-US" sz="1600" dirty="0"/>
-          </a:p>
-        </p:txBody>
-      </p:sp>
-      <p:sp>
-        <p:nvSpPr>
-          <p:cNvPr id="31" name="Shape 29"/>
-          <p:cNvSpPr/>
-          <p:nvPr/>
-        </p:nvSpPr>
-        <p:spPr>
-          <a:xfrm>
-            <a:off x="4370832" y="3364992"/>
-            <a:ext cx="1645920" cy="475488"/>
-          </a:xfrm>
-          <a:prstGeom prst="rect">
-            <a:avLst>
-              <a:gd name="adj" fmla="val 9615"/>
-            </a:avLst>
-          </a:prstGeom>
-          <a:solidFill>
-            <a:srgbClr val="FFFFFF"/>
-          </a:solidFill>
-          <a:ln w="12700">
-            <a:solidFill>
-              <a:srgbClr val="0D9488"/>
-            </a:solidFill>
-            <a:prstDash val="solid"/>
-          </a:ln>
-        </p:spPr>
-      </p:sp>
-      <p:sp>
-        <p:nvSpPr>
-          <p:cNvPr id="32" name="Text 30"/>
-          <p:cNvSpPr/>
-          <p:nvPr/>
-        </p:nvSpPr>
-        <p:spPr>
-          <a:xfrm>
-            <a:off x="4370832" y="3364992"/>
-            <a:ext cx="1645920" cy="475488"/>
-          </a:xfrm>
-          <a:prstGeom prst="rect">
-            <a:avLst/>
-          </a:prstGeom>
-          <a:noFill/>
-          <a:ln/>
-        </p:spPr>
-        <p:txBody>
-          <a:bodyPr wrap="square" lIns="0" tIns="0" rIns="0" bIns="0" rtlCol="0" anchor="ctr"/>
-          <a:lstStyle/>
-          <a:p>
-            <a:pPr algn="ctr" indent="0" marL="0">
-              <a:buNone/>
-            </a:pPr>
-            <a:r>
-              <a:rPr lang="en-US" sz="1400" b="1" dirty="0">
-                <a:solidFill>
-                  <a:srgbClr val="0D9488"/>
-                </a:solidFill>
-                <a:latin typeface="Trebuchet MS" pitchFamily="34" charset="0"/>
-                <a:ea typeface="Trebuchet MS" pitchFamily="34" charset="-122"/>
-                <a:cs typeface="Trebuchet MS" pitchFamily="34" charset="-120"/>
-              </a:rPr>
-              <a:t>round</a:t>
-            </a:r>
-            <a:endParaRPr lang="en-US" sz="1400" dirty="0"/>
-          </a:p>
-        </p:txBody>
-      </p:sp>
-      <p:sp>
-        <p:nvSpPr>
-          <p:cNvPr id="33" name="Text 31"/>
-          <p:cNvSpPr/>
-          <p:nvPr/>
-        </p:nvSpPr>
-        <p:spPr>
-          <a:xfrm>
-            <a:off x="6016752" y="3364992"/>
-            <a:ext cx="411480" cy="475488"/>
-          </a:xfrm>
-          <a:prstGeom prst="rect">
-            <a:avLst/>
-          </a:prstGeom>
-          <a:noFill/>
-          <a:ln/>
-        </p:spPr>
-        <p:txBody>
-          <a:bodyPr wrap="square" lIns="0" tIns="0" rIns="0" bIns="0" rtlCol="0" anchor="ctr"/>
-          <a:lstStyle/>
-          <a:p>
-            <a:pPr algn="ctr" indent="0" marL="0">
-              <a:buNone/>
-            </a:pPr>
-            <a:r>
-              <a:rPr lang="en-US" sz="1600" b="1" dirty="0">
-                <a:solidFill>
-                  <a:srgbClr val="0D9488"/>
-                </a:solidFill>
-                <a:latin typeface="Trebuchet MS" pitchFamily="34" charset="0"/>
-                <a:ea typeface="Trebuchet MS" pitchFamily="34" charset="-122"/>
-                <a:cs typeface="Trebuchet MS" pitchFamily="34" charset="-120"/>
-              </a:rPr>
-              <a:t>·</a:t>
-            </a:r>
-            <a:endParaRPr lang="en-US" sz="1600" dirty="0"/>
-          </a:p>
-        </p:txBody>
-      </p:sp>
-      <p:sp>
-        <p:nvSpPr>
-          <p:cNvPr id="34" name="Shape 32"/>
-          <p:cNvSpPr/>
-          <p:nvPr/>
-        </p:nvSpPr>
-        <p:spPr>
-          <a:xfrm>
-            <a:off x="6428232" y="3364992"/>
-            <a:ext cx="1645920" cy="475488"/>
-          </a:xfrm>
-          <a:prstGeom prst="rect">
-            <a:avLst>
-              <a:gd name="adj" fmla="val 9615"/>
-            </a:avLst>
-          </a:prstGeom>
-          <a:solidFill>
-            <a:srgbClr val="FFFFFF"/>
-          </a:solidFill>
-          <a:ln w="12700">
-            <a:solidFill>
-              <a:srgbClr val="0D9488"/>
-            </a:solidFill>
-            <a:prstDash val="solid"/>
-          </a:ln>
-        </p:spPr>
-      </p:sp>
-      <p:sp>
-        <p:nvSpPr>
-          <p:cNvPr id="35" name="Text 33"/>
-          <p:cNvSpPr/>
-          <p:nvPr/>
-        </p:nvSpPr>
-        <p:spPr>
-          <a:xfrm>
-            <a:off x="6428232" y="3364992"/>
-            <a:ext cx="1645920" cy="475488"/>
-          </a:xfrm>
-          <a:prstGeom prst="rect">
-            <a:avLst/>
-          </a:prstGeom>
-          <a:noFill/>
-          <a:ln/>
-        </p:spPr>
-        <p:txBody>
-          <a:bodyPr wrap="square" lIns="0" tIns="0" rIns="0" bIns="0" rtlCol="0" anchor="ctr"/>
-          <a:lstStyle/>
-          <a:p>
-            <a:pPr algn="ctr" indent="0" marL="0">
-              <a:buNone/>
-            </a:pPr>
-            <a:r>
-              <a:rPr lang="en-US" sz="1400" b="1" dirty="0">
-                <a:solidFill>
-                  <a:srgbClr val="0D9488"/>
-                </a:solidFill>
-                <a:latin typeface="Trebuchet MS" pitchFamily="34" charset="0"/>
-                <a:ea typeface="Trebuchet MS" pitchFamily="34" charset="-122"/>
-                <a:cs typeface="Trebuchet MS" pitchFamily="34" charset="-120"/>
-              </a:rPr>
-              <a:t>ing</a:t>
-            </a:r>
-            <a:endParaRPr lang="en-US" sz="1400" dirty="0"/>
-          </a:p>
-        </p:txBody>
-      </p:sp>
-      <p:sp>
-        <p:nvSpPr>
-          <p:cNvPr id="36" name="Shape 34"/>
-          <p:cNvSpPr/>
-          <p:nvPr/>
-        </p:nvSpPr>
-        <p:spPr>
-          <a:xfrm>
-            <a:off x="365760" y="4096512"/>
-            <a:ext cx="1371600" cy="804672"/>
+              <a:t>Phonemes</a:t>
+            </a:r>
+            <a:endParaRPr lang="en-US" sz="1100" dirty="0"/>
+          </a:p>
+        </p:txBody>
+      </p:sp>
+      <p:sp>
+        <p:nvSpPr>
+          <p:cNvPr id="32" name="Shape 30"/>
+          <p:cNvSpPr/>
+          <p:nvPr/>
+        </p:nvSpPr>
+        <p:spPr>
+          <a:xfrm>
+            <a:off x="1874520" y="4096512"/>
+            <a:ext cx="6903720" cy="804672"/>
           </a:xfrm>
           <a:prstGeom prst="rect">
             <a:avLst>
@@ -20381,85 +20316,19 @@
             </a:avLst>
           </a:prstGeom>
           <a:solidFill>
-            <a:srgbClr val="E2E8F0"/>
+            <a:srgbClr val="F8FAFC"/>
           </a:solidFill>
           <a:ln w="12700">
             <a:solidFill>
               <a:srgbClr val="E2E8F0"/>
             </a:solidFill>
-            <a:prstDash val="solid"/>
-          </a:ln>
-        </p:spPr>
-      </p:sp>
-      <p:sp>
-        <p:nvSpPr>
-          <p:cNvPr id="37" name="Text 35"/>
-          <p:cNvSpPr/>
-          <p:nvPr/>
-        </p:nvSpPr>
-        <p:spPr>
-          <a:xfrm>
-            <a:off x="365760" y="4096512"/>
-            <a:ext cx="1371600" cy="804672"/>
-          </a:xfrm>
-          <a:prstGeom prst="rect">
-            <a:avLst/>
-          </a:prstGeom>
-          <a:noFill/>
-          <a:ln/>
-        </p:spPr>
-        <p:txBody>
-          <a:bodyPr wrap="square" lIns="0" tIns="0" rIns="0" bIns="0" rtlCol="0" anchor="ctr"/>
-          <a:lstStyle/>
-          <a:p>
-            <a:pPr algn="ctr" indent="0" marL="0">
-              <a:buNone/>
-            </a:pPr>
-            <a:r>
-              <a:rPr lang="en-US" sz="1100" b="1" dirty="0">
-                <a:solidFill>
-                  <a:srgbClr val="475569"/>
-                </a:solidFill>
-                <a:latin typeface="Trebuchet MS" pitchFamily="34" charset="0"/>
-                <a:ea typeface="Trebuchet MS" pitchFamily="34" charset="-122"/>
-                <a:cs typeface="Trebuchet MS" pitchFamily="34" charset="-120"/>
-              </a:rPr>
-              <a:t>Phonemes</a:t>
-            </a:r>
-            <a:endParaRPr lang="en-US" sz="1100" dirty="0"/>
-          </a:p>
-        </p:txBody>
-      </p:sp>
-      <p:sp>
-        <p:nvSpPr>
-          <p:cNvPr id="38" name="Shape 36"/>
-          <p:cNvSpPr/>
-          <p:nvPr/>
-        </p:nvSpPr>
-        <p:spPr>
-          <a:xfrm>
-            <a:off x="1874520" y="4096512"/>
-            <a:ext cx="6903720" cy="804672"/>
-          </a:xfrm>
-          <a:prstGeom prst="rect">
-            <a:avLst>
-              <a:gd name="adj" fmla="val 6818"/>
-            </a:avLst>
-          </a:prstGeom>
-          <a:solidFill>
-            <a:srgbClr val="F8FAFC"/>
-          </a:solidFill>
-          <a:ln w="12700">
-            <a:solidFill>
-              <a:srgbClr val="E2E8F0"/>
-            </a:solidFill>
             <a:prstDash val="dash"/>
           </a:ln>
         </p:spPr>
       </p:sp>
       <p:sp>
         <p:nvSpPr>
-          <p:cNvPr id="39" name="Text 37"/>
+          <p:cNvPr id="33" name="Text 31"/>
           <p:cNvSpPr/>
           <p:nvPr/>
         </p:nvSpPr>
@@ -20782,7 +20651,7 @@
                 <a:ea typeface="Calibri" pitchFamily="34" charset="-122"/>
                 <a:cs typeface="Calibri" pitchFamily="34" charset="-120"/>
               </a:rPr>
-              <a:t>Word Labs  •  wordlabs.app  •  Root: 'round' = circular shape or movement</a:t>
+              <a:t>Word Labs  •  wordlabs.app  •  Root: 'round' = shaped like a circle</a:t>
             </a:r>
             <a:endParaRPr lang="en-US" sz="800" dirty="0"/>
           </a:p>
@@ -20921,7 +20790,7 @@
                 <a:ea typeface="Trebuchet MS" pitchFamily="34" charset="-122"/>
                 <a:cs typeface="Trebuchet MS" pitchFamily="34" charset="-120"/>
               </a:rPr>
-              <a:t>surrounding</a:t>
+              <a:t>rounding</a:t>
             </a:r>
             <a:endParaRPr lang="en-US" sz="2800" dirty="0"/>
           </a:p>
@@ -21001,7 +20870,7 @@
         </p:nvSpPr>
         <p:spPr>
           <a:xfrm>
-            <a:off x="2221992" y="2258568"/>
+            <a:off x="2938272" y="2258568"/>
             <a:ext cx="1828800" cy="292608"/>
           </a:xfrm>
           <a:prstGeom prst="rect">
@@ -21010,11 +20879,11 @@
             </a:avLst>
           </a:prstGeom>
           <a:solidFill>
-            <a:srgbClr val="DDD6FE"/>
+            <a:srgbClr val="CCFBF1"/>
           </a:solidFill>
           <a:ln w="19050">
             <a:solidFill>
-              <a:srgbClr val="7C3AED"/>
+              <a:srgbClr val="0D9488"/>
             </a:solidFill>
             <a:prstDash val="solid"/>
           </a:ln>
@@ -21035,7 +20904,7 @@
         </p:nvSpPr>
         <p:spPr>
           <a:xfrm>
-            <a:off x="2221992" y="2258568"/>
+            <a:off x="2938272" y="2258568"/>
             <a:ext cx="1828800" cy="292608"/>
           </a:xfrm>
           <a:prstGeom prst="rect">
@@ -21054,13 +20923,13 @@
             <a:r>
               <a:rPr lang="en-US" sz="1300" b="1" dirty="0">
                 <a:solidFill>
-                  <a:srgbClr val="4C1D95"/>
+                  <a:srgbClr val="0F766E"/>
                 </a:solidFill>
                 <a:latin typeface="Trebuchet MS" pitchFamily="34" charset="0"/>
                 <a:ea typeface="Trebuchet MS" pitchFamily="34" charset="-122"/>
                 <a:cs typeface="Trebuchet MS" pitchFamily="34" charset="-120"/>
               </a:rPr>
-              <a:t>sur</a:t>
+              <a:t>round</a:t>
             </a:r>
             <a:endParaRPr lang="en-US" sz="1300" dirty="0"/>
           </a:p>
@@ -21074,7 +20943,7 @@
         </p:nvSpPr>
         <p:spPr>
           <a:xfrm>
-            <a:off x="2221992" y="2569464"/>
+            <a:off x="2938272" y="2569464"/>
             <a:ext cx="1828800" cy="201168"/>
           </a:xfrm>
           <a:prstGeom prst="rect">
@@ -21099,7 +20968,7 @@
                 <a:ea typeface="Calibri" pitchFamily="34" charset="-122"/>
                 <a:cs typeface="Calibri" pitchFamily="34" charset="-120"/>
               </a:rPr>
-              <a:t>over or above</a:t>
+              <a:t>shaped like a circle</a:t>
             </a:r>
             <a:endParaRPr lang="en-US" sz="850" dirty="0"/>
           </a:p>
@@ -21113,7 +20982,7 @@
         </p:nvSpPr>
         <p:spPr>
           <a:xfrm>
-            <a:off x="4370832" y="2258568"/>
+            <a:off x="5803392" y="2258568"/>
             <a:ext cx="1828800" cy="292608"/>
           </a:xfrm>
           <a:prstGeom prst="rect">
@@ -21122,11 +20991,11 @@
             </a:avLst>
           </a:prstGeom>
           <a:solidFill>
-            <a:srgbClr val="CCFBF1"/>
+            <a:srgbClr val="FCE7F3"/>
           </a:solidFill>
           <a:ln w="19050">
             <a:solidFill>
-              <a:srgbClr val="0D9488"/>
+              <a:srgbClr val="DB2777"/>
             </a:solidFill>
             <a:prstDash val="solid"/>
           </a:ln>
@@ -21147,7 +21016,7 @@
         </p:nvSpPr>
         <p:spPr>
           <a:xfrm>
-            <a:off x="4370832" y="2258568"/>
+            <a:off x="5803392" y="2258568"/>
             <a:ext cx="1828800" cy="292608"/>
           </a:xfrm>
           <a:prstGeom prst="rect">
@@ -21166,13 +21035,13 @@
             <a:r>
               <a:rPr lang="en-US" sz="1300" b="1" dirty="0">
                 <a:solidFill>
-                  <a:srgbClr val="0F766E"/>
+                  <a:srgbClr val="9D174D"/>
                 </a:solidFill>
                 <a:latin typeface="Trebuchet MS" pitchFamily="34" charset="0"/>
                 <a:ea typeface="Trebuchet MS" pitchFamily="34" charset="-122"/>
                 <a:cs typeface="Trebuchet MS" pitchFamily="34" charset="-120"/>
               </a:rPr>
-              <a:t>round</a:t>
+              <a:t>ing</a:t>
             </a:r>
             <a:endParaRPr lang="en-US" sz="1300" dirty="0"/>
           </a:p>
@@ -21186,7 +21055,7 @@
         </p:nvSpPr>
         <p:spPr>
           <a:xfrm>
-            <a:off x="4370832" y="2569464"/>
+            <a:off x="5803392" y="2569464"/>
             <a:ext cx="1828800" cy="201168"/>
           </a:xfrm>
           <a:prstGeom prst="rect">
@@ -21211,7 +21080,7 @@
                 <a:ea typeface="Calibri" pitchFamily="34" charset="-122"/>
                 <a:cs typeface="Calibri" pitchFamily="34" charset="-120"/>
               </a:rPr>
-              <a:t>circular shape</a:t>
+              <a:t>happening now</a:t>
             </a:r>
             <a:endParaRPr lang="en-US" sz="850" dirty="0"/>
           </a:p>
@@ -21225,30 +21094,23 @@
         </p:nvSpPr>
         <p:spPr>
           <a:xfrm>
-            <a:off x="6519672" y="2258568"/>
-            <a:ext cx="1828800" cy="292608"/>
+            <a:off x="365760" y="3273552"/>
+            <a:ext cx="1371600" cy="658368"/>
           </a:xfrm>
           <a:prstGeom prst="rect">
             <a:avLst>
-              <a:gd name="adj" fmla="val 25000"/>
+              <a:gd name="adj" fmla="val 8333"/>
             </a:avLst>
           </a:prstGeom>
           <a:solidFill>
-            <a:srgbClr val="FCE7F3"/>
-          </a:solidFill>
-          <a:ln w="19050">
-            <a:solidFill>
-              <a:srgbClr val="DB2777"/>
-            </a:solidFill>
-            <a:prstDash val="solid"/>
-          </a:ln>
-          <a:effectLst>
-            <a:outerShdw sx="100000" sy="100000" kx="0" ky="0" algn="bl" rotWithShape="0" blurRad="101600" dist="38100" dir="8100000">
-              <a:srgbClr val="000000">
-                <a:alpha val="12000"/>
-              </a:srgbClr>
-            </a:outerShdw>
-          </a:effectLst>
+            <a:srgbClr val="E2E8F0"/>
+          </a:solidFill>
+          <a:ln w="12700">
+            <a:solidFill>
+              <a:srgbClr val="E2E8F0"/>
+            </a:solidFill>
+            <a:prstDash val="solid"/>
+          </a:ln>
         </p:spPr>
       </p:sp>
       <p:sp>
@@ -21259,8 +21121,8 @@
         </p:nvSpPr>
         <p:spPr>
           <a:xfrm>
-            <a:off x="6519672" y="2258568"/>
-            <a:ext cx="1828800" cy="292608"/>
+            <a:off x="365760" y="3273552"/>
+            <a:ext cx="1371600" cy="658368"/>
           </a:xfrm>
           <a:prstGeom prst="rect">
             <a:avLst/>
@@ -21276,69 +21138,30 @@
               <a:buNone/>
             </a:pPr>
             <a:r>
-              <a:rPr lang="en-US" sz="1300" b="1" dirty="0">
-                <a:solidFill>
-                  <a:srgbClr val="9D174D"/>
+              <a:rPr lang="en-US" sz="1100" b="1" dirty="0">
+                <a:solidFill>
+                  <a:srgbClr val="475569"/>
                 </a:solidFill>
                 <a:latin typeface="Trebuchet MS" pitchFamily="34" charset="0"/>
                 <a:ea typeface="Trebuchet MS" pitchFamily="34" charset="-122"/>
                 <a:cs typeface="Trebuchet MS" pitchFamily="34" charset="-120"/>
               </a:rPr>
-              <a:t>ing</a:t>
-            </a:r>
-            <a:endParaRPr lang="en-US" sz="1300" dirty="0"/>
-          </a:p>
-        </p:txBody>
-      </p:sp>
-      <p:sp>
-        <p:nvSpPr>
-          <p:cNvPr id="24" name="Text 22"/>
-          <p:cNvSpPr/>
-          <p:nvPr/>
-        </p:nvSpPr>
-        <p:spPr>
-          <a:xfrm>
-            <a:off x="6519672" y="2569464"/>
-            <a:ext cx="1828800" cy="201168"/>
-          </a:xfrm>
-          <a:prstGeom prst="rect">
-            <a:avLst/>
-          </a:prstGeom>
-          <a:noFill/>
-          <a:ln/>
-        </p:spPr>
-        <p:txBody>
-          <a:bodyPr wrap="square" lIns="0" tIns="0" rIns="0" bIns="0" rtlCol="0" anchor="t"/>
-          <a:lstStyle/>
-          <a:p>
-            <a:pPr algn="ctr" indent="0" marL="0">
-              <a:buNone/>
-            </a:pPr>
-            <a:r>
-              <a:rPr lang="en-US" sz="850" dirty="0">
-                <a:solidFill>
-                  <a:srgbClr val="475569"/>
-                </a:solidFill>
-                <a:latin typeface="Calibri" pitchFamily="34" charset="0"/>
-                <a:ea typeface="Calibri" pitchFamily="34" charset="-122"/>
-                <a:cs typeface="Calibri" pitchFamily="34" charset="-120"/>
-              </a:rPr>
-              <a:t>ongoing action or describing a quality</a:t>
-            </a:r>
-            <a:endParaRPr lang="en-US" sz="850" dirty="0"/>
-          </a:p>
-        </p:txBody>
-      </p:sp>
-      <p:sp>
-        <p:nvSpPr>
-          <p:cNvPr id="25" name="Shape 23"/>
-          <p:cNvSpPr/>
-          <p:nvPr/>
-        </p:nvSpPr>
-        <p:spPr>
-          <a:xfrm>
-            <a:off x="365760" y="3273552"/>
-            <a:ext cx="1371600" cy="658368"/>
+              <a:t>Syllables</a:t>
+            </a:r>
+            <a:endParaRPr lang="en-US" sz="1100" dirty="0"/>
+          </a:p>
+        </p:txBody>
+      </p:sp>
+      <p:sp>
+        <p:nvSpPr>
+          <p:cNvPr id="24" name="Shape 22"/>
+          <p:cNvSpPr/>
+          <p:nvPr/>
+        </p:nvSpPr>
+        <p:spPr>
+          <a:xfrm>
+            <a:off x="1874520" y="3273552"/>
+            <a:ext cx="6903720" cy="658368"/>
           </a:xfrm>
           <a:prstGeom prst="rect">
             <a:avLst>
@@ -21346,11 +21169,38 @@
             </a:avLst>
           </a:prstGeom>
           <a:solidFill>
-            <a:srgbClr val="E2E8F0"/>
-          </a:solidFill>
-          <a:ln w="12700">
-            <a:solidFill>
-              <a:srgbClr val="E2E8F0"/>
+            <a:srgbClr val="CCFBF1"/>
+          </a:solidFill>
+          <a:ln w="12700">
+            <a:solidFill>
+              <a:srgbClr val="0D9488"/>
+            </a:solidFill>
+            <a:prstDash val="solid"/>
+          </a:ln>
+        </p:spPr>
+      </p:sp>
+      <p:sp>
+        <p:nvSpPr>
+          <p:cNvPr id="25" name="Shape 23"/>
+          <p:cNvSpPr/>
+          <p:nvPr/>
+        </p:nvSpPr>
+        <p:spPr>
+          <a:xfrm>
+            <a:off x="2999232" y="3364992"/>
+            <a:ext cx="1645920" cy="475488"/>
+          </a:xfrm>
+          <a:prstGeom prst="rect">
+            <a:avLst>
+              <a:gd name="adj" fmla="val 9615"/>
+            </a:avLst>
+          </a:prstGeom>
+          <a:solidFill>
+            <a:srgbClr val="FFFFFF"/>
+          </a:solidFill>
+          <a:ln w="12700">
+            <a:solidFill>
+              <a:srgbClr val="0D9488"/>
             </a:solidFill>
             <a:prstDash val="solid"/>
           </a:ln>
@@ -21364,8 +21214,8 @@
         </p:nvSpPr>
         <p:spPr>
           <a:xfrm>
-            <a:off x="365760" y="3273552"/>
-            <a:ext cx="1371600" cy="658368"/>
+            <a:off x="2999232" y="3364992"/>
+            <a:ext cx="1645920" cy="475488"/>
           </a:xfrm>
           <a:prstGeom prst="rect">
             <a:avLst/>
@@ -21381,15 +21231,186 @@
               <a:buNone/>
             </a:pPr>
             <a:r>
-              <a:rPr lang="en-US" sz="1100" b="1" dirty="0">
-                <a:solidFill>
-                  <a:srgbClr val="475569"/>
+              <a:rPr lang="en-US" sz="1400" b="1" dirty="0">
+                <a:solidFill>
+                  <a:srgbClr val="0D9488"/>
                 </a:solidFill>
                 <a:latin typeface="Trebuchet MS" pitchFamily="34" charset="0"/>
                 <a:ea typeface="Trebuchet MS" pitchFamily="34" charset="-122"/>
                 <a:cs typeface="Trebuchet MS" pitchFamily="34" charset="-120"/>
               </a:rPr>
-              <a:t>Syllables</a:t>
+              <a:t>round</a:t>
+            </a:r>
+            <a:endParaRPr lang="en-US" sz="1400" dirty="0"/>
+          </a:p>
+        </p:txBody>
+      </p:sp>
+      <p:sp>
+        <p:nvSpPr>
+          <p:cNvPr id="27" name="Text 25"/>
+          <p:cNvSpPr/>
+          <p:nvPr/>
+        </p:nvSpPr>
+        <p:spPr>
+          <a:xfrm>
+            <a:off x="4645152" y="3364992"/>
+            <a:ext cx="1097280" cy="475488"/>
+          </a:xfrm>
+          <a:prstGeom prst="rect">
+            <a:avLst/>
+          </a:prstGeom>
+          <a:noFill/>
+          <a:ln/>
+        </p:spPr>
+        <p:txBody>
+          <a:bodyPr wrap="square" lIns="0" tIns="0" rIns="0" bIns="0" rtlCol="0" anchor="ctr"/>
+          <a:lstStyle/>
+          <a:p>
+            <a:pPr algn="ctr" indent="0" marL="0">
+              <a:buNone/>
+            </a:pPr>
+            <a:r>
+              <a:rPr lang="en-US" sz="1600" b="1" dirty="0">
+                <a:solidFill>
+                  <a:srgbClr val="0D9488"/>
+                </a:solidFill>
+                <a:latin typeface="Trebuchet MS" pitchFamily="34" charset="0"/>
+                <a:ea typeface="Trebuchet MS" pitchFamily="34" charset="-122"/>
+                <a:cs typeface="Trebuchet MS" pitchFamily="34" charset="-120"/>
+              </a:rPr>
+              <a:t>·</a:t>
+            </a:r>
+            <a:endParaRPr lang="en-US" sz="1600" dirty="0"/>
+          </a:p>
+        </p:txBody>
+      </p:sp>
+      <p:sp>
+        <p:nvSpPr>
+          <p:cNvPr id="28" name="Shape 26"/>
+          <p:cNvSpPr/>
+          <p:nvPr/>
+        </p:nvSpPr>
+        <p:spPr>
+          <a:xfrm>
+            <a:off x="5742432" y="3364992"/>
+            <a:ext cx="1645920" cy="475488"/>
+          </a:xfrm>
+          <a:prstGeom prst="rect">
+            <a:avLst>
+              <a:gd name="adj" fmla="val 9615"/>
+            </a:avLst>
+          </a:prstGeom>
+          <a:solidFill>
+            <a:srgbClr val="FFFFFF"/>
+          </a:solidFill>
+          <a:ln w="12700">
+            <a:solidFill>
+              <a:srgbClr val="0D9488"/>
+            </a:solidFill>
+            <a:prstDash val="solid"/>
+          </a:ln>
+        </p:spPr>
+      </p:sp>
+      <p:sp>
+        <p:nvSpPr>
+          <p:cNvPr id="29" name="Text 27"/>
+          <p:cNvSpPr/>
+          <p:nvPr/>
+        </p:nvSpPr>
+        <p:spPr>
+          <a:xfrm>
+            <a:off x="5742432" y="3364992"/>
+            <a:ext cx="1645920" cy="475488"/>
+          </a:xfrm>
+          <a:prstGeom prst="rect">
+            <a:avLst/>
+          </a:prstGeom>
+          <a:noFill/>
+          <a:ln/>
+        </p:spPr>
+        <p:txBody>
+          <a:bodyPr wrap="square" lIns="0" tIns="0" rIns="0" bIns="0" rtlCol="0" anchor="ctr"/>
+          <a:lstStyle/>
+          <a:p>
+            <a:pPr algn="ctr" indent="0" marL="0">
+              <a:buNone/>
+            </a:pPr>
+            <a:r>
+              <a:rPr lang="en-US" sz="1400" b="1" dirty="0">
+                <a:solidFill>
+                  <a:srgbClr val="0D9488"/>
+                </a:solidFill>
+                <a:latin typeface="Trebuchet MS" pitchFamily="34" charset="0"/>
+                <a:ea typeface="Trebuchet MS" pitchFamily="34" charset="-122"/>
+                <a:cs typeface="Trebuchet MS" pitchFamily="34" charset="-120"/>
+              </a:rPr>
+              <a:t>ing</a:t>
+            </a:r>
+            <a:endParaRPr lang="en-US" sz="1400" dirty="0"/>
+          </a:p>
+        </p:txBody>
+      </p:sp>
+      <p:sp>
+        <p:nvSpPr>
+          <p:cNvPr id="30" name="Shape 28"/>
+          <p:cNvSpPr/>
+          <p:nvPr/>
+        </p:nvSpPr>
+        <p:spPr>
+          <a:xfrm>
+            <a:off x="365760" y="4096512"/>
+            <a:ext cx="1371600" cy="804672"/>
+          </a:xfrm>
+          <a:prstGeom prst="rect">
+            <a:avLst>
+              <a:gd name="adj" fmla="val 6818"/>
+            </a:avLst>
+          </a:prstGeom>
+          <a:solidFill>
+            <a:srgbClr val="E2E8F0"/>
+          </a:solidFill>
+          <a:ln w="12700">
+            <a:solidFill>
+              <a:srgbClr val="E2E8F0"/>
+            </a:solidFill>
+            <a:prstDash val="solid"/>
+          </a:ln>
+        </p:spPr>
+      </p:sp>
+      <p:sp>
+        <p:nvSpPr>
+          <p:cNvPr id="31" name="Text 29"/>
+          <p:cNvSpPr/>
+          <p:nvPr/>
+        </p:nvSpPr>
+        <p:spPr>
+          <a:xfrm>
+            <a:off x="365760" y="4096512"/>
+            <a:ext cx="1371600" cy="804672"/>
+          </a:xfrm>
+          <a:prstGeom prst="rect">
+            <a:avLst/>
+          </a:prstGeom>
+          <a:noFill/>
+          <a:ln/>
+        </p:spPr>
+        <p:txBody>
+          <a:bodyPr wrap="square" lIns="0" tIns="0" rIns="0" bIns="0" rtlCol="0" anchor="ctr"/>
+          <a:lstStyle/>
+          <a:p>
+            <a:pPr algn="ctr" indent="0" marL="0">
+              <a:buNone/>
+            </a:pPr>
+            <a:r>
+              <a:rPr lang="en-US" sz="1100" b="1" dirty="0">
+                <a:solidFill>
+                  <a:srgbClr val="475569"/>
+                </a:solidFill>
+                <a:latin typeface="Trebuchet MS" pitchFamily="34" charset="0"/>
+                <a:ea typeface="Trebuchet MS" pitchFamily="34" charset="-122"/>
+                <a:cs typeface="Trebuchet MS" pitchFamily="34" charset="-120"/>
+              </a:rPr>
+              <a:t>Phonemes</a:t>
             </a:r>
             <a:endParaRPr lang="en-US" sz="1100" dirty="0"/>
           </a:p>
@@ -21397,13 +21418,13 @@
       </p:sp>
       <p:sp>
         <p:nvSpPr>
-          <p:cNvPr id="27" name="Shape 25"/>
-          <p:cNvSpPr/>
-          <p:nvPr/>
-        </p:nvSpPr>
-        <p:spPr>
-          <a:xfrm>
-            <a:off x="1874520" y="3273552"/>
+          <p:cNvPr id="32" name="Shape 30"/>
+          <p:cNvSpPr/>
+          <p:nvPr/>
+        </p:nvSpPr>
+        <p:spPr>
+          <a:xfrm>
+            <a:off x="1874520" y="4096512"/>
             <a:ext cx="6903720" cy="658368"/>
           </a:xfrm>
           <a:prstGeom prst="rect">
@@ -21412,30 +21433,30 @@
             </a:avLst>
           </a:prstGeom>
           <a:solidFill>
-            <a:srgbClr val="CCFBF1"/>
-          </a:solidFill>
-          <a:ln w="12700">
-            <a:solidFill>
-              <a:srgbClr val="0D9488"/>
-            </a:solidFill>
-            <a:prstDash val="solid"/>
-          </a:ln>
-        </p:spPr>
-      </p:sp>
-      <p:sp>
-        <p:nvSpPr>
-          <p:cNvPr id="28" name="Shape 26"/>
-          <p:cNvSpPr/>
-          <p:nvPr/>
-        </p:nvSpPr>
-        <p:spPr>
-          <a:xfrm>
-            <a:off x="2313432" y="3364992"/>
-            <a:ext cx="1645920" cy="475488"/>
+            <a:srgbClr val="FCE7F3"/>
+          </a:solidFill>
+          <a:ln w="12700">
+            <a:solidFill>
+              <a:srgbClr val="DB2777"/>
+            </a:solidFill>
+            <a:prstDash val="solid"/>
+          </a:ln>
+        </p:spPr>
+      </p:sp>
+      <p:sp>
+        <p:nvSpPr>
+          <p:cNvPr id="33" name="Shape 31"/>
+          <p:cNvSpPr/>
+          <p:nvPr/>
+        </p:nvSpPr>
+        <p:spPr>
+          <a:xfrm>
+            <a:off x="2254649" y="4169664"/>
+            <a:ext cx="685800" cy="475488"/>
           </a:xfrm>
           <a:prstGeom prst="rect">
             <a:avLst>
-              <a:gd name="adj" fmla="val 9615"/>
+              <a:gd name="adj" fmla="val 7692"/>
             </a:avLst>
           </a:prstGeom>
           <a:solidFill>
@@ -21443,22 +21464,22 @@
           </a:solidFill>
           <a:ln w="12700">
             <a:solidFill>
-              <a:srgbClr val="0D9488"/>
-            </a:solidFill>
-            <a:prstDash val="solid"/>
-          </a:ln>
-        </p:spPr>
-      </p:sp>
-      <p:sp>
-        <p:nvSpPr>
-          <p:cNvPr id="29" name="Text 27"/>
-          <p:cNvSpPr/>
-          <p:nvPr/>
-        </p:nvSpPr>
-        <p:spPr>
-          <a:xfrm>
-            <a:off x="2313432" y="3364992"/>
-            <a:ext cx="1645920" cy="475488"/>
+              <a:srgbClr val="DB2777"/>
+            </a:solidFill>
+            <a:prstDash val="solid"/>
+          </a:ln>
+        </p:spPr>
+      </p:sp>
+      <p:sp>
+        <p:nvSpPr>
+          <p:cNvPr id="34" name="Text 32"/>
+          <p:cNvSpPr/>
+          <p:nvPr/>
+        </p:nvSpPr>
+        <p:spPr>
+          <a:xfrm>
+            <a:off x="2254649" y="4169664"/>
+            <a:ext cx="685800" cy="475488"/>
           </a:xfrm>
           <a:prstGeom prst="rect">
             <a:avLst/>
@@ -21474,30 +21495,57 @@
               <a:buNone/>
             </a:pPr>
             <a:r>
-              <a:rPr lang="en-US" sz="1400" b="1" dirty="0">
-                <a:solidFill>
-                  <a:srgbClr val="0D9488"/>
+              <a:rPr lang="en-US" sz="900" b="1" dirty="0">
+                <a:solidFill>
+                  <a:srgbClr val="9D174D"/>
                 </a:solidFill>
                 <a:latin typeface="Trebuchet MS" pitchFamily="34" charset="0"/>
                 <a:ea typeface="Trebuchet MS" pitchFamily="34" charset="-122"/>
                 <a:cs typeface="Trebuchet MS" pitchFamily="34" charset="-120"/>
               </a:rPr>
-              <a:t>sur</a:t>
-            </a:r>
-            <a:endParaRPr lang="en-US" sz="1400" dirty="0"/>
-          </a:p>
-        </p:txBody>
-      </p:sp>
-      <p:sp>
-        <p:nvSpPr>
-          <p:cNvPr id="30" name="Text 28"/>
-          <p:cNvSpPr/>
-          <p:nvPr/>
-        </p:nvSpPr>
-        <p:spPr>
-          <a:xfrm>
-            <a:off x="3959352" y="3364992"/>
-            <a:ext cx="411480" cy="475488"/>
+              <a:t>r</a:t>
+            </a:r>
+            <a:endParaRPr lang="en-US" sz="900" dirty="0"/>
+          </a:p>
+        </p:txBody>
+      </p:sp>
+      <p:sp>
+        <p:nvSpPr>
+          <p:cNvPr id="35" name="Shape 33"/>
+          <p:cNvSpPr/>
+          <p:nvPr/>
+        </p:nvSpPr>
+        <p:spPr>
+          <a:xfrm>
+            <a:off x="3293146" y="4169664"/>
+            <a:ext cx="685800" cy="475488"/>
+          </a:xfrm>
+          <a:prstGeom prst="rect">
+            <a:avLst>
+              <a:gd name="adj" fmla="val 7692"/>
+            </a:avLst>
+          </a:prstGeom>
+          <a:solidFill>
+            <a:srgbClr val="FFFFFF"/>
+          </a:solidFill>
+          <a:ln w="12700">
+            <a:solidFill>
+              <a:srgbClr val="DB2777"/>
+            </a:solidFill>
+            <a:prstDash val="solid"/>
+          </a:ln>
+        </p:spPr>
+      </p:sp>
+      <p:sp>
+        <p:nvSpPr>
+          <p:cNvPr id="36" name="Text 34"/>
+          <p:cNvSpPr/>
+          <p:nvPr/>
+        </p:nvSpPr>
+        <p:spPr>
+          <a:xfrm>
+            <a:off x="3293146" y="4169664"/>
+            <a:ext cx="685800" cy="475488"/>
           </a:xfrm>
           <a:prstGeom prst="rect">
             <a:avLst/>
@@ -21513,34 +21561,34 @@
               <a:buNone/>
             </a:pPr>
             <a:r>
-              <a:rPr lang="en-US" sz="1600" b="1" dirty="0">
-                <a:solidFill>
-                  <a:srgbClr val="0D9488"/>
+              <a:rPr lang="en-US" sz="900" b="1" dirty="0">
+                <a:solidFill>
+                  <a:srgbClr val="9D174D"/>
                 </a:solidFill>
                 <a:latin typeface="Trebuchet MS" pitchFamily="34" charset="0"/>
                 <a:ea typeface="Trebuchet MS" pitchFamily="34" charset="-122"/>
                 <a:cs typeface="Trebuchet MS" pitchFamily="34" charset="-120"/>
               </a:rPr>
-              <a:t>·</a:t>
-            </a:r>
-            <a:endParaRPr lang="en-US" sz="1600" dirty="0"/>
-          </a:p>
-        </p:txBody>
-      </p:sp>
-      <p:sp>
-        <p:nvSpPr>
-          <p:cNvPr id="31" name="Shape 29"/>
-          <p:cNvSpPr/>
-          <p:nvPr/>
-        </p:nvSpPr>
-        <p:spPr>
-          <a:xfrm>
-            <a:off x="4370832" y="3364992"/>
-            <a:ext cx="1645920" cy="475488"/>
+              <a:t>ou</a:t>
+            </a:r>
+            <a:endParaRPr lang="en-US" sz="900" dirty="0"/>
+          </a:p>
+        </p:txBody>
+      </p:sp>
+      <p:sp>
+        <p:nvSpPr>
+          <p:cNvPr id="37" name="Shape 35"/>
+          <p:cNvSpPr/>
+          <p:nvPr/>
+        </p:nvSpPr>
+        <p:spPr>
+          <a:xfrm>
+            <a:off x="4331643" y="4169664"/>
+            <a:ext cx="685800" cy="475488"/>
           </a:xfrm>
           <a:prstGeom prst="rect">
             <a:avLst>
-              <a:gd name="adj" fmla="val 9615"/>
+              <a:gd name="adj" fmla="val 7692"/>
             </a:avLst>
           </a:prstGeom>
           <a:solidFill>
@@ -21548,22 +21596,22 @@
           </a:solidFill>
           <a:ln w="12700">
             <a:solidFill>
-              <a:srgbClr val="0D9488"/>
-            </a:solidFill>
-            <a:prstDash val="solid"/>
-          </a:ln>
-        </p:spPr>
-      </p:sp>
-      <p:sp>
-        <p:nvSpPr>
-          <p:cNvPr id="32" name="Text 30"/>
-          <p:cNvSpPr/>
-          <p:nvPr/>
-        </p:nvSpPr>
-        <p:spPr>
-          <a:xfrm>
-            <a:off x="4370832" y="3364992"/>
-            <a:ext cx="1645920" cy="475488"/>
+              <a:srgbClr val="DB2777"/>
+            </a:solidFill>
+            <a:prstDash val="solid"/>
+          </a:ln>
+        </p:spPr>
+      </p:sp>
+      <p:sp>
+        <p:nvSpPr>
+          <p:cNvPr id="38" name="Text 36"/>
+          <p:cNvSpPr/>
+          <p:nvPr/>
+        </p:nvSpPr>
+        <p:spPr>
+          <a:xfrm>
+            <a:off x="4331643" y="4169664"/>
+            <a:ext cx="685800" cy="475488"/>
           </a:xfrm>
           <a:prstGeom prst="rect">
             <a:avLst/>
@@ -21579,30 +21627,57 @@
               <a:buNone/>
             </a:pPr>
             <a:r>
-              <a:rPr lang="en-US" sz="1400" b="1" dirty="0">
-                <a:solidFill>
-                  <a:srgbClr val="0D9488"/>
+              <a:rPr lang="en-US" sz="900" b="1" dirty="0">
+                <a:solidFill>
+                  <a:srgbClr val="9D174D"/>
                 </a:solidFill>
                 <a:latin typeface="Trebuchet MS" pitchFamily="34" charset="0"/>
                 <a:ea typeface="Trebuchet MS" pitchFamily="34" charset="-122"/>
                 <a:cs typeface="Trebuchet MS" pitchFamily="34" charset="-120"/>
               </a:rPr>
-              <a:t>round</a:t>
-            </a:r>
-            <a:endParaRPr lang="en-US" sz="1400" dirty="0"/>
-          </a:p>
-        </p:txBody>
-      </p:sp>
-      <p:sp>
-        <p:nvSpPr>
-          <p:cNvPr id="33" name="Text 31"/>
-          <p:cNvSpPr/>
-          <p:nvPr/>
-        </p:nvSpPr>
-        <p:spPr>
-          <a:xfrm>
-            <a:off x="6016752" y="3364992"/>
-            <a:ext cx="411480" cy="475488"/>
+              <a:t>n</a:t>
+            </a:r>
+            <a:endParaRPr lang="en-US" sz="900" dirty="0"/>
+          </a:p>
+        </p:txBody>
+      </p:sp>
+      <p:sp>
+        <p:nvSpPr>
+          <p:cNvPr id="39" name="Shape 37"/>
+          <p:cNvSpPr/>
+          <p:nvPr/>
+        </p:nvSpPr>
+        <p:spPr>
+          <a:xfrm>
+            <a:off x="5370141" y="4169664"/>
+            <a:ext cx="685800" cy="475488"/>
+          </a:xfrm>
+          <a:prstGeom prst="rect">
+            <a:avLst>
+              <a:gd name="adj" fmla="val 7692"/>
+            </a:avLst>
+          </a:prstGeom>
+          <a:solidFill>
+            <a:srgbClr val="FFFFFF"/>
+          </a:solidFill>
+          <a:ln w="12700">
+            <a:solidFill>
+              <a:srgbClr val="DB2777"/>
+            </a:solidFill>
+            <a:prstDash val="solid"/>
+          </a:ln>
+        </p:spPr>
+      </p:sp>
+      <p:sp>
+        <p:nvSpPr>
+          <p:cNvPr id="40" name="Text 38"/>
+          <p:cNvSpPr/>
+          <p:nvPr/>
+        </p:nvSpPr>
+        <p:spPr>
+          <a:xfrm>
+            <a:off x="5370141" y="4169664"/>
+            <a:ext cx="685800" cy="475488"/>
           </a:xfrm>
           <a:prstGeom prst="rect">
             <a:avLst/>
@@ -21618,34 +21693,34 @@
               <a:buNone/>
             </a:pPr>
             <a:r>
-              <a:rPr lang="en-US" sz="1600" b="1" dirty="0">
-                <a:solidFill>
-                  <a:srgbClr val="0D9488"/>
+              <a:rPr lang="en-US" sz="900" b="1" dirty="0">
+                <a:solidFill>
+                  <a:srgbClr val="9D174D"/>
                 </a:solidFill>
                 <a:latin typeface="Trebuchet MS" pitchFamily="34" charset="0"/>
                 <a:ea typeface="Trebuchet MS" pitchFamily="34" charset="-122"/>
                 <a:cs typeface="Trebuchet MS" pitchFamily="34" charset="-120"/>
               </a:rPr>
-              <a:t>·</a:t>
-            </a:r>
-            <a:endParaRPr lang="en-US" sz="1600" dirty="0"/>
-          </a:p>
-        </p:txBody>
-      </p:sp>
-      <p:sp>
-        <p:nvSpPr>
-          <p:cNvPr id="34" name="Shape 32"/>
-          <p:cNvSpPr/>
-          <p:nvPr/>
-        </p:nvSpPr>
-        <p:spPr>
-          <a:xfrm>
-            <a:off x="6428232" y="3364992"/>
-            <a:ext cx="1645920" cy="475488"/>
+              <a:t>d</a:t>
+            </a:r>
+            <a:endParaRPr lang="en-US" sz="900" dirty="0"/>
+          </a:p>
+        </p:txBody>
+      </p:sp>
+      <p:sp>
+        <p:nvSpPr>
+          <p:cNvPr id="41" name="Shape 39"/>
+          <p:cNvSpPr/>
+          <p:nvPr/>
+        </p:nvSpPr>
+        <p:spPr>
+          <a:xfrm>
+            <a:off x="6408638" y="4169664"/>
+            <a:ext cx="685800" cy="475488"/>
           </a:xfrm>
           <a:prstGeom prst="rect">
             <a:avLst>
-              <a:gd name="adj" fmla="val 9615"/>
+              <a:gd name="adj" fmla="val 7692"/>
             </a:avLst>
           </a:prstGeom>
           <a:solidFill>
@@ -21653,22 +21728,22 @@
           </a:solidFill>
           <a:ln w="12700">
             <a:solidFill>
-              <a:srgbClr val="0D9488"/>
-            </a:solidFill>
-            <a:prstDash val="solid"/>
-          </a:ln>
-        </p:spPr>
-      </p:sp>
-      <p:sp>
-        <p:nvSpPr>
-          <p:cNvPr id="35" name="Text 33"/>
-          <p:cNvSpPr/>
-          <p:nvPr/>
-        </p:nvSpPr>
-        <p:spPr>
-          <a:xfrm>
-            <a:off x="6428232" y="3364992"/>
-            <a:ext cx="1645920" cy="475488"/>
+              <a:srgbClr val="DB2777"/>
+            </a:solidFill>
+            <a:prstDash val="solid"/>
+          </a:ln>
+        </p:spPr>
+      </p:sp>
+      <p:sp>
+        <p:nvSpPr>
+          <p:cNvPr id="42" name="Text 40"/>
+          <p:cNvSpPr/>
+          <p:nvPr/>
+        </p:nvSpPr>
+        <p:spPr>
+          <a:xfrm>
+            <a:off x="6408638" y="4169664"/>
+            <a:ext cx="685800" cy="475488"/>
           </a:xfrm>
           <a:prstGeom prst="rect">
             <a:avLst/>
@@ -21684,122 +21759,29 @@
               <a:buNone/>
             </a:pPr>
             <a:r>
-              <a:rPr lang="en-US" sz="1400" b="1" dirty="0">
-                <a:solidFill>
-                  <a:srgbClr val="0D9488"/>
+              <a:rPr lang="en-US" sz="900" b="1" dirty="0">
+                <a:solidFill>
+                  <a:srgbClr val="9D174D"/>
                 </a:solidFill>
                 <a:latin typeface="Trebuchet MS" pitchFamily="34" charset="0"/>
                 <a:ea typeface="Trebuchet MS" pitchFamily="34" charset="-122"/>
                 <a:cs typeface="Trebuchet MS" pitchFamily="34" charset="-120"/>
               </a:rPr>
-              <a:t>ing</a:t>
-            </a:r>
-            <a:endParaRPr lang="en-US" sz="1400" dirty="0"/>
-          </a:p>
-        </p:txBody>
-      </p:sp>
-      <p:sp>
-        <p:nvSpPr>
-          <p:cNvPr id="36" name="Shape 34"/>
-          <p:cNvSpPr/>
-          <p:nvPr/>
-        </p:nvSpPr>
-        <p:spPr>
-          <a:xfrm>
-            <a:off x="365760" y="4096512"/>
-            <a:ext cx="1371600" cy="804672"/>
-          </a:xfrm>
-          <a:prstGeom prst="rect">
-            <a:avLst>
-              <a:gd name="adj" fmla="val 6818"/>
-            </a:avLst>
-          </a:prstGeom>
-          <a:solidFill>
-            <a:srgbClr val="E2E8F0"/>
-          </a:solidFill>
-          <a:ln w="12700">
-            <a:solidFill>
-              <a:srgbClr val="E2E8F0"/>
-            </a:solidFill>
-            <a:prstDash val="solid"/>
-          </a:ln>
-        </p:spPr>
-      </p:sp>
-      <p:sp>
-        <p:nvSpPr>
-          <p:cNvPr id="37" name="Text 35"/>
-          <p:cNvSpPr/>
-          <p:nvPr/>
-        </p:nvSpPr>
-        <p:spPr>
-          <a:xfrm>
-            <a:off x="365760" y="4096512"/>
-            <a:ext cx="1371600" cy="804672"/>
-          </a:xfrm>
-          <a:prstGeom prst="rect">
-            <a:avLst/>
-          </a:prstGeom>
-          <a:noFill/>
-          <a:ln/>
-        </p:spPr>
-        <p:txBody>
-          <a:bodyPr wrap="square" lIns="0" tIns="0" rIns="0" bIns="0" rtlCol="0" anchor="ctr"/>
-          <a:lstStyle/>
-          <a:p>
-            <a:pPr algn="ctr" indent="0" marL="0">
-              <a:buNone/>
-            </a:pPr>
-            <a:r>
-              <a:rPr lang="en-US" sz="1100" b="1" dirty="0">
-                <a:solidFill>
-                  <a:srgbClr val="475569"/>
-                </a:solidFill>
-                <a:latin typeface="Trebuchet MS" pitchFamily="34" charset="0"/>
-                <a:ea typeface="Trebuchet MS" pitchFamily="34" charset="-122"/>
-                <a:cs typeface="Trebuchet MS" pitchFamily="34" charset="-120"/>
-              </a:rPr>
-              <a:t>Phonemes</a:t>
-            </a:r>
-            <a:endParaRPr lang="en-US" sz="1100" dirty="0"/>
-          </a:p>
-        </p:txBody>
-      </p:sp>
-      <p:sp>
-        <p:nvSpPr>
-          <p:cNvPr id="38" name="Shape 36"/>
-          <p:cNvSpPr/>
-          <p:nvPr/>
-        </p:nvSpPr>
-        <p:spPr>
-          <a:xfrm>
-            <a:off x="1874520" y="4096512"/>
-            <a:ext cx="6903720" cy="658368"/>
-          </a:xfrm>
-          <a:prstGeom prst="rect">
-            <a:avLst>
-              <a:gd name="adj" fmla="val 8333"/>
-            </a:avLst>
-          </a:prstGeom>
-          <a:solidFill>
-            <a:srgbClr val="FCE7F3"/>
-          </a:solidFill>
-          <a:ln w="12700">
-            <a:solidFill>
-              <a:srgbClr val="DB2777"/>
-            </a:solidFill>
-            <a:prstDash val="solid"/>
-          </a:ln>
-        </p:spPr>
-      </p:sp>
-      <p:sp>
-        <p:nvSpPr>
-          <p:cNvPr id="39" name="Shape 37"/>
-          <p:cNvSpPr/>
-          <p:nvPr/>
-        </p:nvSpPr>
-        <p:spPr>
-          <a:xfrm>
-            <a:off x="2124837" y="4169664"/>
+              <a:t>i</a:t>
+            </a:r>
+            <a:endParaRPr lang="en-US" sz="900" dirty="0"/>
+          </a:p>
+        </p:txBody>
+      </p:sp>
+      <p:sp>
+        <p:nvSpPr>
+          <p:cNvPr id="43" name="Shape 41"/>
+          <p:cNvSpPr/>
+          <p:nvPr/>
+        </p:nvSpPr>
+        <p:spPr>
+          <a:xfrm>
+            <a:off x="7447135" y="4169664"/>
             <a:ext cx="685800" cy="475488"/>
           </a:xfrm>
           <a:prstGeom prst="rect">
@@ -21820,409 +21802,13 @@
       </p:sp>
       <p:sp>
         <p:nvSpPr>
-          <p:cNvPr id="40" name="Text 38"/>
-          <p:cNvSpPr/>
-          <p:nvPr/>
-        </p:nvSpPr>
-        <p:spPr>
-          <a:xfrm>
-            <a:off x="2124837" y="4169664"/>
-            <a:ext cx="685800" cy="475488"/>
-          </a:xfrm>
-          <a:prstGeom prst="rect">
-            <a:avLst/>
-          </a:prstGeom>
-          <a:noFill/>
-          <a:ln/>
-        </p:spPr>
-        <p:txBody>
-          <a:bodyPr wrap="square" lIns="0" tIns="0" rIns="0" bIns="0" rtlCol="0" anchor="ctr"/>
-          <a:lstStyle/>
-          <a:p>
-            <a:pPr algn="ctr" indent="0" marL="0">
-              <a:buNone/>
-            </a:pPr>
-            <a:r>
-              <a:rPr lang="en-US" sz="900" b="1" dirty="0">
-                <a:solidFill>
-                  <a:srgbClr val="9D174D"/>
-                </a:solidFill>
-                <a:latin typeface="Trebuchet MS" pitchFamily="34" charset="0"/>
-                <a:ea typeface="Trebuchet MS" pitchFamily="34" charset="-122"/>
-                <a:cs typeface="Trebuchet MS" pitchFamily="34" charset="-120"/>
-              </a:rPr>
-              <a:t>s</a:t>
-            </a:r>
-            <a:endParaRPr lang="en-US" sz="900" dirty="0"/>
-          </a:p>
-        </p:txBody>
-      </p:sp>
-      <p:sp>
-        <p:nvSpPr>
-          <p:cNvPr id="41" name="Shape 39"/>
-          <p:cNvSpPr/>
-          <p:nvPr/>
-        </p:nvSpPr>
-        <p:spPr>
-          <a:xfrm>
-            <a:off x="3033522" y="4169664"/>
-            <a:ext cx="685800" cy="475488"/>
-          </a:xfrm>
-          <a:prstGeom prst="rect">
-            <a:avLst>
-              <a:gd name="adj" fmla="val 7692"/>
-            </a:avLst>
-          </a:prstGeom>
-          <a:solidFill>
-            <a:srgbClr val="FFFFFF"/>
-          </a:solidFill>
-          <a:ln w="12700">
-            <a:solidFill>
-              <a:srgbClr val="DB2777"/>
-            </a:solidFill>
-            <a:prstDash val="solid"/>
-          </a:ln>
-        </p:spPr>
-      </p:sp>
-      <p:sp>
-        <p:nvSpPr>
-          <p:cNvPr id="42" name="Text 40"/>
-          <p:cNvSpPr/>
-          <p:nvPr/>
-        </p:nvSpPr>
-        <p:spPr>
-          <a:xfrm>
-            <a:off x="3033522" y="4169664"/>
-            <a:ext cx="685800" cy="475488"/>
-          </a:xfrm>
-          <a:prstGeom prst="rect">
-            <a:avLst/>
-          </a:prstGeom>
-          <a:noFill/>
-          <a:ln/>
-        </p:spPr>
-        <p:txBody>
-          <a:bodyPr wrap="square" lIns="0" tIns="0" rIns="0" bIns="0" rtlCol="0" anchor="ctr"/>
-          <a:lstStyle/>
-          <a:p>
-            <a:pPr algn="ctr" indent="0" marL="0">
-              <a:buNone/>
-            </a:pPr>
-            <a:r>
-              <a:rPr lang="en-US" sz="900" b="1" dirty="0">
-                <a:solidFill>
-                  <a:srgbClr val="9D174D"/>
-                </a:solidFill>
-                <a:latin typeface="Trebuchet MS" pitchFamily="34" charset="0"/>
-                <a:ea typeface="Trebuchet MS" pitchFamily="34" charset="-122"/>
-                <a:cs typeface="Trebuchet MS" pitchFamily="34" charset="-120"/>
-              </a:rPr>
-              <a:t>ur</a:t>
-            </a:r>
-            <a:endParaRPr lang="en-US" sz="900" dirty="0"/>
-          </a:p>
-        </p:txBody>
-      </p:sp>
-      <p:sp>
-        <p:nvSpPr>
-          <p:cNvPr id="43" name="Shape 41"/>
-          <p:cNvSpPr/>
-          <p:nvPr/>
-        </p:nvSpPr>
-        <p:spPr>
-          <a:xfrm>
-            <a:off x="3942207" y="4169664"/>
-            <a:ext cx="685800" cy="475488"/>
-          </a:xfrm>
-          <a:prstGeom prst="rect">
-            <a:avLst>
-              <a:gd name="adj" fmla="val 7692"/>
-            </a:avLst>
-          </a:prstGeom>
-          <a:solidFill>
-            <a:srgbClr val="FFFFFF"/>
-          </a:solidFill>
-          <a:ln w="12700">
-            <a:solidFill>
-              <a:srgbClr val="DB2777"/>
-            </a:solidFill>
-            <a:prstDash val="solid"/>
-          </a:ln>
-        </p:spPr>
-      </p:sp>
-      <p:sp>
-        <p:nvSpPr>
           <p:cNvPr id="44" name="Text 42"/>
           <p:cNvSpPr/>
           <p:nvPr/>
         </p:nvSpPr>
         <p:spPr>
           <a:xfrm>
-            <a:off x="3942207" y="4169664"/>
-            <a:ext cx="685800" cy="475488"/>
-          </a:xfrm>
-          <a:prstGeom prst="rect">
-            <a:avLst/>
-          </a:prstGeom>
-          <a:noFill/>
-          <a:ln/>
-        </p:spPr>
-        <p:txBody>
-          <a:bodyPr wrap="square" lIns="0" tIns="0" rIns="0" bIns="0" rtlCol="0" anchor="ctr"/>
-          <a:lstStyle/>
-          <a:p>
-            <a:pPr algn="ctr" indent="0" marL="0">
-              <a:buNone/>
-            </a:pPr>
-            <a:r>
-              <a:rPr lang="en-US" sz="900" b="1" dirty="0">
-                <a:solidFill>
-                  <a:srgbClr val="9D174D"/>
-                </a:solidFill>
-                <a:latin typeface="Trebuchet MS" pitchFamily="34" charset="0"/>
-                <a:ea typeface="Trebuchet MS" pitchFamily="34" charset="-122"/>
-                <a:cs typeface="Trebuchet MS" pitchFamily="34" charset="-120"/>
-              </a:rPr>
-              <a:t>r</a:t>
-            </a:r>
-            <a:endParaRPr lang="en-US" sz="900" dirty="0"/>
-          </a:p>
-        </p:txBody>
-      </p:sp>
-      <p:sp>
-        <p:nvSpPr>
-          <p:cNvPr id="45" name="Shape 43"/>
-          <p:cNvSpPr/>
-          <p:nvPr/>
-        </p:nvSpPr>
-        <p:spPr>
-          <a:xfrm>
-            <a:off x="4850892" y="4169664"/>
-            <a:ext cx="685800" cy="475488"/>
-          </a:xfrm>
-          <a:prstGeom prst="rect">
-            <a:avLst>
-              <a:gd name="adj" fmla="val 7692"/>
-            </a:avLst>
-          </a:prstGeom>
-          <a:solidFill>
-            <a:srgbClr val="FFFFFF"/>
-          </a:solidFill>
-          <a:ln w="12700">
-            <a:solidFill>
-              <a:srgbClr val="DB2777"/>
-            </a:solidFill>
-            <a:prstDash val="solid"/>
-          </a:ln>
-        </p:spPr>
-      </p:sp>
-      <p:sp>
-        <p:nvSpPr>
-          <p:cNvPr id="46" name="Text 44"/>
-          <p:cNvSpPr/>
-          <p:nvPr/>
-        </p:nvSpPr>
-        <p:spPr>
-          <a:xfrm>
-            <a:off x="4850892" y="4169664"/>
-            <a:ext cx="685800" cy="475488"/>
-          </a:xfrm>
-          <a:prstGeom prst="rect">
-            <a:avLst/>
-          </a:prstGeom>
-          <a:noFill/>
-          <a:ln/>
-        </p:spPr>
-        <p:txBody>
-          <a:bodyPr wrap="square" lIns="0" tIns="0" rIns="0" bIns="0" rtlCol="0" anchor="ctr"/>
-          <a:lstStyle/>
-          <a:p>
-            <a:pPr algn="ctr" indent="0" marL="0">
-              <a:buNone/>
-            </a:pPr>
-            <a:r>
-              <a:rPr lang="en-US" sz="900" b="1" dirty="0">
-                <a:solidFill>
-                  <a:srgbClr val="9D174D"/>
-                </a:solidFill>
-                <a:latin typeface="Trebuchet MS" pitchFamily="34" charset="0"/>
-                <a:ea typeface="Trebuchet MS" pitchFamily="34" charset="-122"/>
-                <a:cs typeface="Trebuchet MS" pitchFamily="34" charset="-120"/>
-              </a:rPr>
-              <a:t>ou</a:t>
-            </a:r>
-            <a:endParaRPr lang="en-US" sz="900" dirty="0"/>
-          </a:p>
-        </p:txBody>
-      </p:sp>
-      <p:sp>
-        <p:nvSpPr>
-          <p:cNvPr id="47" name="Shape 45"/>
-          <p:cNvSpPr/>
-          <p:nvPr/>
-        </p:nvSpPr>
-        <p:spPr>
-          <a:xfrm>
-            <a:off x="5759577" y="4169664"/>
-            <a:ext cx="685800" cy="475488"/>
-          </a:xfrm>
-          <a:prstGeom prst="rect">
-            <a:avLst>
-              <a:gd name="adj" fmla="val 7692"/>
-            </a:avLst>
-          </a:prstGeom>
-          <a:solidFill>
-            <a:srgbClr val="FFFFFF"/>
-          </a:solidFill>
-          <a:ln w="12700">
-            <a:solidFill>
-              <a:srgbClr val="DB2777"/>
-            </a:solidFill>
-            <a:prstDash val="solid"/>
-          </a:ln>
-        </p:spPr>
-      </p:sp>
-      <p:sp>
-        <p:nvSpPr>
-          <p:cNvPr id="48" name="Text 46"/>
-          <p:cNvSpPr/>
-          <p:nvPr/>
-        </p:nvSpPr>
-        <p:spPr>
-          <a:xfrm>
-            <a:off x="5759577" y="4169664"/>
-            <a:ext cx="685800" cy="475488"/>
-          </a:xfrm>
-          <a:prstGeom prst="rect">
-            <a:avLst/>
-          </a:prstGeom>
-          <a:noFill/>
-          <a:ln/>
-        </p:spPr>
-        <p:txBody>
-          <a:bodyPr wrap="square" lIns="0" tIns="0" rIns="0" bIns="0" rtlCol="0" anchor="ctr"/>
-          <a:lstStyle/>
-          <a:p>
-            <a:pPr algn="ctr" indent="0" marL="0">
-              <a:buNone/>
-            </a:pPr>
-            <a:r>
-              <a:rPr lang="en-US" sz="900" b="1" dirty="0">
-                <a:solidFill>
-                  <a:srgbClr val="9D174D"/>
-                </a:solidFill>
-                <a:latin typeface="Trebuchet MS" pitchFamily="34" charset="0"/>
-                <a:ea typeface="Trebuchet MS" pitchFamily="34" charset="-122"/>
-                <a:cs typeface="Trebuchet MS" pitchFamily="34" charset="-120"/>
-              </a:rPr>
-              <a:t>nd</a:t>
-            </a:r>
-            <a:endParaRPr lang="en-US" sz="900" dirty="0"/>
-          </a:p>
-        </p:txBody>
-      </p:sp>
-      <p:sp>
-        <p:nvSpPr>
-          <p:cNvPr id="49" name="Shape 47"/>
-          <p:cNvSpPr/>
-          <p:nvPr/>
-        </p:nvSpPr>
-        <p:spPr>
-          <a:xfrm>
-            <a:off x="6668262" y="4169664"/>
-            <a:ext cx="685800" cy="475488"/>
-          </a:xfrm>
-          <a:prstGeom prst="rect">
-            <a:avLst>
-              <a:gd name="adj" fmla="val 7692"/>
-            </a:avLst>
-          </a:prstGeom>
-          <a:solidFill>
-            <a:srgbClr val="FFFFFF"/>
-          </a:solidFill>
-          <a:ln w="12700">
-            <a:solidFill>
-              <a:srgbClr val="DB2777"/>
-            </a:solidFill>
-            <a:prstDash val="solid"/>
-          </a:ln>
-        </p:spPr>
-      </p:sp>
-      <p:sp>
-        <p:nvSpPr>
-          <p:cNvPr id="50" name="Text 48"/>
-          <p:cNvSpPr/>
-          <p:nvPr/>
-        </p:nvSpPr>
-        <p:spPr>
-          <a:xfrm>
-            <a:off x="6668262" y="4169664"/>
-            <a:ext cx="685800" cy="475488"/>
-          </a:xfrm>
-          <a:prstGeom prst="rect">
-            <a:avLst/>
-          </a:prstGeom>
-          <a:noFill/>
-          <a:ln/>
-        </p:spPr>
-        <p:txBody>
-          <a:bodyPr wrap="square" lIns="0" tIns="0" rIns="0" bIns="0" rtlCol="0" anchor="ctr"/>
-          <a:lstStyle/>
-          <a:p>
-            <a:pPr algn="ctr" indent="0" marL="0">
-              <a:buNone/>
-            </a:pPr>
-            <a:r>
-              <a:rPr lang="en-US" sz="900" b="1" dirty="0">
-                <a:solidFill>
-                  <a:srgbClr val="9D174D"/>
-                </a:solidFill>
-                <a:latin typeface="Trebuchet MS" pitchFamily="34" charset="0"/>
-                <a:ea typeface="Trebuchet MS" pitchFamily="34" charset="-122"/>
-                <a:cs typeface="Trebuchet MS" pitchFamily="34" charset="-120"/>
-              </a:rPr>
-              <a:t>i</a:t>
-            </a:r>
-            <a:endParaRPr lang="en-US" sz="900" dirty="0"/>
-          </a:p>
-        </p:txBody>
-      </p:sp>
-      <p:sp>
-        <p:nvSpPr>
-          <p:cNvPr id="51" name="Shape 49"/>
-          <p:cNvSpPr/>
-          <p:nvPr/>
-        </p:nvSpPr>
-        <p:spPr>
-          <a:xfrm>
-            <a:off x="7576947" y="4169664"/>
-            <a:ext cx="685800" cy="475488"/>
-          </a:xfrm>
-          <a:prstGeom prst="rect">
-            <a:avLst>
-              <a:gd name="adj" fmla="val 7692"/>
-            </a:avLst>
-          </a:prstGeom>
-          <a:solidFill>
-            <a:srgbClr val="FFFFFF"/>
-          </a:solidFill>
-          <a:ln w="12700">
-            <a:solidFill>
-              <a:srgbClr val="DB2777"/>
-            </a:solidFill>
-            <a:prstDash val="solid"/>
-          </a:ln>
-        </p:spPr>
-      </p:sp>
-      <p:sp>
-        <p:nvSpPr>
-          <p:cNvPr id="52" name="Text 50"/>
-          <p:cNvSpPr/>
-          <p:nvPr/>
-        </p:nvSpPr>
-        <p:spPr>
-          <a:xfrm>
-            <a:off x="7576947" y="4169664"/>
+            <a:off x="7447135" y="4169664"/>
             <a:ext cx="685800" cy="475488"/>
           </a:xfrm>
           <a:prstGeom prst="rect">
@@ -22539,7 +22125,7 @@
                 <a:ea typeface="Calibri" pitchFamily="34" charset="-122"/>
                 <a:cs typeface="Calibri" pitchFamily="34" charset="-120"/>
               </a:rPr>
-              <a:t>Word Labs  •  wordlabs.app  •  Root: 'round' = circular shape or movement</a:t>
+              <a:t>Word Labs  •  wordlabs.app  •  Root: 'round' = shaped like a circle</a:t>
             </a:r>
             <a:endParaRPr lang="en-US" sz="800" dirty="0"/>
           </a:p>
@@ -22678,7 +22264,7 @@
                 <a:ea typeface="Trebuchet MS" pitchFamily="34" charset="-122"/>
                 <a:cs typeface="Trebuchet MS" pitchFamily="34" charset="-120"/>
               </a:rPr>
-              <a:t>roundly</a:t>
+              <a:t>roundness</a:t>
             </a:r>
             <a:endParaRPr lang="en-US" sz="2800" dirty="0"/>
           </a:p>
@@ -23366,7 +22952,7 @@
                 <a:ea typeface="Calibri" pitchFamily="34" charset="-122"/>
                 <a:cs typeface="Calibri" pitchFamily="34" charset="-120"/>
               </a:rPr>
-              <a:t>Word Labs  •  wordlabs.app  •  Root: 'round' = circular shape or movement</a:t>
+              <a:t>Word Labs  •  wordlabs.app  •  Root: 'round' = shaped like a circle</a:t>
             </a:r>
             <a:endParaRPr lang="en-US" sz="800" dirty="0"/>
           </a:p>
@@ -23505,7 +23091,7 @@
                 <a:ea typeface="Trebuchet MS" pitchFamily="34" charset="-122"/>
                 <a:cs typeface="Trebuchet MS" pitchFamily="34" charset="-120"/>
               </a:rPr>
-              <a:t>roundly</a:t>
+              <a:t>roundness</a:t>
             </a:r>
             <a:endParaRPr lang="en-US" sz="2800" dirty="0"/>
           </a:p>
@@ -23683,7 +23269,7 @@
                 <a:ea typeface="Calibri" pitchFamily="34" charset="-122"/>
                 <a:cs typeface="Calibri" pitchFamily="34" charset="-120"/>
               </a:rPr>
-              <a:t>circular shape</a:t>
+              <a:t>shaped like a circle</a:t>
             </a:r>
             <a:endParaRPr lang="en-US" sz="850" dirty="0"/>
           </a:p>
@@ -23756,7 +23342,7 @@
                 <a:ea typeface="Trebuchet MS" pitchFamily="34" charset="-122"/>
                 <a:cs typeface="Trebuchet MS" pitchFamily="34" charset="-120"/>
               </a:rPr>
-              <a:t>ly</a:t>
+              <a:t>ness</a:t>
             </a:r>
             <a:endParaRPr lang="en-US" sz="1300" dirty="0"/>
           </a:p>
@@ -23795,7 +23381,7 @@
                 <a:ea typeface="Calibri" pitchFamily="34" charset="-122"/>
                 <a:cs typeface="Calibri" pitchFamily="34" charset="-120"/>
               </a:rPr>
-              <a:t>in a certain way</a:t>
+              <a:t>state of</a:t>
             </a:r>
             <a:endParaRPr lang="en-US" sz="850" dirty="0"/>
           </a:p>
@@ -24351,7 +23937,7 @@
                 <a:ea typeface="Calibri" pitchFamily="34" charset="-122"/>
                 <a:cs typeface="Calibri" pitchFamily="34" charset="-120"/>
               </a:rPr>
-              <a:t>Word Labs  •  wordlabs.app  •  Root: 'round' = circular shape or movement</a:t>
+              <a:t>Word Labs  •  wordlabs.app  •  Root: 'round' = shaped like a circle</a:t>
             </a:r>
             <a:endParaRPr lang="en-US" sz="800" dirty="0"/>
           </a:p>
@@ -24424,7 +24010,7 @@
                 <a:ea typeface="Trebuchet MS" pitchFamily="34" charset="-122"/>
                 <a:cs typeface="Trebuchet MS" pitchFamily="34" charset="-120"/>
               </a:rPr>
-              <a:t>We are learning that the root 'round' means 'circular shape or movement'.</a:t>
+              <a:t>We are learning that the root 'round' means 'shaped like a circle'.</a:t>
             </a:r>
             <a:endParaRPr lang="en-US" sz="2000" dirty="0"/>
           </a:p>
@@ -25070,7 +24656,7 @@
                 <a:ea typeface="Calibri" pitchFamily="34" charset="-122"/>
                 <a:cs typeface="Calibri" pitchFamily="34" charset="-120"/>
               </a:rPr>
-              <a:t>Word Labs  •  wordlabs.app  •  Root: 'round' = circular shape or movement</a:t>
+              <a:t>Word Labs  •  wordlabs.app  •  Root: 'round' = shaped like a circle</a:t>
             </a:r>
             <a:endParaRPr lang="en-US" sz="800" dirty="0"/>
           </a:p>
@@ -25209,7 +24795,7 @@
                 <a:ea typeface="Trebuchet MS" pitchFamily="34" charset="-122"/>
                 <a:cs typeface="Trebuchet MS" pitchFamily="34" charset="-120"/>
               </a:rPr>
-              <a:t>roundly</a:t>
+              <a:t>roundness</a:t>
             </a:r>
             <a:endParaRPr lang="en-US" sz="2800" dirty="0"/>
           </a:p>
@@ -25387,7 +24973,7 @@
                 <a:ea typeface="Calibri" pitchFamily="34" charset="-122"/>
                 <a:cs typeface="Calibri" pitchFamily="34" charset="-120"/>
               </a:rPr>
-              <a:t>circular shape</a:t>
+              <a:t>shaped like a circle</a:t>
             </a:r>
             <a:endParaRPr lang="en-US" sz="850" dirty="0"/>
           </a:p>
@@ -25460,7 +25046,7 @@
                 <a:ea typeface="Trebuchet MS" pitchFamily="34" charset="-122"/>
                 <a:cs typeface="Trebuchet MS" pitchFamily="34" charset="-120"/>
               </a:rPr>
-              <a:t>ly</a:t>
+              <a:t>ness</a:t>
             </a:r>
             <a:endParaRPr lang="en-US" sz="1300" dirty="0"/>
           </a:p>
@@ -25499,7 +25085,7 @@
                 <a:ea typeface="Calibri" pitchFamily="34" charset="-122"/>
                 <a:cs typeface="Calibri" pitchFamily="34" charset="-120"/>
               </a:rPr>
-              <a:t>in a certain way</a:t>
+              <a:t>state of</a:t>
             </a:r>
             <a:endParaRPr lang="en-US" sz="850" dirty="0"/>
           </a:p>
@@ -25763,7 +25349,7 @@
                 <a:ea typeface="Trebuchet MS" pitchFamily="34" charset="-122"/>
                 <a:cs typeface="Trebuchet MS" pitchFamily="34" charset="-120"/>
               </a:rPr>
-              <a:t>ly</a:t>
+              <a:t>ness</a:t>
             </a:r>
             <a:endParaRPr lang="en-US" sz="1400" dirty="0"/>
           </a:p>
@@ -26187,7 +25773,7 @@
                 <a:ea typeface="Calibri" pitchFamily="34" charset="-122"/>
                 <a:cs typeface="Calibri" pitchFamily="34" charset="-120"/>
               </a:rPr>
-              <a:t>Word Labs  •  wordlabs.app  •  Root: 'round' = circular shape or movement</a:t>
+              <a:t>Word Labs  •  wordlabs.app  •  Root: 'round' = shaped like a circle</a:t>
             </a:r>
             <a:endParaRPr lang="en-US" sz="800" dirty="0"/>
           </a:p>
@@ -26326,7 +25912,7 @@
                 <a:ea typeface="Trebuchet MS" pitchFamily="34" charset="-122"/>
                 <a:cs typeface="Trebuchet MS" pitchFamily="34" charset="-120"/>
               </a:rPr>
-              <a:t>roundly</a:t>
+              <a:t>roundness</a:t>
             </a:r>
             <a:endParaRPr lang="en-US" sz="2800" dirty="0"/>
           </a:p>
@@ -26504,7 +26090,7 @@
                 <a:ea typeface="Calibri" pitchFamily="34" charset="-122"/>
                 <a:cs typeface="Calibri" pitchFamily="34" charset="-120"/>
               </a:rPr>
-              <a:t>circular shape</a:t>
+              <a:t>shaped like a circle</a:t>
             </a:r>
             <a:endParaRPr lang="en-US" sz="850" dirty="0"/>
           </a:p>
@@ -26577,7 +26163,7 @@
                 <a:ea typeface="Trebuchet MS" pitchFamily="34" charset="-122"/>
                 <a:cs typeface="Trebuchet MS" pitchFamily="34" charset="-120"/>
               </a:rPr>
-              <a:t>ly</a:t>
+              <a:t>ness</a:t>
             </a:r>
             <a:endParaRPr lang="en-US" sz="1300" dirty="0"/>
           </a:p>
@@ -26616,7 +26202,7 @@
                 <a:ea typeface="Calibri" pitchFamily="34" charset="-122"/>
                 <a:cs typeface="Calibri" pitchFamily="34" charset="-120"/>
               </a:rPr>
-              <a:t>in a certain way</a:t>
+              <a:t>state of</a:t>
             </a:r>
             <a:endParaRPr lang="en-US" sz="850" dirty="0"/>
           </a:p>
@@ -26880,7 +26466,7 @@
                 <a:ea typeface="Trebuchet MS" pitchFamily="34" charset="-122"/>
                 <a:cs typeface="Trebuchet MS" pitchFamily="34" charset="-120"/>
               </a:rPr>
-              <a:t>ly</a:t>
+              <a:t>ness</a:t>
             </a:r>
             <a:endParaRPr lang="en-US" sz="1400" dirty="0"/>
           </a:p>
@@ -26987,7 +26573,7 @@
         </p:nvSpPr>
         <p:spPr>
           <a:xfrm>
-            <a:off x="2427732" y="4169664"/>
+            <a:off x="2023872" y="4169664"/>
             <a:ext cx="685800" cy="475488"/>
           </a:xfrm>
           <a:prstGeom prst="rect">
@@ -27014,7 +26600,7 @@
         </p:nvSpPr>
         <p:spPr>
           <a:xfrm>
-            <a:off x="2427732" y="4169664"/>
+            <a:off x="2023872" y="4169664"/>
             <a:ext cx="685800" cy="475488"/>
           </a:xfrm>
           <a:prstGeom prst="rect">
@@ -27053,7 +26639,7 @@
         </p:nvSpPr>
         <p:spPr>
           <a:xfrm>
-            <a:off x="3639312" y="4169664"/>
+            <a:off x="2831592" y="4169664"/>
             <a:ext cx="685800" cy="475488"/>
           </a:xfrm>
           <a:prstGeom prst="rect">
@@ -27080,7 +26666,7 @@
         </p:nvSpPr>
         <p:spPr>
           <a:xfrm>
-            <a:off x="3639312" y="4169664"/>
+            <a:off x="2831592" y="4169664"/>
             <a:ext cx="685800" cy="475488"/>
           </a:xfrm>
           <a:prstGeom prst="rect">
@@ -27119,7 +26705,7 @@
         </p:nvSpPr>
         <p:spPr>
           <a:xfrm>
-            <a:off x="4850892" y="4169664"/>
+            <a:off x="3639312" y="4169664"/>
             <a:ext cx="685800" cy="475488"/>
           </a:xfrm>
           <a:prstGeom prst="rect">
@@ -27146,7 +26732,7 @@
         </p:nvSpPr>
         <p:spPr>
           <a:xfrm>
-            <a:off x="4850892" y="4169664"/>
+            <a:off x="3639312" y="4169664"/>
             <a:ext cx="685800" cy="475488"/>
           </a:xfrm>
           <a:prstGeom prst="rect">
@@ -27171,7 +26757,7 @@
                 <a:ea typeface="Trebuchet MS" pitchFamily="34" charset="-122"/>
                 <a:cs typeface="Trebuchet MS" pitchFamily="34" charset="-120"/>
               </a:rPr>
-              <a:t>nd</a:t>
+              <a:t>n</a:t>
             </a:r>
             <a:endParaRPr lang="en-US" sz="900" dirty="0"/>
           </a:p>
@@ -27185,7 +26771,7 @@
         </p:nvSpPr>
         <p:spPr>
           <a:xfrm>
-            <a:off x="6062472" y="4169664"/>
+            <a:off x="4447032" y="4169664"/>
             <a:ext cx="685800" cy="475488"/>
           </a:xfrm>
           <a:prstGeom prst="rect">
@@ -27212,7 +26798,7 @@
         </p:nvSpPr>
         <p:spPr>
           <a:xfrm>
-            <a:off x="6062472" y="4169664"/>
+            <a:off x="4447032" y="4169664"/>
             <a:ext cx="685800" cy="475488"/>
           </a:xfrm>
           <a:prstGeom prst="rect">
@@ -27237,7 +26823,7 @@
                 <a:ea typeface="Trebuchet MS" pitchFamily="34" charset="-122"/>
                 <a:cs typeface="Trebuchet MS" pitchFamily="34" charset="-120"/>
               </a:rPr>
-              <a:t>l</a:t>
+              <a:t>d</a:t>
             </a:r>
             <a:endParaRPr lang="en-US" sz="900" dirty="0"/>
           </a:p>
@@ -27251,7 +26837,7 @@
         </p:nvSpPr>
         <p:spPr>
           <a:xfrm>
-            <a:off x="7274052" y="4169664"/>
+            <a:off x="5254752" y="4169664"/>
             <a:ext cx="685800" cy="475488"/>
           </a:xfrm>
           <a:prstGeom prst="rect">
@@ -27278,7 +26864,7 @@
         </p:nvSpPr>
         <p:spPr>
           <a:xfrm>
-            <a:off x="7274052" y="4169664"/>
+            <a:off x="5254752" y="4169664"/>
             <a:ext cx="685800" cy="475488"/>
           </a:xfrm>
           <a:prstGeom prst="rect">
@@ -27303,7 +26889,205 @@
                 <a:ea typeface="Trebuchet MS" pitchFamily="34" charset="-122"/>
                 <a:cs typeface="Trebuchet MS" pitchFamily="34" charset="-120"/>
               </a:rPr>
-              <a:t>y</a:t>
+              <a:t>n</a:t>
+            </a:r>
+            <a:endParaRPr lang="en-US" sz="900" dirty="0"/>
+          </a:p>
+        </p:txBody>
+      </p:sp>
+      <p:sp>
+        <p:nvSpPr>
+          <p:cNvPr id="43" name="Shape 41"/>
+          <p:cNvSpPr/>
+          <p:nvPr/>
+        </p:nvSpPr>
+        <p:spPr>
+          <a:xfrm>
+            <a:off x="6062472" y="4169664"/>
+            <a:ext cx="685800" cy="475488"/>
+          </a:xfrm>
+          <a:prstGeom prst="rect">
+            <a:avLst>
+              <a:gd name="adj" fmla="val 7692"/>
+            </a:avLst>
+          </a:prstGeom>
+          <a:solidFill>
+            <a:srgbClr val="FFFFFF"/>
+          </a:solidFill>
+          <a:ln w="12700">
+            <a:solidFill>
+              <a:srgbClr val="DB2777"/>
+            </a:solidFill>
+            <a:prstDash val="solid"/>
+          </a:ln>
+        </p:spPr>
+      </p:sp>
+      <p:sp>
+        <p:nvSpPr>
+          <p:cNvPr id="44" name="Text 42"/>
+          <p:cNvSpPr/>
+          <p:nvPr/>
+        </p:nvSpPr>
+        <p:spPr>
+          <a:xfrm>
+            <a:off x="6062472" y="4169664"/>
+            <a:ext cx="685800" cy="475488"/>
+          </a:xfrm>
+          <a:prstGeom prst="rect">
+            <a:avLst/>
+          </a:prstGeom>
+          <a:noFill/>
+          <a:ln/>
+        </p:spPr>
+        <p:txBody>
+          <a:bodyPr wrap="square" lIns="0" tIns="0" rIns="0" bIns="0" rtlCol="0" anchor="ctr"/>
+          <a:lstStyle/>
+          <a:p>
+            <a:pPr algn="ctr" indent="0" marL="0">
+              <a:buNone/>
+            </a:pPr>
+            <a:r>
+              <a:rPr lang="en-US" sz="900" b="1" dirty="0">
+                <a:solidFill>
+                  <a:srgbClr val="9D174D"/>
+                </a:solidFill>
+                <a:latin typeface="Trebuchet MS" pitchFamily="34" charset="0"/>
+                <a:ea typeface="Trebuchet MS" pitchFamily="34" charset="-122"/>
+                <a:cs typeface="Trebuchet MS" pitchFamily="34" charset="-120"/>
+              </a:rPr>
+              <a:t>e</a:t>
+            </a:r>
+            <a:endParaRPr lang="en-US" sz="900" dirty="0"/>
+          </a:p>
+        </p:txBody>
+      </p:sp>
+      <p:sp>
+        <p:nvSpPr>
+          <p:cNvPr id="45" name="Shape 43"/>
+          <p:cNvSpPr/>
+          <p:nvPr/>
+        </p:nvSpPr>
+        <p:spPr>
+          <a:xfrm>
+            <a:off x="6870192" y="4169664"/>
+            <a:ext cx="685800" cy="475488"/>
+          </a:xfrm>
+          <a:prstGeom prst="rect">
+            <a:avLst>
+              <a:gd name="adj" fmla="val 7692"/>
+            </a:avLst>
+          </a:prstGeom>
+          <a:solidFill>
+            <a:srgbClr val="FFFFFF"/>
+          </a:solidFill>
+          <a:ln w="12700">
+            <a:solidFill>
+              <a:srgbClr val="DB2777"/>
+            </a:solidFill>
+            <a:prstDash val="solid"/>
+          </a:ln>
+        </p:spPr>
+      </p:sp>
+      <p:sp>
+        <p:nvSpPr>
+          <p:cNvPr id="46" name="Text 44"/>
+          <p:cNvSpPr/>
+          <p:nvPr/>
+        </p:nvSpPr>
+        <p:spPr>
+          <a:xfrm>
+            <a:off x="6870192" y="4169664"/>
+            <a:ext cx="685800" cy="475488"/>
+          </a:xfrm>
+          <a:prstGeom prst="rect">
+            <a:avLst/>
+          </a:prstGeom>
+          <a:noFill/>
+          <a:ln/>
+        </p:spPr>
+        <p:txBody>
+          <a:bodyPr wrap="square" lIns="0" tIns="0" rIns="0" bIns="0" rtlCol="0" anchor="ctr"/>
+          <a:lstStyle/>
+          <a:p>
+            <a:pPr algn="ctr" indent="0" marL="0">
+              <a:buNone/>
+            </a:pPr>
+            <a:r>
+              <a:rPr lang="en-US" sz="900" b="1" dirty="0">
+                <a:solidFill>
+                  <a:srgbClr val="9D174D"/>
+                </a:solidFill>
+                <a:latin typeface="Trebuchet MS" pitchFamily="34" charset="0"/>
+                <a:ea typeface="Trebuchet MS" pitchFamily="34" charset="-122"/>
+                <a:cs typeface="Trebuchet MS" pitchFamily="34" charset="-120"/>
+              </a:rPr>
+              <a:t>s</a:t>
+            </a:r>
+            <a:endParaRPr lang="en-US" sz="900" dirty="0"/>
+          </a:p>
+        </p:txBody>
+      </p:sp>
+      <p:sp>
+        <p:nvSpPr>
+          <p:cNvPr id="47" name="Shape 45"/>
+          <p:cNvSpPr/>
+          <p:nvPr/>
+        </p:nvSpPr>
+        <p:spPr>
+          <a:xfrm>
+            <a:off x="7677912" y="4169664"/>
+            <a:ext cx="685800" cy="475488"/>
+          </a:xfrm>
+          <a:prstGeom prst="rect">
+            <a:avLst>
+              <a:gd name="adj" fmla="val 7692"/>
+            </a:avLst>
+          </a:prstGeom>
+          <a:solidFill>
+            <a:srgbClr val="FFFFFF"/>
+          </a:solidFill>
+          <a:ln w="12700">
+            <a:solidFill>
+              <a:srgbClr val="DB2777"/>
+            </a:solidFill>
+            <a:prstDash val="solid"/>
+          </a:ln>
+        </p:spPr>
+      </p:sp>
+      <p:sp>
+        <p:nvSpPr>
+          <p:cNvPr id="48" name="Text 46"/>
+          <p:cNvSpPr/>
+          <p:nvPr/>
+        </p:nvSpPr>
+        <p:spPr>
+          <a:xfrm>
+            <a:off x="7677912" y="4169664"/>
+            <a:ext cx="685800" cy="475488"/>
+          </a:xfrm>
+          <a:prstGeom prst="rect">
+            <a:avLst/>
+          </a:prstGeom>
+          <a:noFill/>
+          <a:ln/>
+        </p:spPr>
+        <p:txBody>
+          <a:bodyPr wrap="square" lIns="0" tIns="0" rIns="0" bIns="0" rtlCol="0" anchor="ctr"/>
+          <a:lstStyle/>
+          <a:p>
+            <a:pPr algn="ctr" indent="0" marL="0">
+              <a:buNone/>
+            </a:pPr>
+            <a:r>
+              <a:rPr lang="en-US" sz="900" b="1" dirty="0">
+                <a:solidFill>
+                  <a:srgbClr val="9D174D"/>
+                </a:solidFill>
+                <a:latin typeface="Trebuchet MS" pitchFamily="34" charset="0"/>
+                <a:ea typeface="Trebuchet MS" pitchFamily="34" charset="-122"/>
+                <a:cs typeface="Trebuchet MS" pitchFamily="34" charset="-120"/>
+              </a:rPr>
+              <a:t>s</a:t>
             </a:r>
             <a:endParaRPr lang="en-US" sz="900" dirty="0"/>
           </a:p>
@@ -27595,7 +27379,7 @@
                 <a:ea typeface="Calibri" pitchFamily="34" charset="-122"/>
                 <a:cs typeface="Calibri" pitchFamily="34" charset="-120"/>
               </a:rPr>
-              <a:t>Word Labs  •  wordlabs.app  •  Root: 'round' = circular shape or movement</a:t>
+              <a:t>Word Labs  •  wordlabs.app  •  Root: 'round' = shaped like a circle</a:t>
             </a:r>
             <a:endParaRPr lang="en-US" sz="800" dirty="0"/>
           </a:p>
@@ -27734,7 +27518,7 @@
                 <a:ea typeface="Trebuchet MS" pitchFamily="34" charset="-122"/>
                 <a:cs typeface="Trebuchet MS" pitchFamily="34" charset="-120"/>
               </a:rPr>
-              <a:t>roundabout</a:t>
+              <a:t>around</a:t>
             </a:r>
             <a:endParaRPr lang="en-US" sz="2800" dirty="0"/>
           </a:p>
@@ -28422,7 +28206,7 @@
                 <a:ea typeface="Calibri" pitchFamily="34" charset="-122"/>
                 <a:cs typeface="Calibri" pitchFamily="34" charset="-120"/>
               </a:rPr>
-              <a:t>Word Labs  •  wordlabs.app  •  Root: 'round' = circular shape or movement</a:t>
+              <a:t>Word Labs  •  wordlabs.app  •  Root: 'round' = shaped like a circle</a:t>
             </a:r>
             <a:endParaRPr lang="en-US" sz="800" dirty="0"/>
           </a:p>
@@ -28561,7 +28345,7 @@
                 <a:ea typeface="Trebuchet MS" pitchFamily="34" charset="-122"/>
                 <a:cs typeface="Trebuchet MS" pitchFamily="34" charset="-120"/>
               </a:rPr>
-              <a:t>roundabout</a:t>
+              <a:t>around</a:t>
             </a:r>
             <a:endParaRPr lang="en-US" sz="2800" dirty="0"/>
           </a:p>
@@ -28650,11 +28434,11 @@
             </a:avLst>
           </a:prstGeom>
           <a:solidFill>
-            <a:srgbClr val="CCFBF1"/>
+            <a:srgbClr val="DDD6FE"/>
           </a:solidFill>
           <a:ln w="19050">
             <a:solidFill>
-              <a:srgbClr val="0D9488"/>
+              <a:srgbClr val="7C3AED"/>
             </a:solidFill>
             <a:prstDash val="solid"/>
           </a:ln>
@@ -28694,13 +28478,13 @@
             <a:r>
               <a:rPr lang="en-US" sz="1300" b="1" dirty="0">
                 <a:solidFill>
-                  <a:srgbClr val="0F766E"/>
+                  <a:srgbClr val="4C1D95"/>
                 </a:solidFill>
                 <a:latin typeface="Trebuchet MS" pitchFamily="34" charset="0"/>
                 <a:ea typeface="Trebuchet MS" pitchFamily="34" charset="-122"/>
                 <a:cs typeface="Trebuchet MS" pitchFamily="34" charset="-120"/>
               </a:rPr>
-              <a:t>round</a:t>
+              <a:t>a</a:t>
             </a:r>
             <a:endParaRPr lang="en-US" sz="1300" dirty="0"/>
           </a:p>
@@ -28739,7 +28523,7 @@
                 <a:ea typeface="Calibri" pitchFamily="34" charset="-122"/>
                 <a:cs typeface="Calibri" pitchFamily="34" charset="-120"/>
               </a:rPr>
-              <a:t>circular shape</a:t>
+              <a:t>not; without</a:t>
             </a:r>
             <a:endParaRPr lang="en-US" sz="850" dirty="0"/>
           </a:p>
@@ -28762,11 +28546,11 @@
             </a:avLst>
           </a:prstGeom>
           <a:solidFill>
-            <a:srgbClr val="FCE7F3"/>
+            <a:srgbClr val="CCFBF1"/>
           </a:solidFill>
           <a:ln w="19050">
             <a:solidFill>
-              <a:srgbClr val="DB2777"/>
+              <a:srgbClr val="0D9488"/>
             </a:solidFill>
             <a:prstDash val="solid"/>
           </a:ln>
@@ -28806,13 +28590,13 @@
             <a:r>
               <a:rPr lang="en-US" sz="1300" b="1" dirty="0">
                 <a:solidFill>
-                  <a:srgbClr val="9D174D"/>
+                  <a:srgbClr val="0F766E"/>
                 </a:solidFill>
                 <a:latin typeface="Trebuchet MS" pitchFamily="34" charset="0"/>
                 <a:ea typeface="Trebuchet MS" pitchFamily="34" charset="-122"/>
                 <a:cs typeface="Trebuchet MS" pitchFamily="34" charset="-120"/>
               </a:rPr>
-              <a:t>about</a:t>
+              <a:t>round</a:t>
             </a:r>
             <a:endParaRPr lang="en-US" sz="1300" dirty="0"/>
           </a:p>
@@ -28851,7 +28635,7 @@
                 <a:ea typeface="Calibri" pitchFamily="34" charset="-122"/>
                 <a:cs typeface="Calibri" pitchFamily="34" charset="-120"/>
               </a:rPr>
-              <a:t>around or concerning</a:t>
+              <a:t>shaped like a circle</a:t>
             </a:r>
             <a:endParaRPr lang="en-US" sz="850" dirty="0"/>
           </a:p>
@@ -29407,7 +29191,7 @@
                 <a:ea typeface="Calibri" pitchFamily="34" charset="-122"/>
                 <a:cs typeface="Calibri" pitchFamily="34" charset="-120"/>
               </a:rPr>
-              <a:t>Word Labs  •  wordlabs.app  •  Root: 'round' = circular shape or movement</a:t>
+              <a:t>Word Labs  •  wordlabs.app  •  Root: 'round' = shaped like a circle</a:t>
             </a:r>
             <a:endParaRPr lang="en-US" sz="800" dirty="0"/>
           </a:p>
@@ -29546,7 +29330,7 @@
                 <a:ea typeface="Trebuchet MS" pitchFamily="34" charset="-122"/>
                 <a:cs typeface="Trebuchet MS" pitchFamily="34" charset="-120"/>
               </a:rPr>
-              <a:t>roundabout</a:t>
+              <a:t>around</a:t>
             </a:r>
             <a:endParaRPr lang="en-US" sz="2800" dirty="0"/>
           </a:p>
@@ -29635,11 +29419,11 @@
             </a:avLst>
           </a:prstGeom>
           <a:solidFill>
-            <a:srgbClr val="CCFBF1"/>
+            <a:srgbClr val="DDD6FE"/>
           </a:solidFill>
           <a:ln w="19050">
             <a:solidFill>
-              <a:srgbClr val="0D9488"/>
+              <a:srgbClr val="7C3AED"/>
             </a:solidFill>
             <a:prstDash val="solid"/>
           </a:ln>
@@ -29679,13 +29463,13 @@
             <a:r>
               <a:rPr lang="en-US" sz="1300" b="1" dirty="0">
                 <a:solidFill>
-                  <a:srgbClr val="0F766E"/>
+                  <a:srgbClr val="4C1D95"/>
                 </a:solidFill>
                 <a:latin typeface="Trebuchet MS" pitchFamily="34" charset="0"/>
                 <a:ea typeface="Trebuchet MS" pitchFamily="34" charset="-122"/>
                 <a:cs typeface="Trebuchet MS" pitchFamily="34" charset="-120"/>
               </a:rPr>
-              <a:t>round</a:t>
+              <a:t>a</a:t>
             </a:r>
             <a:endParaRPr lang="en-US" sz="1300" dirty="0"/>
           </a:p>
@@ -29724,7 +29508,7 @@
                 <a:ea typeface="Calibri" pitchFamily="34" charset="-122"/>
                 <a:cs typeface="Calibri" pitchFamily="34" charset="-120"/>
               </a:rPr>
-              <a:t>circular shape</a:t>
+              <a:t>not; without</a:t>
             </a:r>
             <a:endParaRPr lang="en-US" sz="850" dirty="0"/>
           </a:p>
@@ -29747,11 +29531,11 @@
             </a:avLst>
           </a:prstGeom>
           <a:solidFill>
-            <a:srgbClr val="FCE7F3"/>
+            <a:srgbClr val="CCFBF1"/>
           </a:solidFill>
           <a:ln w="19050">
             <a:solidFill>
-              <a:srgbClr val="DB2777"/>
+              <a:srgbClr val="0D9488"/>
             </a:solidFill>
             <a:prstDash val="solid"/>
           </a:ln>
@@ -29791,13 +29575,13 @@
             <a:r>
               <a:rPr lang="en-US" sz="1300" b="1" dirty="0">
                 <a:solidFill>
-                  <a:srgbClr val="9D174D"/>
+                  <a:srgbClr val="0F766E"/>
                 </a:solidFill>
                 <a:latin typeface="Trebuchet MS" pitchFamily="34" charset="0"/>
                 <a:ea typeface="Trebuchet MS" pitchFamily="34" charset="-122"/>
                 <a:cs typeface="Trebuchet MS" pitchFamily="34" charset="-120"/>
               </a:rPr>
-              <a:t>about</a:t>
+              <a:t>round</a:t>
             </a:r>
             <a:endParaRPr lang="en-US" sz="1300" dirty="0"/>
           </a:p>
@@ -29836,7 +29620,7 @@
                 <a:ea typeface="Calibri" pitchFamily="34" charset="-122"/>
                 <a:cs typeface="Calibri" pitchFamily="34" charset="-120"/>
               </a:rPr>
-              <a:t>around or concerning</a:t>
+              <a:t>shaped like a circle</a:t>
             </a:r>
             <a:endParaRPr lang="en-US" sz="850" dirty="0"/>
           </a:p>
@@ -29943,7 +29727,7 @@
         </p:nvSpPr>
         <p:spPr>
           <a:xfrm>
-            <a:off x="2313432" y="3364992"/>
+            <a:off x="2999232" y="3364992"/>
             <a:ext cx="1645920" cy="475488"/>
           </a:xfrm>
           <a:prstGeom prst="rect">
@@ -29970,7 +29754,7 @@
         </p:nvSpPr>
         <p:spPr>
           <a:xfrm>
-            <a:off x="2313432" y="3364992"/>
+            <a:off x="2999232" y="3364992"/>
             <a:ext cx="1645920" cy="475488"/>
           </a:xfrm>
           <a:prstGeom prst="rect">
@@ -29995,7 +29779,7 @@
                 <a:ea typeface="Trebuchet MS" pitchFamily="34" charset="-122"/>
                 <a:cs typeface="Trebuchet MS" pitchFamily="34" charset="-120"/>
               </a:rPr>
-              <a:t>round</a:t>
+              <a:t>a</a:t>
             </a:r>
             <a:endParaRPr lang="en-US" sz="1400" dirty="0"/>
           </a:p>
@@ -30009,8 +29793,8 @@
         </p:nvSpPr>
         <p:spPr>
           <a:xfrm>
-            <a:off x="3959352" y="3364992"/>
-            <a:ext cx="411480" cy="475488"/>
+            <a:off x="4645152" y="3364992"/>
+            <a:ext cx="1097280" cy="475488"/>
           </a:xfrm>
           <a:prstGeom prst="rect">
             <a:avLst/>
@@ -30048,7 +29832,7 @@
         </p:nvSpPr>
         <p:spPr>
           <a:xfrm>
-            <a:off x="4370832" y="3364992"/>
+            <a:off x="5742432" y="3364992"/>
             <a:ext cx="1645920" cy="475488"/>
           </a:xfrm>
           <a:prstGeom prst="rect">
@@ -30075,7 +29859,7 @@
         </p:nvSpPr>
         <p:spPr>
           <a:xfrm>
-            <a:off x="4370832" y="3364992"/>
+            <a:off x="5742432" y="3364992"/>
             <a:ext cx="1645920" cy="475488"/>
           </a:xfrm>
           <a:prstGeom prst="rect">
@@ -30100,7 +29884,7 @@
                 <a:ea typeface="Trebuchet MS" pitchFamily="34" charset="-122"/>
                 <a:cs typeface="Trebuchet MS" pitchFamily="34" charset="-120"/>
               </a:rPr>
-              <a:t>a</a:t>
+              <a:t>round</a:t>
             </a:r>
             <a:endParaRPr lang="en-US" sz="1400" dirty="0"/>
           </a:p>
@@ -30108,14 +29892,41 @@
       </p:sp>
       <p:sp>
         <p:nvSpPr>
-          <p:cNvPr id="30" name="Text 28"/>
-          <p:cNvSpPr/>
-          <p:nvPr/>
-        </p:nvSpPr>
-        <p:spPr>
-          <a:xfrm>
-            <a:off x="6016752" y="3364992"/>
-            <a:ext cx="411480" cy="475488"/>
+          <p:cNvPr id="30" name="Shape 28"/>
+          <p:cNvSpPr/>
+          <p:nvPr/>
+        </p:nvSpPr>
+        <p:spPr>
+          <a:xfrm>
+            <a:off x="365760" y="4096512"/>
+            <a:ext cx="1371600" cy="804672"/>
+          </a:xfrm>
+          <a:prstGeom prst="rect">
+            <a:avLst>
+              <a:gd name="adj" fmla="val 6818"/>
+            </a:avLst>
+          </a:prstGeom>
+          <a:solidFill>
+            <a:srgbClr val="E2E8F0"/>
+          </a:solidFill>
+          <a:ln w="12700">
+            <a:solidFill>
+              <a:srgbClr val="E2E8F0"/>
+            </a:solidFill>
+            <a:prstDash val="solid"/>
+          </a:ln>
+        </p:spPr>
+      </p:sp>
+      <p:sp>
+        <p:nvSpPr>
+          <p:cNvPr id="31" name="Text 29"/>
+          <p:cNvSpPr/>
+          <p:nvPr/>
+        </p:nvSpPr>
+        <p:spPr>
+          <a:xfrm>
+            <a:off x="365760" y="4096512"/>
+            <a:ext cx="1371600" cy="804672"/>
           </a:xfrm>
           <a:prstGeom prst="rect">
             <a:avLst/>
@@ -30131,96 +29942,30 @@
               <a:buNone/>
             </a:pPr>
             <a:r>
-              <a:rPr lang="en-US" sz="1600" b="1" dirty="0">
-                <a:solidFill>
-                  <a:srgbClr val="0D9488"/>
+              <a:rPr lang="en-US" sz="1100" b="1" dirty="0">
+                <a:solidFill>
+                  <a:srgbClr val="475569"/>
                 </a:solidFill>
                 <a:latin typeface="Trebuchet MS" pitchFamily="34" charset="0"/>
                 <a:ea typeface="Trebuchet MS" pitchFamily="34" charset="-122"/>
                 <a:cs typeface="Trebuchet MS" pitchFamily="34" charset="-120"/>
               </a:rPr>
-              <a:t>·</a:t>
-            </a:r>
-            <a:endParaRPr lang="en-US" sz="1600" dirty="0"/>
-          </a:p>
-        </p:txBody>
-      </p:sp>
-      <p:sp>
-        <p:nvSpPr>
-          <p:cNvPr id="31" name="Shape 29"/>
-          <p:cNvSpPr/>
-          <p:nvPr/>
-        </p:nvSpPr>
-        <p:spPr>
-          <a:xfrm>
-            <a:off x="6428232" y="3364992"/>
-            <a:ext cx="1645920" cy="475488"/>
-          </a:xfrm>
-          <a:prstGeom prst="rect">
-            <a:avLst>
-              <a:gd name="adj" fmla="val 9615"/>
-            </a:avLst>
-          </a:prstGeom>
-          <a:solidFill>
-            <a:srgbClr val="FFFFFF"/>
-          </a:solidFill>
-          <a:ln w="12700">
-            <a:solidFill>
-              <a:srgbClr val="0D9488"/>
-            </a:solidFill>
-            <a:prstDash val="solid"/>
-          </a:ln>
-        </p:spPr>
-      </p:sp>
-      <p:sp>
-        <p:nvSpPr>
-          <p:cNvPr id="32" name="Text 30"/>
-          <p:cNvSpPr/>
-          <p:nvPr/>
-        </p:nvSpPr>
-        <p:spPr>
-          <a:xfrm>
-            <a:off x="6428232" y="3364992"/>
-            <a:ext cx="1645920" cy="475488"/>
-          </a:xfrm>
-          <a:prstGeom prst="rect">
-            <a:avLst/>
-          </a:prstGeom>
-          <a:noFill/>
-          <a:ln/>
-        </p:spPr>
-        <p:txBody>
-          <a:bodyPr wrap="square" lIns="0" tIns="0" rIns="0" bIns="0" rtlCol="0" anchor="ctr"/>
-          <a:lstStyle/>
-          <a:p>
-            <a:pPr algn="ctr" indent="0" marL="0">
-              <a:buNone/>
-            </a:pPr>
-            <a:r>
-              <a:rPr lang="en-US" sz="1400" b="1" dirty="0">
-                <a:solidFill>
-                  <a:srgbClr val="0D9488"/>
-                </a:solidFill>
-                <a:latin typeface="Trebuchet MS" pitchFamily="34" charset="0"/>
-                <a:ea typeface="Trebuchet MS" pitchFamily="34" charset="-122"/>
-                <a:cs typeface="Trebuchet MS" pitchFamily="34" charset="-120"/>
-              </a:rPr>
-              <a:t>bout</a:t>
-            </a:r>
-            <a:endParaRPr lang="en-US" sz="1400" dirty="0"/>
-          </a:p>
-        </p:txBody>
-      </p:sp>
-      <p:sp>
-        <p:nvSpPr>
-          <p:cNvPr id="33" name="Shape 31"/>
-          <p:cNvSpPr/>
-          <p:nvPr/>
-        </p:nvSpPr>
-        <p:spPr>
-          <a:xfrm>
-            <a:off x="365760" y="4096512"/>
-            <a:ext cx="1371600" cy="804672"/>
+              <a:t>Phonemes</a:t>
+            </a:r>
+            <a:endParaRPr lang="en-US" sz="1100" dirty="0"/>
+          </a:p>
+        </p:txBody>
+      </p:sp>
+      <p:sp>
+        <p:nvSpPr>
+          <p:cNvPr id="32" name="Shape 30"/>
+          <p:cNvSpPr/>
+          <p:nvPr/>
+        </p:nvSpPr>
+        <p:spPr>
+          <a:xfrm>
+            <a:off x="1874520" y="4096512"/>
+            <a:ext cx="6903720" cy="804672"/>
           </a:xfrm>
           <a:prstGeom prst="rect">
             <a:avLst>
@@ -30228,85 +29973,19 @@
             </a:avLst>
           </a:prstGeom>
           <a:solidFill>
-            <a:srgbClr val="E2E8F0"/>
+            <a:srgbClr val="F8FAFC"/>
           </a:solidFill>
           <a:ln w="12700">
             <a:solidFill>
               <a:srgbClr val="E2E8F0"/>
             </a:solidFill>
-            <a:prstDash val="solid"/>
-          </a:ln>
-        </p:spPr>
-      </p:sp>
-      <p:sp>
-        <p:nvSpPr>
-          <p:cNvPr id="34" name="Text 32"/>
-          <p:cNvSpPr/>
-          <p:nvPr/>
-        </p:nvSpPr>
-        <p:spPr>
-          <a:xfrm>
-            <a:off x="365760" y="4096512"/>
-            <a:ext cx="1371600" cy="804672"/>
-          </a:xfrm>
-          <a:prstGeom prst="rect">
-            <a:avLst/>
-          </a:prstGeom>
-          <a:noFill/>
-          <a:ln/>
-        </p:spPr>
-        <p:txBody>
-          <a:bodyPr wrap="square" lIns="0" tIns="0" rIns="0" bIns="0" rtlCol="0" anchor="ctr"/>
-          <a:lstStyle/>
-          <a:p>
-            <a:pPr algn="ctr" indent="0" marL="0">
-              <a:buNone/>
-            </a:pPr>
-            <a:r>
-              <a:rPr lang="en-US" sz="1100" b="1" dirty="0">
-                <a:solidFill>
-                  <a:srgbClr val="475569"/>
-                </a:solidFill>
-                <a:latin typeface="Trebuchet MS" pitchFamily="34" charset="0"/>
-                <a:ea typeface="Trebuchet MS" pitchFamily="34" charset="-122"/>
-                <a:cs typeface="Trebuchet MS" pitchFamily="34" charset="-120"/>
-              </a:rPr>
-              <a:t>Phonemes</a:t>
-            </a:r>
-            <a:endParaRPr lang="en-US" sz="1100" dirty="0"/>
-          </a:p>
-        </p:txBody>
-      </p:sp>
-      <p:sp>
-        <p:nvSpPr>
-          <p:cNvPr id="35" name="Shape 33"/>
-          <p:cNvSpPr/>
-          <p:nvPr/>
-        </p:nvSpPr>
-        <p:spPr>
-          <a:xfrm>
-            <a:off x="1874520" y="4096512"/>
-            <a:ext cx="6903720" cy="804672"/>
-          </a:xfrm>
-          <a:prstGeom prst="rect">
-            <a:avLst>
-              <a:gd name="adj" fmla="val 6818"/>
-            </a:avLst>
-          </a:prstGeom>
-          <a:solidFill>
-            <a:srgbClr val="F8FAFC"/>
-          </a:solidFill>
-          <a:ln w="12700">
-            <a:solidFill>
-              <a:srgbClr val="E2E8F0"/>
-            </a:solidFill>
             <a:prstDash val="dash"/>
           </a:ln>
         </p:spPr>
       </p:sp>
       <p:sp>
         <p:nvSpPr>
-          <p:cNvPr id="36" name="Text 34"/>
+          <p:cNvPr id="33" name="Text 31"/>
           <p:cNvSpPr/>
           <p:nvPr/>
         </p:nvSpPr>
@@ -30629,7 +30308,7 @@
                 <a:ea typeface="Calibri" pitchFamily="34" charset="-122"/>
                 <a:cs typeface="Calibri" pitchFamily="34" charset="-120"/>
               </a:rPr>
-              <a:t>Word Labs  •  wordlabs.app  •  Root: 'round' = circular shape or movement</a:t>
+              <a:t>Word Labs  •  wordlabs.app  •  Root: 'round' = shaped like a circle</a:t>
             </a:r>
             <a:endParaRPr lang="en-US" sz="800" dirty="0"/>
           </a:p>
@@ -30768,7 +30447,7 @@
                 <a:ea typeface="Trebuchet MS" pitchFamily="34" charset="-122"/>
                 <a:cs typeface="Trebuchet MS" pitchFamily="34" charset="-120"/>
               </a:rPr>
-              <a:t>roundabout</a:t>
+              <a:t>around</a:t>
             </a:r>
             <a:endParaRPr lang="en-US" sz="2800" dirty="0"/>
           </a:p>
@@ -30857,11 +30536,11 @@
             </a:avLst>
           </a:prstGeom>
           <a:solidFill>
-            <a:srgbClr val="CCFBF1"/>
+            <a:srgbClr val="DDD6FE"/>
           </a:solidFill>
           <a:ln w="19050">
             <a:solidFill>
-              <a:srgbClr val="0D9488"/>
+              <a:srgbClr val="7C3AED"/>
             </a:solidFill>
             <a:prstDash val="solid"/>
           </a:ln>
@@ -30901,13 +30580,13 @@
             <a:r>
               <a:rPr lang="en-US" sz="1300" b="1" dirty="0">
                 <a:solidFill>
-                  <a:srgbClr val="0F766E"/>
+                  <a:srgbClr val="4C1D95"/>
                 </a:solidFill>
                 <a:latin typeface="Trebuchet MS" pitchFamily="34" charset="0"/>
                 <a:ea typeface="Trebuchet MS" pitchFamily="34" charset="-122"/>
                 <a:cs typeface="Trebuchet MS" pitchFamily="34" charset="-120"/>
               </a:rPr>
-              <a:t>round</a:t>
+              <a:t>a</a:t>
             </a:r>
             <a:endParaRPr lang="en-US" sz="1300" dirty="0"/>
           </a:p>
@@ -30946,7 +30625,7 @@
                 <a:ea typeface="Calibri" pitchFamily="34" charset="-122"/>
                 <a:cs typeface="Calibri" pitchFamily="34" charset="-120"/>
               </a:rPr>
-              <a:t>circular shape</a:t>
+              <a:t>not; without</a:t>
             </a:r>
             <a:endParaRPr lang="en-US" sz="850" dirty="0"/>
           </a:p>
@@ -30969,11 +30648,11 @@
             </a:avLst>
           </a:prstGeom>
           <a:solidFill>
-            <a:srgbClr val="FCE7F3"/>
+            <a:srgbClr val="CCFBF1"/>
           </a:solidFill>
           <a:ln w="19050">
             <a:solidFill>
-              <a:srgbClr val="DB2777"/>
+              <a:srgbClr val="0D9488"/>
             </a:solidFill>
             <a:prstDash val="solid"/>
           </a:ln>
@@ -31013,13 +30692,13 @@
             <a:r>
               <a:rPr lang="en-US" sz="1300" b="1" dirty="0">
                 <a:solidFill>
-                  <a:srgbClr val="9D174D"/>
+                  <a:srgbClr val="0F766E"/>
                 </a:solidFill>
                 <a:latin typeface="Trebuchet MS" pitchFamily="34" charset="0"/>
                 <a:ea typeface="Trebuchet MS" pitchFamily="34" charset="-122"/>
                 <a:cs typeface="Trebuchet MS" pitchFamily="34" charset="-120"/>
               </a:rPr>
-              <a:t>about</a:t>
+              <a:t>round</a:t>
             </a:r>
             <a:endParaRPr lang="en-US" sz="1300" dirty="0"/>
           </a:p>
@@ -31058,7 +30737,7 @@
                 <a:ea typeface="Calibri" pitchFamily="34" charset="-122"/>
                 <a:cs typeface="Calibri" pitchFamily="34" charset="-120"/>
               </a:rPr>
-              <a:t>around or concerning</a:t>
+              <a:t>shaped like a circle</a:t>
             </a:r>
             <a:endParaRPr lang="en-US" sz="850" dirty="0"/>
           </a:p>
@@ -31165,7 +30844,7 @@
         </p:nvSpPr>
         <p:spPr>
           <a:xfrm>
-            <a:off x="2313432" y="3364992"/>
+            <a:off x="2999232" y="3364992"/>
             <a:ext cx="1645920" cy="475488"/>
           </a:xfrm>
           <a:prstGeom prst="rect">
@@ -31192,7 +30871,7 @@
         </p:nvSpPr>
         <p:spPr>
           <a:xfrm>
-            <a:off x="2313432" y="3364992"/>
+            <a:off x="2999232" y="3364992"/>
             <a:ext cx="1645920" cy="475488"/>
           </a:xfrm>
           <a:prstGeom prst="rect">
@@ -31217,7 +30896,7 @@
                 <a:ea typeface="Trebuchet MS" pitchFamily="34" charset="-122"/>
                 <a:cs typeface="Trebuchet MS" pitchFamily="34" charset="-120"/>
               </a:rPr>
-              <a:t>round</a:t>
+              <a:t>a</a:t>
             </a:r>
             <a:endParaRPr lang="en-US" sz="1400" dirty="0"/>
           </a:p>
@@ -31231,8 +30910,8 @@
         </p:nvSpPr>
         <p:spPr>
           <a:xfrm>
-            <a:off x="3959352" y="3364992"/>
-            <a:ext cx="411480" cy="475488"/>
+            <a:off x="4645152" y="3364992"/>
+            <a:ext cx="1097280" cy="475488"/>
           </a:xfrm>
           <a:prstGeom prst="rect">
             <a:avLst/>
@@ -31270,7 +30949,7 @@
         </p:nvSpPr>
         <p:spPr>
           <a:xfrm>
-            <a:off x="4370832" y="3364992"/>
+            <a:off x="5742432" y="3364992"/>
             <a:ext cx="1645920" cy="475488"/>
           </a:xfrm>
           <a:prstGeom prst="rect">
@@ -31297,7 +30976,7 @@
         </p:nvSpPr>
         <p:spPr>
           <a:xfrm>
-            <a:off x="4370832" y="3364992"/>
+            <a:off x="5742432" y="3364992"/>
             <a:ext cx="1645920" cy="475488"/>
           </a:xfrm>
           <a:prstGeom prst="rect">
@@ -31322,7 +31001,7 @@
                 <a:ea typeface="Trebuchet MS" pitchFamily="34" charset="-122"/>
                 <a:cs typeface="Trebuchet MS" pitchFamily="34" charset="-120"/>
               </a:rPr>
-              <a:t>a</a:t>
+              <a:t>round</a:t>
             </a:r>
             <a:endParaRPr lang="en-US" sz="1400" dirty="0"/>
           </a:p>
@@ -31330,14 +31009,41 @@
       </p:sp>
       <p:sp>
         <p:nvSpPr>
-          <p:cNvPr id="30" name="Text 28"/>
-          <p:cNvSpPr/>
-          <p:nvPr/>
-        </p:nvSpPr>
-        <p:spPr>
-          <a:xfrm>
-            <a:off x="6016752" y="3364992"/>
-            <a:ext cx="411480" cy="475488"/>
+          <p:cNvPr id="30" name="Shape 28"/>
+          <p:cNvSpPr/>
+          <p:nvPr/>
+        </p:nvSpPr>
+        <p:spPr>
+          <a:xfrm>
+            <a:off x="365760" y="4096512"/>
+            <a:ext cx="1371600" cy="804672"/>
+          </a:xfrm>
+          <a:prstGeom prst="rect">
+            <a:avLst>
+              <a:gd name="adj" fmla="val 6818"/>
+            </a:avLst>
+          </a:prstGeom>
+          <a:solidFill>
+            <a:srgbClr val="E2E8F0"/>
+          </a:solidFill>
+          <a:ln w="12700">
+            <a:solidFill>
+              <a:srgbClr val="E2E8F0"/>
+            </a:solidFill>
+            <a:prstDash val="solid"/>
+          </a:ln>
+        </p:spPr>
+      </p:sp>
+      <p:sp>
+        <p:nvSpPr>
+          <p:cNvPr id="31" name="Text 29"/>
+          <p:cNvSpPr/>
+          <p:nvPr/>
+        </p:nvSpPr>
+        <p:spPr>
+          <a:xfrm>
+            <a:off x="365760" y="4096512"/>
+            <a:ext cx="1371600" cy="804672"/>
           </a:xfrm>
           <a:prstGeom prst="rect">
             <a:avLst/>
@@ -31353,57 +31059,84 @@
               <a:buNone/>
             </a:pPr>
             <a:r>
-              <a:rPr lang="en-US" sz="1600" b="1" dirty="0">
-                <a:solidFill>
-                  <a:srgbClr val="0D9488"/>
+              <a:rPr lang="en-US" sz="1100" b="1" dirty="0">
+                <a:solidFill>
+                  <a:srgbClr val="475569"/>
                 </a:solidFill>
                 <a:latin typeface="Trebuchet MS" pitchFamily="34" charset="0"/>
                 <a:ea typeface="Trebuchet MS" pitchFamily="34" charset="-122"/>
                 <a:cs typeface="Trebuchet MS" pitchFamily="34" charset="-120"/>
               </a:rPr>
-              <a:t>·</a:t>
-            </a:r>
-            <a:endParaRPr lang="en-US" sz="1600" dirty="0"/>
-          </a:p>
-        </p:txBody>
-      </p:sp>
-      <p:sp>
-        <p:nvSpPr>
-          <p:cNvPr id="31" name="Shape 29"/>
-          <p:cNvSpPr/>
-          <p:nvPr/>
-        </p:nvSpPr>
-        <p:spPr>
-          <a:xfrm>
-            <a:off x="6428232" y="3364992"/>
-            <a:ext cx="1645920" cy="475488"/>
+              <a:t>Phonemes</a:t>
+            </a:r>
+            <a:endParaRPr lang="en-US" sz="1100" dirty="0"/>
+          </a:p>
+        </p:txBody>
+      </p:sp>
+      <p:sp>
+        <p:nvSpPr>
+          <p:cNvPr id="32" name="Shape 30"/>
+          <p:cNvSpPr/>
+          <p:nvPr/>
+        </p:nvSpPr>
+        <p:spPr>
+          <a:xfrm>
+            <a:off x="1874520" y="4096512"/>
+            <a:ext cx="6903720" cy="658368"/>
           </a:xfrm>
           <a:prstGeom prst="rect">
             <a:avLst>
-              <a:gd name="adj" fmla="val 9615"/>
+              <a:gd name="adj" fmla="val 8333"/>
             </a:avLst>
           </a:prstGeom>
           <a:solidFill>
+            <a:srgbClr val="FCE7F3"/>
+          </a:solidFill>
+          <a:ln w="12700">
+            <a:solidFill>
+              <a:srgbClr val="DB2777"/>
+            </a:solidFill>
+            <a:prstDash val="solid"/>
+          </a:ln>
+        </p:spPr>
+      </p:sp>
+      <p:sp>
+        <p:nvSpPr>
+          <p:cNvPr id="33" name="Shape 31"/>
+          <p:cNvSpPr/>
+          <p:nvPr/>
+        </p:nvSpPr>
+        <p:spPr>
+          <a:xfrm>
+            <a:off x="2427732" y="4169664"/>
+            <a:ext cx="685800" cy="475488"/>
+          </a:xfrm>
+          <a:prstGeom prst="rect">
+            <a:avLst>
+              <a:gd name="adj" fmla="val 7692"/>
+            </a:avLst>
+          </a:prstGeom>
+          <a:solidFill>
             <a:srgbClr val="FFFFFF"/>
           </a:solidFill>
           <a:ln w="12700">
             <a:solidFill>
-              <a:srgbClr val="0D9488"/>
-            </a:solidFill>
-            <a:prstDash val="solid"/>
-          </a:ln>
-        </p:spPr>
-      </p:sp>
-      <p:sp>
-        <p:nvSpPr>
-          <p:cNvPr id="32" name="Text 30"/>
-          <p:cNvSpPr/>
-          <p:nvPr/>
-        </p:nvSpPr>
-        <p:spPr>
-          <a:xfrm>
-            <a:off x="6428232" y="3364992"/>
-            <a:ext cx="1645920" cy="475488"/>
+              <a:srgbClr val="DB2777"/>
+            </a:solidFill>
+            <a:prstDash val="solid"/>
+          </a:ln>
+        </p:spPr>
+      </p:sp>
+      <p:sp>
+        <p:nvSpPr>
+          <p:cNvPr id="34" name="Text 32"/>
+          <p:cNvSpPr/>
+          <p:nvPr/>
+        </p:nvSpPr>
+        <p:spPr>
+          <a:xfrm>
+            <a:off x="2427732" y="4169664"/>
+            <a:ext cx="685800" cy="475488"/>
           </a:xfrm>
           <a:prstGeom prst="rect">
             <a:avLst/>
@@ -31419,57 +31152,57 @@
               <a:buNone/>
             </a:pPr>
             <a:r>
-              <a:rPr lang="en-US" sz="1400" b="1" dirty="0">
-                <a:solidFill>
-                  <a:srgbClr val="0D9488"/>
+              <a:rPr lang="en-US" sz="900" b="1" dirty="0">
+                <a:solidFill>
+                  <a:srgbClr val="9D174D"/>
                 </a:solidFill>
                 <a:latin typeface="Trebuchet MS" pitchFamily="34" charset="0"/>
                 <a:ea typeface="Trebuchet MS" pitchFamily="34" charset="-122"/>
                 <a:cs typeface="Trebuchet MS" pitchFamily="34" charset="-120"/>
               </a:rPr>
-              <a:t>bout</a:t>
-            </a:r>
-            <a:endParaRPr lang="en-US" sz="1400" dirty="0"/>
-          </a:p>
-        </p:txBody>
-      </p:sp>
-      <p:sp>
-        <p:nvSpPr>
-          <p:cNvPr id="33" name="Shape 31"/>
-          <p:cNvSpPr/>
-          <p:nvPr/>
-        </p:nvSpPr>
-        <p:spPr>
-          <a:xfrm>
-            <a:off x="365760" y="4096512"/>
-            <a:ext cx="1371600" cy="804672"/>
+              <a:t>a</a:t>
+            </a:r>
+            <a:endParaRPr lang="en-US" sz="900" dirty="0"/>
+          </a:p>
+        </p:txBody>
+      </p:sp>
+      <p:sp>
+        <p:nvSpPr>
+          <p:cNvPr id="35" name="Shape 33"/>
+          <p:cNvSpPr/>
+          <p:nvPr/>
+        </p:nvSpPr>
+        <p:spPr>
+          <a:xfrm>
+            <a:off x="3639312" y="4169664"/>
+            <a:ext cx="685800" cy="475488"/>
           </a:xfrm>
           <a:prstGeom prst="rect">
             <a:avLst>
-              <a:gd name="adj" fmla="val 6818"/>
+              <a:gd name="adj" fmla="val 7692"/>
             </a:avLst>
           </a:prstGeom>
           <a:solidFill>
-            <a:srgbClr val="E2E8F0"/>
-          </a:solidFill>
-          <a:ln w="12700">
-            <a:solidFill>
-              <a:srgbClr val="E2E8F0"/>
-            </a:solidFill>
-            <a:prstDash val="solid"/>
-          </a:ln>
-        </p:spPr>
-      </p:sp>
-      <p:sp>
-        <p:nvSpPr>
-          <p:cNvPr id="34" name="Text 32"/>
-          <p:cNvSpPr/>
-          <p:nvPr/>
-        </p:nvSpPr>
-        <p:spPr>
-          <a:xfrm>
-            <a:off x="365760" y="4096512"/>
-            <a:ext cx="1371600" cy="804672"/>
+            <a:srgbClr val="FFFFFF"/>
+          </a:solidFill>
+          <a:ln w="12700">
+            <a:solidFill>
+              <a:srgbClr val="DB2777"/>
+            </a:solidFill>
+            <a:prstDash val="solid"/>
+          </a:ln>
+        </p:spPr>
+      </p:sp>
+      <p:sp>
+        <p:nvSpPr>
+          <p:cNvPr id="36" name="Text 34"/>
+          <p:cNvSpPr/>
+          <p:nvPr/>
+        </p:nvSpPr>
+        <p:spPr>
+          <a:xfrm>
+            <a:off x="3639312" y="4169664"/>
+            <a:ext cx="685800" cy="475488"/>
           </a:xfrm>
           <a:prstGeom prst="rect">
             <a:avLst/>
@@ -31485,56 +31218,29 @@
               <a:buNone/>
             </a:pPr>
             <a:r>
-              <a:rPr lang="en-US" sz="1100" b="1" dirty="0">
-                <a:solidFill>
-                  <a:srgbClr val="475569"/>
+              <a:rPr lang="en-US" sz="900" b="1" dirty="0">
+                <a:solidFill>
+                  <a:srgbClr val="9D174D"/>
                 </a:solidFill>
                 <a:latin typeface="Trebuchet MS" pitchFamily="34" charset="0"/>
                 <a:ea typeface="Trebuchet MS" pitchFamily="34" charset="-122"/>
                 <a:cs typeface="Trebuchet MS" pitchFamily="34" charset="-120"/>
               </a:rPr>
-              <a:t>Phonemes</a:t>
-            </a:r>
-            <a:endParaRPr lang="en-US" sz="1100" dirty="0"/>
-          </a:p>
-        </p:txBody>
-      </p:sp>
-      <p:sp>
-        <p:nvSpPr>
-          <p:cNvPr id="35" name="Shape 33"/>
-          <p:cNvSpPr/>
-          <p:nvPr/>
-        </p:nvSpPr>
-        <p:spPr>
-          <a:xfrm>
-            <a:off x="1874520" y="4096512"/>
-            <a:ext cx="6903720" cy="658368"/>
-          </a:xfrm>
-          <a:prstGeom prst="rect">
-            <a:avLst>
-              <a:gd name="adj" fmla="val 8333"/>
-            </a:avLst>
-          </a:prstGeom>
-          <a:solidFill>
-            <a:srgbClr val="FCE7F3"/>
-          </a:solidFill>
-          <a:ln w="12700">
-            <a:solidFill>
-              <a:srgbClr val="DB2777"/>
-            </a:solidFill>
-            <a:prstDash val="solid"/>
-          </a:ln>
-        </p:spPr>
-      </p:sp>
-      <p:sp>
-        <p:nvSpPr>
-          <p:cNvPr id="36" name="Shape 34"/>
-          <p:cNvSpPr/>
-          <p:nvPr/>
-        </p:nvSpPr>
-        <p:spPr>
-          <a:xfrm>
-            <a:off x="2124837" y="4169664"/>
+              <a:t>r</a:t>
+            </a:r>
+            <a:endParaRPr lang="en-US" sz="900" dirty="0"/>
+          </a:p>
+        </p:txBody>
+      </p:sp>
+      <p:sp>
+        <p:nvSpPr>
+          <p:cNvPr id="37" name="Shape 35"/>
+          <p:cNvSpPr/>
+          <p:nvPr/>
+        </p:nvSpPr>
+        <p:spPr>
+          <a:xfrm>
+            <a:off x="4850892" y="4169664"/>
             <a:ext cx="685800" cy="475488"/>
           </a:xfrm>
           <a:prstGeom prst="rect">
@@ -31555,13 +31261,13 @@
       </p:sp>
       <p:sp>
         <p:nvSpPr>
-          <p:cNvPr id="37" name="Text 35"/>
-          <p:cNvSpPr/>
-          <p:nvPr/>
-        </p:nvSpPr>
-        <p:spPr>
-          <a:xfrm>
-            <a:off x="2124837" y="4169664"/>
+          <p:cNvPr id="38" name="Text 36"/>
+          <p:cNvSpPr/>
+          <p:nvPr/>
+        </p:nvSpPr>
+        <p:spPr>
+          <a:xfrm>
+            <a:off x="4850892" y="4169664"/>
             <a:ext cx="685800" cy="475488"/>
           </a:xfrm>
           <a:prstGeom prst="rect">
@@ -31586,7 +31292,7 @@
                 <a:ea typeface="Trebuchet MS" pitchFamily="34" charset="-122"/>
                 <a:cs typeface="Trebuchet MS" pitchFamily="34" charset="-120"/>
               </a:rPr>
-              <a:t>r</a:t>
+              <a:t>ou</a:t>
             </a:r>
             <a:endParaRPr lang="en-US" sz="900" dirty="0"/>
           </a:p>
@@ -31594,13 +31300,13 @@
       </p:sp>
       <p:sp>
         <p:nvSpPr>
-          <p:cNvPr id="38" name="Shape 36"/>
-          <p:cNvSpPr/>
-          <p:nvPr/>
-        </p:nvSpPr>
-        <p:spPr>
-          <a:xfrm>
-            <a:off x="3033522" y="4169664"/>
+          <p:cNvPr id="39" name="Shape 37"/>
+          <p:cNvSpPr/>
+          <p:nvPr/>
+        </p:nvSpPr>
+        <p:spPr>
+          <a:xfrm>
+            <a:off x="6062472" y="4169664"/>
             <a:ext cx="685800" cy="475488"/>
           </a:xfrm>
           <a:prstGeom prst="rect">
@@ -31621,13 +31327,13 @@
       </p:sp>
       <p:sp>
         <p:nvSpPr>
-          <p:cNvPr id="39" name="Text 37"/>
-          <p:cNvSpPr/>
-          <p:nvPr/>
-        </p:nvSpPr>
-        <p:spPr>
-          <a:xfrm>
-            <a:off x="3033522" y="4169664"/>
+          <p:cNvPr id="40" name="Text 38"/>
+          <p:cNvSpPr/>
+          <p:nvPr/>
+        </p:nvSpPr>
+        <p:spPr>
+          <a:xfrm>
+            <a:off x="6062472" y="4169664"/>
             <a:ext cx="685800" cy="475488"/>
           </a:xfrm>
           <a:prstGeom prst="rect">
@@ -31652,7 +31358,7 @@
                 <a:ea typeface="Trebuchet MS" pitchFamily="34" charset="-122"/>
                 <a:cs typeface="Trebuchet MS" pitchFamily="34" charset="-120"/>
               </a:rPr>
-              <a:t>ou</a:t>
+              <a:t>n</a:t>
             </a:r>
             <a:endParaRPr lang="en-US" sz="900" dirty="0"/>
           </a:p>
@@ -31660,13 +31366,13 @@
       </p:sp>
       <p:sp>
         <p:nvSpPr>
-          <p:cNvPr id="40" name="Shape 38"/>
-          <p:cNvSpPr/>
-          <p:nvPr/>
-        </p:nvSpPr>
-        <p:spPr>
-          <a:xfrm>
-            <a:off x="3942207" y="4169664"/>
+          <p:cNvPr id="41" name="Shape 39"/>
+          <p:cNvSpPr/>
+          <p:nvPr/>
+        </p:nvSpPr>
+        <p:spPr>
+          <a:xfrm>
+            <a:off x="7274052" y="4169664"/>
             <a:ext cx="685800" cy="475488"/>
           </a:xfrm>
           <a:prstGeom prst="rect">
@@ -31687,13 +31393,13 @@
       </p:sp>
       <p:sp>
         <p:nvSpPr>
-          <p:cNvPr id="41" name="Text 39"/>
-          <p:cNvSpPr/>
-          <p:nvPr/>
-        </p:nvSpPr>
-        <p:spPr>
-          <a:xfrm>
-            <a:off x="3942207" y="4169664"/>
+          <p:cNvPr id="42" name="Text 40"/>
+          <p:cNvSpPr/>
+          <p:nvPr/>
+        </p:nvSpPr>
+        <p:spPr>
+          <a:xfrm>
+            <a:off x="7274052" y="4169664"/>
             <a:ext cx="685800" cy="475488"/>
           </a:xfrm>
           <a:prstGeom prst="rect">
@@ -31718,271 +31424,7 @@
                 <a:ea typeface="Trebuchet MS" pitchFamily="34" charset="-122"/>
                 <a:cs typeface="Trebuchet MS" pitchFamily="34" charset="-120"/>
               </a:rPr>
-              <a:t>nd</a:t>
-            </a:r>
-            <a:endParaRPr lang="en-US" sz="900" dirty="0"/>
-          </a:p>
-        </p:txBody>
-      </p:sp>
-      <p:sp>
-        <p:nvSpPr>
-          <p:cNvPr id="42" name="Shape 40"/>
-          <p:cNvSpPr/>
-          <p:nvPr/>
-        </p:nvSpPr>
-        <p:spPr>
-          <a:xfrm>
-            <a:off x="4850892" y="4169664"/>
-            <a:ext cx="685800" cy="475488"/>
-          </a:xfrm>
-          <a:prstGeom prst="rect">
-            <a:avLst>
-              <a:gd name="adj" fmla="val 7692"/>
-            </a:avLst>
-          </a:prstGeom>
-          <a:solidFill>
-            <a:srgbClr val="FFFFFF"/>
-          </a:solidFill>
-          <a:ln w="12700">
-            <a:solidFill>
-              <a:srgbClr val="DB2777"/>
-            </a:solidFill>
-            <a:prstDash val="solid"/>
-          </a:ln>
-        </p:spPr>
-      </p:sp>
-      <p:sp>
-        <p:nvSpPr>
-          <p:cNvPr id="43" name="Text 41"/>
-          <p:cNvSpPr/>
-          <p:nvPr/>
-        </p:nvSpPr>
-        <p:spPr>
-          <a:xfrm>
-            <a:off x="4850892" y="4169664"/>
-            <a:ext cx="685800" cy="475488"/>
-          </a:xfrm>
-          <a:prstGeom prst="rect">
-            <a:avLst/>
-          </a:prstGeom>
-          <a:noFill/>
-          <a:ln/>
-        </p:spPr>
-        <p:txBody>
-          <a:bodyPr wrap="square" lIns="0" tIns="0" rIns="0" bIns="0" rtlCol="0" anchor="ctr"/>
-          <a:lstStyle/>
-          <a:p>
-            <a:pPr algn="ctr" indent="0" marL="0">
-              <a:buNone/>
-            </a:pPr>
-            <a:r>
-              <a:rPr lang="en-US" sz="900" b="1" dirty="0">
-                <a:solidFill>
-                  <a:srgbClr val="9D174D"/>
-                </a:solidFill>
-                <a:latin typeface="Trebuchet MS" pitchFamily="34" charset="0"/>
-                <a:ea typeface="Trebuchet MS" pitchFamily="34" charset="-122"/>
-                <a:cs typeface="Trebuchet MS" pitchFamily="34" charset="-120"/>
-              </a:rPr>
-              <a:t>a</a:t>
-            </a:r>
-            <a:endParaRPr lang="en-US" sz="900" dirty="0"/>
-          </a:p>
-        </p:txBody>
-      </p:sp>
-      <p:sp>
-        <p:nvSpPr>
-          <p:cNvPr id="44" name="Shape 42"/>
-          <p:cNvSpPr/>
-          <p:nvPr/>
-        </p:nvSpPr>
-        <p:spPr>
-          <a:xfrm>
-            <a:off x="5759577" y="4169664"/>
-            <a:ext cx="685800" cy="475488"/>
-          </a:xfrm>
-          <a:prstGeom prst="rect">
-            <a:avLst>
-              <a:gd name="adj" fmla="val 7692"/>
-            </a:avLst>
-          </a:prstGeom>
-          <a:solidFill>
-            <a:srgbClr val="FFFFFF"/>
-          </a:solidFill>
-          <a:ln w="12700">
-            <a:solidFill>
-              <a:srgbClr val="DB2777"/>
-            </a:solidFill>
-            <a:prstDash val="solid"/>
-          </a:ln>
-        </p:spPr>
-      </p:sp>
-      <p:sp>
-        <p:nvSpPr>
-          <p:cNvPr id="45" name="Text 43"/>
-          <p:cNvSpPr/>
-          <p:nvPr/>
-        </p:nvSpPr>
-        <p:spPr>
-          <a:xfrm>
-            <a:off x="5759577" y="4169664"/>
-            <a:ext cx="685800" cy="475488"/>
-          </a:xfrm>
-          <a:prstGeom prst="rect">
-            <a:avLst/>
-          </a:prstGeom>
-          <a:noFill/>
-          <a:ln/>
-        </p:spPr>
-        <p:txBody>
-          <a:bodyPr wrap="square" lIns="0" tIns="0" rIns="0" bIns="0" rtlCol="0" anchor="ctr"/>
-          <a:lstStyle/>
-          <a:p>
-            <a:pPr algn="ctr" indent="0" marL="0">
-              <a:buNone/>
-            </a:pPr>
-            <a:r>
-              <a:rPr lang="en-US" sz="900" b="1" dirty="0">
-                <a:solidFill>
-                  <a:srgbClr val="9D174D"/>
-                </a:solidFill>
-                <a:latin typeface="Trebuchet MS" pitchFamily="34" charset="0"/>
-                <a:ea typeface="Trebuchet MS" pitchFamily="34" charset="-122"/>
-                <a:cs typeface="Trebuchet MS" pitchFamily="34" charset="-120"/>
-              </a:rPr>
-              <a:t>b</a:t>
-            </a:r>
-            <a:endParaRPr lang="en-US" sz="900" dirty="0"/>
-          </a:p>
-        </p:txBody>
-      </p:sp>
-      <p:sp>
-        <p:nvSpPr>
-          <p:cNvPr id="46" name="Shape 44"/>
-          <p:cNvSpPr/>
-          <p:nvPr/>
-        </p:nvSpPr>
-        <p:spPr>
-          <a:xfrm>
-            <a:off x="6668262" y="4169664"/>
-            <a:ext cx="685800" cy="475488"/>
-          </a:xfrm>
-          <a:prstGeom prst="rect">
-            <a:avLst>
-              <a:gd name="adj" fmla="val 7692"/>
-            </a:avLst>
-          </a:prstGeom>
-          <a:solidFill>
-            <a:srgbClr val="FFFFFF"/>
-          </a:solidFill>
-          <a:ln w="12700">
-            <a:solidFill>
-              <a:srgbClr val="DB2777"/>
-            </a:solidFill>
-            <a:prstDash val="solid"/>
-          </a:ln>
-        </p:spPr>
-      </p:sp>
-      <p:sp>
-        <p:nvSpPr>
-          <p:cNvPr id="47" name="Text 45"/>
-          <p:cNvSpPr/>
-          <p:nvPr/>
-        </p:nvSpPr>
-        <p:spPr>
-          <a:xfrm>
-            <a:off x="6668262" y="4169664"/>
-            <a:ext cx="685800" cy="475488"/>
-          </a:xfrm>
-          <a:prstGeom prst="rect">
-            <a:avLst/>
-          </a:prstGeom>
-          <a:noFill/>
-          <a:ln/>
-        </p:spPr>
-        <p:txBody>
-          <a:bodyPr wrap="square" lIns="0" tIns="0" rIns="0" bIns="0" rtlCol="0" anchor="ctr"/>
-          <a:lstStyle/>
-          <a:p>
-            <a:pPr algn="ctr" indent="0" marL="0">
-              <a:buNone/>
-            </a:pPr>
-            <a:r>
-              <a:rPr lang="en-US" sz="900" b="1" dirty="0">
-                <a:solidFill>
-                  <a:srgbClr val="9D174D"/>
-                </a:solidFill>
-                <a:latin typeface="Trebuchet MS" pitchFamily="34" charset="0"/>
-                <a:ea typeface="Trebuchet MS" pitchFamily="34" charset="-122"/>
-                <a:cs typeface="Trebuchet MS" pitchFamily="34" charset="-120"/>
-              </a:rPr>
-              <a:t>ou</a:t>
-            </a:r>
-            <a:endParaRPr lang="en-US" sz="900" dirty="0"/>
-          </a:p>
-        </p:txBody>
-      </p:sp>
-      <p:sp>
-        <p:nvSpPr>
-          <p:cNvPr id="48" name="Shape 46"/>
-          <p:cNvSpPr/>
-          <p:nvPr/>
-        </p:nvSpPr>
-        <p:spPr>
-          <a:xfrm>
-            <a:off x="7576947" y="4169664"/>
-            <a:ext cx="685800" cy="475488"/>
-          </a:xfrm>
-          <a:prstGeom prst="rect">
-            <a:avLst>
-              <a:gd name="adj" fmla="val 7692"/>
-            </a:avLst>
-          </a:prstGeom>
-          <a:solidFill>
-            <a:srgbClr val="FFFFFF"/>
-          </a:solidFill>
-          <a:ln w="12700">
-            <a:solidFill>
-              <a:srgbClr val="DB2777"/>
-            </a:solidFill>
-            <a:prstDash val="solid"/>
-          </a:ln>
-        </p:spPr>
-      </p:sp>
-      <p:sp>
-        <p:nvSpPr>
-          <p:cNvPr id="49" name="Text 47"/>
-          <p:cNvSpPr/>
-          <p:nvPr/>
-        </p:nvSpPr>
-        <p:spPr>
-          <a:xfrm>
-            <a:off x="7576947" y="4169664"/>
-            <a:ext cx="685800" cy="475488"/>
-          </a:xfrm>
-          <a:prstGeom prst="rect">
-            <a:avLst/>
-          </a:prstGeom>
-          <a:noFill/>
-          <a:ln/>
-        </p:spPr>
-        <p:txBody>
-          <a:bodyPr wrap="square" lIns="0" tIns="0" rIns="0" bIns="0" rtlCol="0" anchor="ctr"/>
-          <a:lstStyle/>
-          <a:p>
-            <a:pPr algn="ctr" indent="0" marL="0">
-              <a:buNone/>
-            </a:pPr>
-            <a:r>
-              <a:rPr lang="en-US" sz="900" b="1" dirty="0">
-                <a:solidFill>
-                  <a:srgbClr val="9D174D"/>
-                </a:solidFill>
-                <a:latin typeface="Trebuchet MS" pitchFamily="34" charset="0"/>
-                <a:ea typeface="Trebuchet MS" pitchFamily="34" charset="-122"/>
-                <a:cs typeface="Trebuchet MS" pitchFamily="34" charset="-120"/>
-              </a:rPr>
-              <a:t>t</a:t>
+              <a:t>d</a:t>
             </a:r>
             <a:endParaRPr lang="en-US" sz="900" dirty="0"/>
           </a:p>
@@ -32274,7 +31716,7 @@
                 <a:ea typeface="Calibri" pitchFamily="34" charset="-122"/>
                 <a:cs typeface="Calibri" pitchFamily="34" charset="-120"/>
               </a:rPr>
-              <a:t>Word Labs  •  wordlabs.app  •  Root: 'round' = circular shape or movement</a:t>
+              <a:t>Word Labs  •  wordlabs.app  •  Root: 'round' = shaped like a circle</a:t>
             </a:r>
             <a:endParaRPr lang="en-US" sz="800" dirty="0"/>
           </a:p>
@@ -33443,7 +32885,7 @@
                 <a:ea typeface="Calibri" pitchFamily="34" charset="-122"/>
                 <a:cs typeface="Calibri" pitchFamily="34" charset="-120"/>
               </a:rPr>
-              <a:t>Word Labs  •  wordlabs.app  •  Root: 'round' = circular shape or movement</a:t>
+              <a:t>Word Labs  •  wordlabs.app  •  Root: 'round' = shaped like a circle</a:t>
             </a:r>
             <a:endParaRPr lang="en-US" sz="800" dirty="0"/>
           </a:p>
@@ -33744,7 +33186,7 @@
                 <a:ea typeface="Trebuchet MS" pitchFamily="34" charset="-122"/>
                 <a:cs typeface="Trebuchet MS" pitchFamily="34" charset="-120"/>
               </a:rPr>
-              <a:t>sur-</a:t>
+              <a:t>a-</a:t>
             </a:r>
             <a:endParaRPr lang="en-US" sz="1300" dirty="0"/>
           </a:p>
@@ -33893,7 +33335,7 @@
             <a:avLst/>
           </a:prstGeom>
           <a:solidFill>
-            <a:srgbClr val="DDD6FE"/>
+            <a:srgbClr val="F1F5F9"/>
           </a:solidFill>
           <a:ln w="12700">
             <a:solidFill>
@@ -33905,14 +33347,64 @@
       </p:sp>
       <p:sp>
         <p:nvSpPr>
-          <p:cNvPr id="24" name="Text 22"/>
-          <p:cNvSpPr/>
-          <p:nvPr/>
-        </p:nvSpPr>
-        <p:spPr>
-          <a:xfrm>
-            <a:off x="365760" y="1984248"/>
-            <a:ext cx="2468880" cy="402336"/>
+          <p:cNvPr id="24" name="Shape 22"/>
+          <p:cNvSpPr/>
+          <p:nvPr/>
+        </p:nvSpPr>
+        <p:spPr>
+          <a:xfrm>
+            <a:off x="2971800" y="1984248"/>
+            <a:ext cx="2834640" cy="402336"/>
+          </a:xfrm>
+          <a:prstGeom prst="rect">
+            <a:avLst/>
+          </a:prstGeom>
+          <a:solidFill>
+            <a:srgbClr val="F1F5F9"/>
+          </a:solidFill>
+          <a:ln w="12700">
+            <a:solidFill>
+              <a:srgbClr val="E2E8F0"/>
+            </a:solidFill>
+            <a:prstDash val="solid"/>
+          </a:ln>
+        </p:spPr>
+      </p:sp>
+      <p:sp>
+        <p:nvSpPr>
+          <p:cNvPr id="25" name="Shape 23"/>
+          <p:cNvSpPr/>
+          <p:nvPr/>
+        </p:nvSpPr>
+        <p:spPr>
+          <a:xfrm>
+            <a:off x="5943600" y="1984248"/>
+            <a:ext cx="2834640" cy="402336"/>
+          </a:xfrm>
+          <a:prstGeom prst="rect">
+            <a:avLst/>
+          </a:prstGeom>
+          <a:solidFill>
+            <a:srgbClr val="FCE7F3"/>
+          </a:solidFill>
+          <a:ln w="12700">
+            <a:solidFill>
+              <a:srgbClr val="E2E8F0"/>
+            </a:solidFill>
+            <a:prstDash val="solid"/>
+          </a:ln>
+        </p:spPr>
+      </p:sp>
+      <p:sp>
+        <p:nvSpPr>
+          <p:cNvPr id="26" name="Text 24"/>
+          <p:cNvSpPr/>
+          <p:nvPr/>
+        </p:nvSpPr>
+        <p:spPr>
+          <a:xfrm>
+            <a:off x="5943600" y="1984248"/>
+            <a:ext cx="2834640" cy="402336"/>
           </a:xfrm>
           <a:prstGeom prst="rect">
             <a:avLst/>
@@ -33930,13 +33422,13 @@
             <a:r>
               <a:rPr lang="en-US" sz="1300" b="1" dirty="0">
                 <a:solidFill>
-                  <a:srgbClr val="4C1D95"/>
+                  <a:srgbClr val="9D174D"/>
                 </a:solidFill>
                 <a:latin typeface="Trebuchet MS" pitchFamily="34" charset="0"/>
                 <a:ea typeface="Trebuchet MS" pitchFamily="34" charset="-122"/>
                 <a:cs typeface="Trebuchet MS" pitchFamily="34" charset="-120"/>
               </a:rPr>
-              <a:t>a-</a:t>
+              <a:t>-er</a:t>
             </a:r>
             <a:endParaRPr lang="en-US" sz="1300" dirty="0"/>
           </a:p>
@@ -33944,20 +33436,45 @@
       </p:sp>
       <p:sp>
         <p:nvSpPr>
-          <p:cNvPr id="25" name="Shape 23"/>
-          <p:cNvSpPr/>
-          <p:nvPr/>
-        </p:nvSpPr>
-        <p:spPr>
-          <a:xfrm>
-            <a:off x="2971800" y="1984248"/>
+          <p:cNvPr id="27" name="Shape 25"/>
+          <p:cNvSpPr/>
+          <p:nvPr/>
+        </p:nvSpPr>
+        <p:spPr>
+          <a:xfrm>
+            <a:off x="365760" y="2404872"/>
+            <a:ext cx="2468880" cy="402336"/>
+          </a:xfrm>
+          <a:prstGeom prst="rect">
+            <a:avLst/>
+          </a:prstGeom>
+          <a:solidFill>
+            <a:srgbClr val="F8FAFC"/>
+          </a:solidFill>
+          <a:ln w="12700">
+            <a:solidFill>
+              <a:srgbClr val="E2E8F0"/>
+            </a:solidFill>
+            <a:prstDash val="solid"/>
+          </a:ln>
+        </p:spPr>
+      </p:sp>
+      <p:sp>
+        <p:nvSpPr>
+          <p:cNvPr id="28" name="Shape 26"/>
+          <p:cNvSpPr/>
+          <p:nvPr/>
+        </p:nvSpPr>
+        <p:spPr>
+          <a:xfrm>
+            <a:off x="2971800" y="2404872"/>
             <a:ext cx="2834640" cy="402336"/>
           </a:xfrm>
           <a:prstGeom prst="rect">
             <a:avLst/>
           </a:prstGeom>
           <a:solidFill>
-            <a:srgbClr val="F1F5F9"/>
+            <a:srgbClr val="F8FAFC"/>
           </a:solidFill>
           <a:ln w="12700">
             <a:solidFill>
@@ -33969,13 +33486,13 @@
       </p:sp>
       <p:sp>
         <p:nvSpPr>
-          <p:cNvPr id="26" name="Shape 24"/>
-          <p:cNvSpPr/>
-          <p:nvPr/>
-        </p:nvSpPr>
-        <p:spPr>
-          <a:xfrm>
-            <a:off x="5943600" y="1984248"/>
+          <p:cNvPr id="29" name="Shape 27"/>
+          <p:cNvSpPr/>
+          <p:nvPr/>
+        </p:nvSpPr>
+        <p:spPr>
+          <a:xfrm>
+            <a:off x="5943600" y="2404872"/>
             <a:ext cx="2834640" cy="402336"/>
           </a:xfrm>
           <a:prstGeom prst="rect">
@@ -33994,13 +33511,13 @@
       </p:sp>
       <p:sp>
         <p:nvSpPr>
-          <p:cNvPr id="27" name="Text 25"/>
-          <p:cNvSpPr/>
-          <p:nvPr/>
-        </p:nvSpPr>
-        <p:spPr>
-          <a:xfrm>
-            <a:off x="5943600" y="1984248"/>
+          <p:cNvPr id="30" name="Text 28"/>
+          <p:cNvSpPr/>
+          <p:nvPr/>
+        </p:nvSpPr>
+        <p:spPr>
+          <a:xfrm>
+            <a:off x="5943600" y="2404872"/>
             <a:ext cx="2834640" cy="402336"/>
           </a:xfrm>
           <a:prstGeom prst="rect">
@@ -34025,7 +33542,7 @@
                 <a:ea typeface="Trebuchet MS" pitchFamily="34" charset="-122"/>
                 <a:cs typeface="Trebuchet MS" pitchFamily="34" charset="-120"/>
               </a:rPr>
-              <a:t>-ing</a:t>
+              <a:t>-est</a:t>
             </a:r>
             <a:endParaRPr lang="en-US" sz="1300" dirty="0"/>
           </a:p>
@@ -34033,20 +33550,20 @@
       </p:sp>
       <p:sp>
         <p:nvSpPr>
-          <p:cNvPr id="28" name="Shape 26"/>
-          <p:cNvSpPr/>
-          <p:nvPr/>
-        </p:nvSpPr>
-        <p:spPr>
-          <a:xfrm>
-            <a:off x="365760" y="2404872"/>
+          <p:cNvPr id="31" name="Shape 29"/>
+          <p:cNvSpPr/>
+          <p:nvPr/>
+        </p:nvSpPr>
+        <p:spPr>
+          <a:xfrm>
+            <a:off x="365760" y="2825496"/>
             <a:ext cx="2468880" cy="402336"/>
           </a:xfrm>
           <a:prstGeom prst="rect">
             <a:avLst/>
           </a:prstGeom>
           <a:solidFill>
-            <a:srgbClr val="DDD6FE"/>
+            <a:srgbClr val="F1F5F9"/>
           </a:solidFill>
           <a:ln w="12700">
             <a:solidFill>
@@ -34058,14 +33575,64 @@
       </p:sp>
       <p:sp>
         <p:nvSpPr>
-          <p:cNvPr id="29" name="Text 27"/>
-          <p:cNvSpPr/>
-          <p:nvPr/>
-        </p:nvSpPr>
-        <p:spPr>
-          <a:xfrm>
-            <a:off x="365760" y="2404872"/>
-            <a:ext cx="2468880" cy="402336"/>
+          <p:cNvPr id="32" name="Shape 30"/>
+          <p:cNvSpPr/>
+          <p:nvPr/>
+        </p:nvSpPr>
+        <p:spPr>
+          <a:xfrm>
+            <a:off x="2971800" y="2825496"/>
+            <a:ext cx="2834640" cy="402336"/>
+          </a:xfrm>
+          <a:prstGeom prst="rect">
+            <a:avLst/>
+          </a:prstGeom>
+          <a:solidFill>
+            <a:srgbClr val="F1F5F9"/>
+          </a:solidFill>
+          <a:ln w="12700">
+            <a:solidFill>
+              <a:srgbClr val="E2E8F0"/>
+            </a:solidFill>
+            <a:prstDash val="solid"/>
+          </a:ln>
+        </p:spPr>
+      </p:sp>
+      <p:sp>
+        <p:nvSpPr>
+          <p:cNvPr id="33" name="Shape 31"/>
+          <p:cNvSpPr/>
+          <p:nvPr/>
+        </p:nvSpPr>
+        <p:spPr>
+          <a:xfrm>
+            <a:off x="5943600" y="2825496"/>
+            <a:ext cx="2834640" cy="402336"/>
+          </a:xfrm>
+          <a:prstGeom prst="rect">
+            <a:avLst/>
+          </a:prstGeom>
+          <a:solidFill>
+            <a:srgbClr val="FCE7F3"/>
+          </a:solidFill>
+          <a:ln w="12700">
+            <a:solidFill>
+              <a:srgbClr val="E2E8F0"/>
+            </a:solidFill>
+            <a:prstDash val="solid"/>
+          </a:ln>
+        </p:spPr>
+      </p:sp>
+      <p:sp>
+        <p:nvSpPr>
+          <p:cNvPr id="34" name="Text 32"/>
+          <p:cNvSpPr/>
+          <p:nvPr/>
+        </p:nvSpPr>
+        <p:spPr>
+          <a:xfrm>
+            <a:off x="5943600" y="2825496"/>
+            <a:ext cx="2834640" cy="402336"/>
           </a:xfrm>
           <a:prstGeom prst="rect">
             <a:avLst/>
@@ -34083,13 +33650,13 @@
             <a:r>
               <a:rPr lang="en-US" sz="1300" b="1" dirty="0">
                 <a:solidFill>
-                  <a:srgbClr val="4C1D95"/>
+                  <a:srgbClr val="9D174D"/>
                 </a:solidFill>
                 <a:latin typeface="Trebuchet MS" pitchFamily="34" charset="0"/>
                 <a:ea typeface="Trebuchet MS" pitchFamily="34" charset="-122"/>
                 <a:cs typeface="Trebuchet MS" pitchFamily="34" charset="-120"/>
               </a:rPr>
-              <a:t>un-</a:t>
+              <a:t>-ing</a:t>
             </a:r>
             <a:endParaRPr lang="en-US" sz="1300" dirty="0"/>
           </a:p>
@@ -34097,13 +33664,38 @@
       </p:sp>
       <p:sp>
         <p:nvSpPr>
-          <p:cNvPr id="30" name="Shape 28"/>
-          <p:cNvSpPr/>
-          <p:nvPr/>
-        </p:nvSpPr>
-        <p:spPr>
-          <a:xfrm>
-            <a:off x="2971800" y="2404872"/>
+          <p:cNvPr id="35" name="Shape 33"/>
+          <p:cNvSpPr/>
+          <p:nvPr/>
+        </p:nvSpPr>
+        <p:spPr>
+          <a:xfrm>
+            <a:off x="365760" y="3246120"/>
+            <a:ext cx="2468880" cy="402336"/>
+          </a:xfrm>
+          <a:prstGeom prst="rect">
+            <a:avLst/>
+          </a:prstGeom>
+          <a:solidFill>
+            <a:srgbClr val="F8FAFC"/>
+          </a:solidFill>
+          <a:ln w="12700">
+            <a:solidFill>
+              <a:srgbClr val="E2E8F0"/>
+            </a:solidFill>
+            <a:prstDash val="solid"/>
+          </a:ln>
+        </p:spPr>
+      </p:sp>
+      <p:sp>
+        <p:nvSpPr>
+          <p:cNvPr id="36" name="Shape 34"/>
+          <p:cNvSpPr/>
+          <p:nvPr/>
+        </p:nvSpPr>
+        <p:spPr>
+          <a:xfrm>
+            <a:off x="2971800" y="3246120"/>
             <a:ext cx="2834640" cy="402336"/>
           </a:xfrm>
           <a:prstGeom prst="rect">
@@ -34122,13 +33714,13 @@
       </p:sp>
       <p:sp>
         <p:nvSpPr>
-          <p:cNvPr id="31" name="Shape 29"/>
-          <p:cNvSpPr/>
-          <p:nvPr/>
-        </p:nvSpPr>
-        <p:spPr>
-          <a:xfrm>
-            <a:off x="5943600" y="2404872"/>
+          <p:cNvPr id="37" name="Shape 35"/>
+          <p:cNvSpPr/>
+          <p:nvPr/>
+        </p:nvSpPr>
+        <p:spPr>
+          <a:xfrm>
+            <a:off x="5943600" y="3246120"/>
             <a:ext cx="2834640" cy="402336"/>
           </a:xfrm>
           <a:prstGeom prst="rect">
@@ -34147,13 +33739,13 @@
       </p:sp>
       <p:sp>
         <p:nvSpPr>
-          <p:cNvPr id="32" name="Text 30"/>
-          <p:cNvSpPr/>
-          <p:nvPr/>
-        </p:nvSpPr>
-        <p:spPr>
-          <a:xfrm>
-            <a:off x="5943600" y="2404872"/>
+          <p:cNvPr id="38" name="Text 36"/>
+          <p:cNvSpPr/>
+          <p:nvPr/>
+        </p:nvSpPr>
+        <p:spPr>
+          <a:xfrm>
+            <a:off x="5943600" y="3246120"/>
             <a:ext cx="2834640" cy="402336"/>
           </a:xfrm>
           <a:prstGeom prst="rect">
@@ -34178,7 +33770,7 @@
                 <a:ea typeface="Trebuchet MS" pitchFamily="34" charset="-122"/>
                 <a:cs typeface="Trebuchet MS" pitchFamily="34" charset="-120"/>
               </a:rPr>
-              <a:t>-s</a:t>
+              <a:t>-ly</a:t>
             </a:r>
             <a:endParaRPr lang="en-US" sz="1300" dirty="0"/>
           </a:p>
@@ -34186,20 +33778,20 @@
       </p:sp>
       <p:sp>
         <p:nvSpPr>
-          <p:cNvPr id="33" name="Shape 31"/>
-          <p:cNvSpPr/>
-          <p:nvPr/>
-        </p:nvSpPr>
-        <p:spPr>
-          <a:xfrm>
-            <a:off x="365760" y="2825496"/>
+          <p:cNvPr id="39" name="Shape 37"/>
+          <p:cNvSpPr/>
+          <p:nvPr/>
+        </p:nvSpPr>
+        <p:spPr>
+          <a:xfrm>
+            <a:off x="365760" y="3666744"/>
             <a:ext cx="2468880" cy="402336"/>
           </a:xfrm>
           <a:prstGeom prst="rect">
             <a:avLst/>
           </a:prstGeom>
           <a:solidFill>
-            <a:srgbClr val="DDD6FE"/>
+            <a:srgbClr val="F1F5F9"/>
           </a:solidFill>
           <a:ln w="12700">
             <a:solidFill>
@@ -34211,14 +33803,64 @@
       </p:sp>
       <p:sp>
         <p:nvSpPr>
-          <p:cNvPr id="34" name="Text 32"/>
-          <p:cNvSpPr/>
-          <p:nvPr/>
-        </p:nvSpPr>
-        <p:spPr>
-          <a:xfrm>
-            <a:off x="365760" y="2825496"/>
-            <a:ext cx="2468880" cy="402336"/>
+          <p:cNvPr id="40" name="Shape 38"/>
+          <p:cNvSpPr/>
+          <p:nvPr/>
+        </p:nvSpPr>
+        <p:spPr>
+          <a:xfrm>
+            <a:off x="2971800" y="3666744"/>
+            <a:ext cx="2834640" cy="402336"/>
+          </a:xfrm>
+          <a:prstGeom prst="rect">
+            <a:avLst/>
+          </a:prstGeom>
+          <a:solidFill>
+            <a:srgbClr val="F1F5F9"/>
+          </a:solidFill>
+          <a:ln w="12700">
+            <a:solidFill>
+              <a:srgbClr val="E2E8F0"/>
+            </a:solidFill>
+            <a:prstDash val="solid"/>
+          </a:ln>
+        </p:spPr>
+      </p:sp>
+      <p:sp>
+        <p:nvSpPr>
+          <p:cNvPr id="41" name="Shape 39"/>
+          <p:cNvSpPr/>
+          <p:nvPr/>
+        </p:nvSpPr>
+        <p:spPr>
+          <a:xfrm>
+            <a:off x="5943600" y="3666744"/>
+            <a:ext cx="2834640" cy="402336"/>
+          </a:xfrm>
+          <a:prstGeom prst="rect">
+            <a:avLst/>
+          </a:prstGeom>
+          <a:solidFill>
+            <a:srgbClr val="FCE7F3"/>
+          </a:solidFill>
+          <a:ln w="12700">
+            <a:solidFill>
+              <a:srgbClr val="E2E8F0"/>
+            </a:solidFill>
+            <a:prstDash val="solid"/>
+          </a:ln>
+        </p:spPr>
+      </p:sp>
+      <p:sp>
+        <p:nvSpPr>
+          <p:cNvPr id="42" name="Text 40"/>
+          <p:cNvSpPr/>
+          <p:nvPr/>
+        </p:nvSpPr>
+        <p:spPr>
+          <a:xfrm>
+            <a:off x="5943600" y="3666744"/>
+            <a:ext cx="2834640" cy="402336"/>
           </a:xfrm>
           <a:prstGeom prst="rect">
             <a:avLst/>
@@ -34236,13 +33878,13 @@
             <a:r>
               <a:rPr lang="en-US" sz="1300" b="1" dirty="0">
                 <a:solidFill>
-                  <a:srgbClr val="4C1D95"/>
+                  <a:srgbClr val="9D174D"/>
                 </a:solidFill>
                 <a:latin typeface="Trebuchet MS" pitchFamily="34" charset="0"/>
                 <a:ea typeface="Trebuchet MS" pitchFamily="34" charset="-122"/>
                 <a:cs typeface="Trebuchet MS" pitchFamily="34" charset="-120"/>
               </a:rPr>
-              <a:t>re-</a:t>
+              <a:t>-ness</a:t>
             </a:r>
             <a:endParaRPr lang="en-US" sz="1300" dirty="0"/>
           </a:p>
@@ -34250,64 +33892,14 @@
       </p:sp>
       <p:sp>
         <p:nvSpPr>
-          <p:cNvPr id="35" name="Shape 33"/>
-          <p:cNvSpPr/>
-          <p:nvPr/>
-        </p:nvSpPr>
-        <p:spPr>
-          <a:xfrm>
-            <a:off x="2971800" y="2825496"/>
-            <a:ext cx="2834640" cy="402336"/>
-          </a:xfrm>
-          <a:prstGeom prst="rect">
-            <a:avLst/>
-          </a:prstGeom>
-          <a:solidFill>
-            <a:srgbClr val="F1F5F9"/>
-          </a:solidFill>
-          <a:ln w="12700">
-            <a:solidFill>
-              <a:srgbClr val="E2E8F0"/>
-            </a:solidFill>
-            <a:prstDash val="solid"/>
-          </a:ln>
-        </p:spPr>
-      </p:sp>
-      <p:sp>
-        <p:nvSpPr>
-          <p:cNvPr id="36" name="Shape 34"/>
-          <p:cNvSpPr/>
-          <p:nvPr/>
-        </p:nvSpPr>
-        <p:spPr>
-          <a:xfrm>
-            <a:off x="5943600" y="2825496"/>
-            <a:ext cx="2834640" cy="402336"/>
-          </a:xfrm>
-          <a:prstGeom prst="rect">
-            <a:avLst/>
-          </a:prstGeom>
-          <a:solidFill>
-            <a:srgbClr val="FCE7F3"/>
-          </a:solidFill>
-          <a:ln w="12700">
-            <a:solidFill>
-              <a:srgbClr val="E2E8F0"/>
-            </a:solidFill>
-            <a:prstDash val="solid"/>
-          </a:ln>
-        </p:spPr>
-      </p:sp>
-      <p:sp>
-        <p:nvSpPr>
-          <p:cNvPr id="37" name="Text 35"/>
-          <p:cNvSpPr/>
-          <p:nvPr/>
-        </p:nvSpPr>
-        <p:spPr>
-          <a:xfrm>
-            <a:off x="5943600" y="2825496"/>
-            <a:ext cx="2834640" cy="402336"/>
+          <p:cNvPr id="43" name="Text 41"/>
+          <p:cNvSpPr/>
+          <p:nvPr/>
+        </p:nvSpPr>
+        <p:spPr>
+          <a:xfrm>
+            <a:off x="365760" y="3611880"/>
+            <a:ext cx="1828800" cy="347472"/>
           </a:xfrm>
           <a:prstGeom prst="rect">
             <a:avLst/>
@@ -34319,59 +33911,61 @@
           <a:bodyPr wrap="square" lIns="0" tIns="0" rIns="0" bIns="0" rtlCol="0" anchor="ctr"/>
           <a:lstStyle/>
           <a:p>
-            <a:pPr algn="ctr" indent="0" marL="0">
-              <a:buNone/>
-            </a:pPr>
-            <a:r>
-              <a:rPr lang="en-US" sz="1300" b="1" dirty="0">
-                <a:solidFill>
-                  <a:srgbClr val="9D174D"/>
+            <a:pPr algn="l" indent="0" marL="0">
+              <a:buNone/>
+            </a:pPr>
+            <a:r>
+              <a:rPr lang="en-US" sz="1200" b="1" dirty="0">
+                <a:solidFill>
+                  <a:srgbClr val="0F172A"/>
                 </a:solidFill>
                 <a:latin typeface="Trebuchet MS" pitchFamily="34" charset="0"/>
                 <a:ea typeface="Trebuchet MS" pitchFamily="34" charset="-122"/>
                 <a:cs typeface="Trebuchet MS" pitchFamily="34" charset="-120"/>
               </a:rPr>
-              <a:t>-ly</a:t>
-            </a:r>
-            <a:endParaRPr lang="en-US" sz="1300" dirty="0"/>
-          </a:p>
-        </p:txBody>
-      </p:sp>
-      <p:sp>
-        <p:nvSpPr>
-          <p:cNvPr id="38" name="Shape 36"/>
-          <p:cNvSpPr/>
-          <p:nvPr/>
-        </p:nvSpPr>
-        <p:spPr>
-          <a:xfrm>
-            <a:off x="365760" y="3246120"/>
-            <a:ext cx="2468880" cy="402336"/>
-          </a:xfrm>
-          <a:prstGeom prst="rect">
-            <a:avLst/>
-          </a:prstGeom>
-          <a:solidFill>
-            <a:srgbClr val="DDD6FE"/>
-          </a:solidFill>
-          <a:ln w="12700">
-            <a:solidFill>
-              <a:srgbClr val="E2E8F0"/>
-            </a:solidFill>
-            <a:prstDash val="solid"/>
-          </a:ln>
-        </p:spPr>
-      </p:sp>
-      <p:sp>
-        <p:nvSpPr>
-          <p:cNvPr id="39" name="Text 37"/>
-          <p:cNvSpPr/>
-          <p:nvPr/>
-        </p:nvSpPr>
-        <p:spPr>
-          <a:xfrm>
-            <a:off x="365760" y="3246120"/>
-            <a:ext cx="2468880" cy="402336"/>
+              <a:t>Sample words:</a:t>
+            </a:r>
+            <a:endParaRPr lang="en-US" sz="1200" dirty="0"/>
+          </a:p>
+        </p:txBody>
+      </p:sp>
+      <p:sp>
+        <p:nvSpPr>
+          <p:cNvPr id="44" name="Shape 42"/>
+          <p:cNvSpPr/>
+          <p:nvPr/>
+        </p:nvSpPr>
+        <p:spPr>
+          <a:xfrm>
+            <a:off x="365760" y="4023360"/>
+            <a:ext cx="2011680" cy="402336"/>
+          </a:xfrm>
+          <a:prstGeom prst="rect">
+            <a:avLst>
+              <a:gd name="adj" fmla="val 13636"/>
+            </a:avLst>
+          </a:prstGeom>
+          <a:solidFill>
+            <a:srgbClr val="EEF2FF"/>
+          </a:solidFill>
+          <a:ln w="12700">
+            <a:solidFill>
+              <a:srgbClr val="6366F1"/>
+            </a:solidFill>
+            <a:prstDash val="solid"/>
+          </a:ln>
+        </p:spPr>
+      </p:sp>
+      <p:sp>
+        <p:nvSpPr>
+          <p:cNvPr id="45" name="Text 43"/>
+          <p:cNvSpPr/>
+          <p:nvPr/>
+        </p:nvSpPr>
+        <p:spPr>
+          <a:xfrm>
+            <a:off x="365760" y="4023360"/>
+            <a:ext cx="2011680" cy="402336"/>
           </a:xfrm>
           <a:prstGeom prst="rect">
             <a:avLst/>
@@ -34387,80 +33981,57 @@
               <a:buNone/>
             </a:pPr>
             <a:r>
-              <a:rPr lang="en-US" sz="1300" b="1" dirty="0">
-                <a:solidFill>
-                  <a:srgbClr val="4C1D95"/>
+              <a:rPr lang="en-US" sz="1200" b="1" dirty="0">
+                <a:solidFill>
+                  <a:srgbClr val="4338CA"/>
                 </a:solidFill>
                 <a:latin typeface="Trebuchet MS" pitchFamily="34" charset="0"/>
                 <a:ea typeface="Trebuchet MS" pitchFamily="34" charset="-122"/>
                 <a:cs typeface="Trebuchet MS" pitchFamily="34" charset="-120"/>
               </a:rPr>
-              <a:t>all-</a:t>
-            </a:r>
-            <a:endParaRPr lang="en-US" sz="1300" dirty="0"/>
-          </a:p>
-        </p:txBody>
-      </p:sp>
-      <p:sp>
-        <p:nvSpPr>
-          <p:cNvPr id="40" name="Shape 38"/>
-          <p:cNvSpPr/>
-          <p:nvPr/>
-        </p:nvSpPr>
-        <p:spPr>
-          <a:xfrm>
-            <a:off x="2971800" y="3246120"/>
-            <a:ext cx="2834640" cy="402336"/>
-          </a:xfrm>
-          <a:prstGeom prst="rect">
-            <a:avLst/>
-          </a:prstGeom>
-          <a:solidFill>
-            <a:srgbClr val="F8FAFC"/>
-          </a:solidFill>
-          <a:ln w="12700">
-            <a:solidFill>
-              <a:srgbClr val="E2E8F0"/>
-            </a:solidFill>
-            <a:prstDash val="solid"/>
-          </a:ln>
-        </p:spPr>
-      </p:sp>
-      <p:sp>
-        <p:nvSpPr>
-          <p:cNvPr id="41" name="Shape 39"/>
-          <p:cNvSpPr/>
-          <p:nvPr/>
-        </p:nvSpPr>
-        <p:spPr>
-          <a:xfrm>
-            <a:off x="5943600" y="3246120"/>
-            <a:ext cx="2834640" cy="402336"/>
-          </a:xfrm>
-          <a:prstGeom prst="rect">
-            <a:avLst/>
-          </a:prstGeom>
-          <a:solidFill>
-            <a:srgbClr val="FCE7F3"/>
-          </a:solidFill>
-          <a:ln w="12700">
-            <a:solidFill>
-              <a:srgbClr val="E2E8F0"/>
-            </a:solidFill>
-            <a:prstDash val="solid"/>
-          </a:ln>
-        </p:spPr>
-      </p:sp>
-      <p:sp>
-        <p:nvSpPr>
-          <p:cNvPr id="42" name="Text 40"/>
-          <p:cNvSpPr/>
-          <p:nvPr/>
-        </p:nvSpPr>
-        <p:spPr>
-          <a:xfrm>
-            <a:off x="5943600" y="3246120"/>
-            <a:ext cx="2834640" cy="402336"/>
+              <a:t>round</a:t>
+            </a:r>
+            <a:endParaRPr lang="en-US" sz="1200" dirty="0"/>
+          </a:p>
+        </p:txBody>
+      </p:sp>
+      <p:sp>
+        <p:nvSpPr>
+          <p:cNvPr id="46" name="Shape 44"/>
+          <p:cNvSpPr/>
+          <p:nvPr/>
+        </p:nvSpPr>
+        <p:spPr>
+          <a:xfrm>
+            <a:off x="2542032" y="4023360"/>
+            <a:ext cx="2011680" cy="402336"/>
+          </a:xfrm>
+          <a:prstGeom prst="rect">
+            <a:avLst>
+              <a:gd name="adj" fmla="val 13636"/>
+            </a:avLst>
+          </a:prstGeom>
+          <a:solidFill>
+            <a:srgbClr val="EEF2FF"/>
+          </a:solidFill>
+          <a:ln w="12700">
+            <a:solidFill>
+              <a:srgbClr val="6366F1"/>
+            </a:solidFill>
+            <a:prstDash val="solid"/>
+          </a:ln>
+        </p:spPr>
+      </p:sp>
+      <p:sp>
+        <p:nvSpPr>
+          <p:cNvPr id="47" name="Text 45"/>
+          <p:cNvSpPr/>
+          <p:nvPr/>
+        </p:nvSpPr>
+        <p:spPr>
+          <a:xfrm>
+            <a:off x="2542032" y="4023360"/>
+            <a:ext cx="2011680" cy="402336"/>
           </a:xfrm>
           <a:prstGeom prst="rect">
             <a:avLst/>
@@ -34476,30 +34047,57 @@
               <a:buNone/>
             </a:pPr>
             <a:r>
-              <a:rPr lang="en-US" sz="1300" b="1" dirty="0">
-                <a:solidFill>
-                  <a:srgbClr val="9D174D"/>
+              <a:rPr lang="en-US" sz="1200" b="1" dirty="0">
+                <a:solidFill>
+                  <a:srgbClr val="4338CA"/>
                 </a:solidFill>
                 <a:latin typeface="Trebuchet MS" pitchFamily="34" charset="0"/>
                 <a:ea typeface="Trebuchet MS" pitchFamily="34" charset="-122"/>
                 <a:cs typeface="Trebuchet MS" pitchFamily="34" charset="-120"/>
               </a:rPr>
-              <a:t>-about</a:t>
-            </a:r>
-            <a:endParaRPr lang="en-US" sz="1300" dirty="0"/>
-          </a:p>
-        </p:txBody>
-      </p:sp>
-      <p:sp>
-        <p:nvSpPr>
-          <p:cNvPr id="43" name="Text 41"/>
-          <p:cNvSpPr/>
-          <p:nvPr/>
-        </p:nvSpPr>
-        <p:spPr>
-          <a:xfrm>
-            <a:off x="365760" y="3611880"/>
-            <a:ext cx="1828800" cy="347472"/>
+              <a:t>rounds</a:t>
+            </a:r>
+            <a:endParaRPr lang="en-US" sz="1200" dirty="0"/>
+          </a:p>
+        </p:txBody>
+      </p:sp>
+      <p:sp>
+        <p:nvSpPr>
+          <p:cNvPr id="48" name="Shape 46"/>
+          <p:cNvSpPr/>
+          <p:nvPr/>
+        </p:nvSpPr>
+        <p:spPr>
+          <a:xfrm>
+            <a:off x="4718304" y="4023360"/>
+            <a:ext cx="2011680" cy="402336"/>
+          </a:xfrm>
+          <a:prstGeom prst="rect">
+            <a:avLst>
+              <a:gd name="adj" fmla="val 13636"/>
+            </a:avLst>
+          </a:prstGeom>
+          <a:solidFill>
+            <a:srgbClr val="EEF2FF"/>
+          </a:solidFill>
+          <a:ln w="12700">
+            <a:solidFill>
+              <a:srgbClr val="6366F1"/>
+            </a:solidFill>
+            <a:prstDash val="solid"/>
+          </a:ln>
+        </p:spPr>
+      </p:sp>
+      <p:sp>
+        <p:nvSpPr>
+          <p:cNvPr id="49" name="Text 47"/>
+          <p:cNvSpPr/>
+          <p:nvPr/>
+        </p:nvSpPr>
+        <p:spPr>
+          <a:xfrm>
+            <a:off x="4718304" y="4023360"/>
+            <a:ext cx="2011680" cy="402336"/>
           </a:xfrm>
           <a:prstGeom prst="rect">
             <a:avLst/>
@@ -34511,19 +34109,19 @@
           <a:bodyPr wrap="square" lIns="0" tIns="0" rIns="0" bIns="0" rtlCol="0" anchor="ctr"/>
           <a:lstStyle/>
           <a:p>
-            <a:pPr algn="l" indent="0" marL="0">
+            <a:pPr algn="ctr" indent="0" marL="0">
               <a:buNone/>
             </a:pPr>
             <a:r>
               <a:rPr lang="en-US" sz="1200" b="1" dirty="0">
                 <a:solidFill>
-                  <a:srgbClr val="0F172A"/>
+                  <a:srgbClr val="4338CA"/>
                 </a:solidFill>
                 <a:latin typeface="Trebuchet MS" pitchFamily="34" charset="0"/>
                 <a:ea typeface="Trebuchet MS" pitchFamily="34" charset="-122"/>
                 <a:cs typeface="Trebuchet MS" pitchFamily="34" charset="-120"/>
               </a:rPr>
-              <a:t>Sample words:</a:t>
+              <a:t>rounded</a:t>
             </a:r>
             <a:endParaRPr lang="en-US" sz="1200" dirty="0"/>
           </a:p>
@@ -34531,13 +34129,13 @@
       </p:sp>
       <p:sp>
         <p:nvSpPr>
-          <p:cNvPr id="44" name="Shape 42"/>
-          <p:cNvSpPr/>
-          <p:nvPr/>
-        </p:nvSpPr>
-        <p:spPr>
-          <a:xfrm>
-            <a:off x="365760" y="4023360"/>
+          <p:cNvPr id="50" name="Shape 48"/>
+          <p:cNvSpPr/>
+          <p:nvPr/>
+        </p:nvSpPr>
+        <p:spPr>
+          <a:xfrm>
+            <a:off x="6894576" y="4023360"/>
             <a:ext cx="2011680" cy="402336"/>
           </a:xfrm>
           <a:prstGeom prst="rect">
@@ -34558,13 +34156,13 @@
       </p:sp>
       <p:sp>
         <p:nvSpPr>
-          <p:cNvPr id="45" name="Text 43"/>
-          <p:cNvSpPr/>
-          <p:nvPr/>
-        </p:nvSpPr>
-        <p:spPr>
-          <a:xfrm>
-            <a:off x="365760" y="4023360"/>
+          <p:cNvPr id="51" name="Text 49"/>
+          <p:cNvSpPr/>
+          <p:nvPr/>
+        </p:nvSpPr>
+        <p:spPr>
+          <a:xfrm>
+            <a:off x="6894576" y="4023360"/>
             <a:ext cx="2011680" cy="402336"/>
           </a:xfrm>
           <a:prstGeom prst="rect">
@@ -34589,469 +34187,7 @@
                 <a:ea typeface="Trebuchet MS" pitchFamily="34" charset="-122"/>
                 <a:cs typeface="Trebuchet MS" pitchFamily="34" charset="-120"/>
               </a:rPr>
-              <a:t>surround</a:t>
-            </a:r>
-            <a:endParaRPr lang="en-US" sz="1200" dirty="0"/>
-          </a:p>
-        </p:txBody>
-      </p:sp>
-      <p:sp>
-        <p:nvSpPr>
-          <p:cNvPr id="46" name="Shape 44"/>
-          <p:cNvSpPr/>
-          <p:nvPr/>
-        </p:nvSpPr>
-        <p:spPr>
-          <a:xfrm>
-            <a:off x="2542032" y="4023360"/>
-            <a:ext cx="2011680" cy="402336"/>
-          </a:xfrm>
-          <a:prstGeom prst="rect">
-            <a:avLst>
-              <a:gd name="adj" fmla="val 13636"/>
-            </a:avLst>
-          </a:prstGeom>
-          <a:solidFill>
-            <a:srgbClr val="EEF2FF"/>
-          </a:solidFill>
-          <a:ln w="12700">
-            <a:solidFill>
-              <a:srgbClr val="6366F1"/>
-            </a:solidFill>
-            <a:prstDash val="solid"/>
-          </a:ln>
-        </p:spPr>
-      </p:sp>
-      <p:sp>
-        <p:nvSpPr>
-          <p:cNvPr id="47" name="Text 45"/>
-          <p:cNvSpPr/>
-          <p:nvPr/>
-        </p:nvSpPr>
-        <p:spPr>
-          <a:xfrm>
-            <a:off x="2542032" y="4023360"/>
-            <a:ext cx="2011680" cy="402336"/>
-          </a:xfrm>
-          <a:prstGeom prst="rect">
-            <a:avLst/>
-          </a:prstGeom>
-          <a:noFill/>
-          <a:ln/>
-        </p:spPr>
-        <p:txBody>
-          <a:bodyPr wrap="square" lIns="0" tIns="0" rIns="0" bIns="0" rtlCol="0" anchor="ctr"/>
-          <a:lstStyle/>
-          <a:p>
-            <a:pPr algn="ctr" indent="0" marL="0">
-              <a:buNone/>
-            </a:pPr>
-            <a:r>
-              <a:rPr lang="en-US" sz="1200" b="1" dirty="0">
-                <a:solidFill>
-                  <a:srgbClr val="4338CA"/>
-                </a:solidFill>
-                <a:latin typeface="Trebuchet MS" pitchFamily="34" charset="0"/>
-                <a:ea typeface="Trebuchet MS" pitchFamily="34" charset="-122"/>
-                <a:cs typeface="Trebuchet MS" pitchFamily="34" charset="-120"/>
-              </a:rPr>
-              <a:t>roundabout</a:t>
-            </a:r>
-            <a:endParaRPr lang="en-US" sz="1200" dirty="0"/>
-          </a:p>
-        </p:txBody>
-      </p:sp>
-      <p:sp>
-        <p:nvSpPr>
-          <p:cNvPr id="48" name="Shape 46"/>
-          <p:cNvSpPr/>
-          <p:nvPr/>
-        </p:nvSpPr>
-        <p:spPr>
-          <a:xfrm>
-            <a:off x="4718304" y="4023360"/>
-            <a:ext cx="2011680" cy="402336"/>
-          </a:xfrm>
-          <a:prstGeom prst="rect">
-            <a:avLst>
-              <a:gd name="adj" fmla="val 13636"/>
-            </a:avLst>
-          </a:prstGeom>
-          <a:solidFill>
-            <a:srgbClr val="EEF2FF"/>
-          </a:solidFill>
-          <a:ln w="12700">
-            <a:solidFill>
-              <a:srgbClr val="6366F1"/>
-            </a:solidFill>
-            <a:prstDash val="solid"/>
-          </a:ln>
-        </p:spPr>
-      </p:sp>
-      <p:sp>
-        <p:nvSpPr>
-          <p:cNvPr id="49" name="Text 47"/>
-          <p:cNvSpPr/>
-          <p:nvPr/>
-        </p:nvSpPr>
-        <p:spPr>
-          <a:xfrm>
-            <a:off x="4718304" y="4023360"/>
-            <a:ext cx="2011680" cy="402336"/>
-          </a:xfrm>
-          <a:prstGeom prst="rect">
-            <a:avLst/>
-          </a:prstGeom>
-          <a:noFill/>
-          <a:ln/>
-        </p:spPr>
-        <p:txBody>
-          <a:bodyPr wrap="square" lIns="0" tIns="0" rIns="0" bIns="0" rtlCol="0" anchor="ctr"/>
-          <a:lstStyle/>
-          <a:p>
-            <a:pPr algn="ctr" indent="0" marL="0">
-              <a:buNone/>
-            </a:pPr>
-            <a:r>
-              <a:rPr lang="en-US" sz="1200" b="1" dirty="0">
-                <a:solidFill>
-                  <a:srgbClr val="4338CA"/>
-                </a:solidFill>
-                <a:latin typeface="Trebuchet MS" pitchFamily="34" charset="0"/>
-                <a:ea typeface="Trebuchet MS" pitchFamily="34" charset="-122"/>
-                <a:cs typeface="Trebuchet MS" pitchFamily="34" charset="-120"/>
-              </a:rPr>
-              <a:t>rounded</a:t>
-            </a:r>
-            <a:endParaRPr lang="en-US" sz="1200" dirty="0"/>
-          </a:p>
-        </p:txBody>
-      </p:sp>
-      <p:sp>
-        <p:nvSpPr>
-          <p:cNvPr id="50" name="Shape 48"/>
-          <p:cNvSpPr/>
-          <p:nvPr/>
-        </p:nvSpPr>
-        <p:spPr>
-          <a:xfrm>
-            <a:off x="6894576" y="4023360"/>
-            <a:ext cx="2011680" cy="402336"/>
-          </a:xfrm>
-          <a:prstGeom prst="rect">
-            <a:avLst>
-              <a:gd name="adj" fmla="val 13636"/>
-            </a:avLst>
-          </a:prstGeom>
-          <a:solidFill>
-            <a:srgbClr val="EEF2FF"/>
-          </a:solidFill>
-          <a:ln w="12700">
-            <a:solidFill>
-              <a:srgbClr val="6366F1"/>
-            </a:solidFill>
-            <a:prstDash val="solid"/>
-          </a:ln>
-        </p:spPr>
-      </p:sp>
-      <p:sp>
-        <p:nvSpPr>
-          <p:cNvPr id="51" name="Text 49"/>
-          <p:cNvSpPr/>
-          <p:nvPr/>
-        </p:nvSpPr>
-        <p:spPr>
-          <a:xfrm>
-            <a:off x="6894576" y="4023360"/>
-            <a:ext cx="2011680" cy="402336"/>
-          </a:xfrm>
-          <a:prstGeom prst="rect">
-            <a:avLst/>
-          </a:prstGeom>
-          <a:noFill/>
-          <a:ln/>
-        </p:spPr>
-        <p:txBody>
-          <a:bodyPr wrap="square" lIns="0" tIns="0" rIns="0" bIns="0" rtlCol="0" anchor="ctr"/>
-          <a:lstStyle/>
-          <a:p>
-            <a:pPr algn="ctr" indent="0" marL="0">
-              <a:buNone/>
-            </a:pPr>
-            <a:r>
-              <a:rPr lang="en-US" sz="1200" b="1" dirty="0">
-                <a:solidFill>
-                  <a:srgbClr val="4338CA"/>
-                </a:solidFill>
-                <a:latin typeface="Trebuchet MS" pitchFamily="34" charset="0"/>
-                <a:ea typeface="Trebuchet MS" pitchFamily="34" charset="-122"/>
-                <a:cs typeface="Trebuchet MS" pitchFamily="34" charset="-120"/>
-              </a:rPr>
-              <a:t>surrounding</a:t>
-            </a:r>
-            <a:endParaRPr lang="en-US" sz="1200" dirty="0"/>
-          </a:p>
-        </p:txBody>
-      </p:sp>
-      <p:sp>
-        <p:nvSpPr>
-          <p:cNvPr id="52" name="Shape 50"/>
-          <p:cNvSpPr/>
-          <p:nvPr/>
-        </p:nvSpPr>
-        <p:spPr>
-          <a:xfrm>
-            <a:off x="365760" y="4498848"/>
-            <a:ext cx="2011680" cy="402336"/>
-          </a:xfrm>
-          <a:prstGeom prst="rect">
-            <a:avLst>
-              <a:gd name="adj" fmla="val 13636"/>
-            </a:avLst>
-          </a:prstGeom>
-          <a:solidFill>
-            <a:srgbClr val="EEF2FF"/>
-          </a:solidFill>
-          <a:ln w="12700">
-            <a:solidFill>
-              <a:srgbClr val="6366F1"/>
-            </a:solidFill>
-            <a:prstDash val="solid"/>
-          </a:ln>
-        </p:spPr>
-      </p:sp>
-      <p:sp>
-        <p:nvSpPr>
-          <p:cNvPr id="53" name="Text 51"/>
-          <p:cNvSpPr/>
-          <p:nvPr/>
-        </p:nvSpPr>
-        <p:spPr>
-          <a:xfrm>
-            <a:off x="365760" y="4498848"/>
-            <a:ext cx="2011680" cy="402336"/>
-          </a:xfrm>
-          <a:prstGeom prst="rect">
-            <a:avLst/>
-          </a:prstGeom>
-          <a:noFill/>
-          <a:ln/>
-        </p:spPr>
-        <p:txBody>
-          <a:bodyPr wrap="square" lIns="0" tIns="0" rIns="0" bIns="0" rtlCol="0" anchor="ctr"/>
-          <a:lstStyle/>
-          <a:p>
-            <a:pPr algn="ctr" indent="0" marL="0">
-              <a:buNone/>
-            </a:pPr>
-            <a:r>
-              <a:rPr lang="en-US" sz="1200" b="1" dirty="0">
-                <a:solidFill>
-                  <a:srgbClr val="4338CA"/>
-                </a:solidFill>
-                <a:latin typeface="Trebuchet MS" pitchFamily="34" charset="0"/>
-                <a:ea typeface="Trebuchet MS" pitchFamily="34" charset="-122"/>
-                <a:cs typeface="Trebuchet MS" pitchFamily="34" charset="-120"/>
-              </a:rPr>
-              <a:t>roundly</a:t>
-            </a:r>
-            <a:endParaRPr lang="en-US" sz="1200" dirty="0"/>
-          </a:p>
-        </p:txBody>
-      </p:sp>
-      <p:sp>
-        <p:nvSpPr>
-          <p:cNvPr id="54" name="Shape 52"/>
-          <p:cNvSpPr/>
-          <p:nvPr/>
-        </p:nvSpPr>
-        <p:spPr>
-          <a:xfrm>
-            <a:off x="2542032" y="4498848"/>
-            <a:ext cx="2011680" cy="402336"/>
-          </a:xfrm>
-          <a:prstGeom prst="rect">
-            <a:avLst>
-              <a:gd name="adj" fmla="val 13636"/>
-            </a:avLst>
-          </a:prstGeom>
-          <a:solidFill>
-            <a:srgbClr val="EEF2FF"/>
-          </a:solidFill>
-          <a:ln w="12700">
-            <a:solidFill>
-              <a:srgbClr val="6366F1"/>
-            </a:solidFill>
-            <a:prstDash val="solid"/>
-          </a:ln>
-        </p:spPr>
-      </p:sp>
-      <p:sp>
-        <p:nvSpPr>
-          <p:cNvPr id="55" name="Text 53"/>
-          <p:cNvSpPr/>
-          <p:nvPr/>
-        </p:nvSpPr>
-        <p:spPr>
-          <a:xfrm>
-            <a:off x="2542032" y="4498848"/>
-            <a:ext cx="2011680" cy="402336"/>
-          </a:xfrm>
-          <a:prstGeom prst="rect">
-            <a:avLst/>
-          </a:prstGeom>
-          <a:noFill/>
-          <a:ln/>
-        </p:spPr>
-        <p:txBody>
-          <a:bodyPr wrap="square" lIns="0" tIns="0" rIns="0" bIns="0" rtlCol="0" anchor="ctr"/>
-          <a:lstStyle/>
-          <a:p>
-            <a:pPr algn="ctr" indent="0" marL="0">
-              <a:buNone/>
-            </a:pPr>
-            <a:r>
-              <a:rPr lang="en-US" sz="1200" b="1" dirty="0">
-                <a:solidFill>
-                  <a:srgbClr val="4338CA"/>
-                </a:solidFill>
-                <a:latin typeface="Trebuchet MS" pitchFamily="34" charset="0"/>
-                <a:ea typeface="Trebuchet MS" pitchFamily="34" charset="-122"/>
-                <a:cs typeface="Trebuchet MS" pitchFamily="34" charset="-120"/>
-              </a:rPr>
-              <a:t>grounds</a:t>
-            </a:r>
-            <a:endParaRPr lang="en-US" sz="1200" dirty="0"/>
-          </a:p>
-        </p:txBody>
-      </p:sp>
-      <p:sp>
-        <p:nvSpPr>
-          <p:cNvPr id="56" name="Shape 54"/>
-          <p:cNvSpPr/>
-          <p:nvPr/>
-        </p:nvSpPr>
-        <p:spPr>
-          <a:xfrm>
-            <a:off x="4718304" y="4498848"/>
-            <a:ext cx="2011680" cy="402336"/>
-          </a:xfrm>
-          <a:prstGeom prst="rect">
-            <a:avLst>
-              <a:gd name="adj" fmla="val 13636"/>
-            </a:avLst>
-          </a:prstGeom>
-          <a:solidFill>
-            <a:srgbClr val="EEF2FF"/>
-          </a:solidFill>
-          <a:ln w="12700">
-            <a:solidFill>
-              <a:srgbClr val="6366F1"/>
-            </a:solidFill>
-            <a:prstDash val="solid"/>
-          </a:ln>
-        </p:spPr>
-      </p:sp>
-      <p:sp>
-        <p:nvSpPr>
-          <p:cNvPr id="57" name="Text 55"/>
-          <p:cNvSpPr/>
-          <p:nvPr/>
-        </p:nvSpPr>
-        <p:spPr>
-          <a:xfrm>
-            <a:off x="4718304" y="4498848"/>
-            <a:ext cx="2011680" cy="402336"/>
-          </a:xfrm>
-          <a:prstGeom prst="rect">
-            <a:avLst/>
-          </a:prstGeom>
-          <a:noFill/>
-          <a:ln/>
-        </p:spPr>
-        <p:txBody>
-          <a:bodyPr wrap="square" lIns="0" tIns="0" rIns="0" bIns="0" rtlCol="0" anchor="ctr"/>
-          <a:lstStyle/>
-          <a:p>
-            <a:pPr algn="ctr" indent="0" marL="0">
-              <a:buNone/>
-            </a:pPr>
-            <a:r>
-              <a:rPr lang="en-US" sz="1200" b="1" dirty="0">
-                <a:solidFill>
-                  <a:srgbClr val="4338CA"/>
-                </a:solidFill>
-                <a:latin typeface="Trebuchet MS" pitchFamily="34" charset="0"/>
-                <a:ea typeface="Trebuchet MS" pitchFamily="34" charset="-122"/>
-                <a:cs typeface="Trebuchet MS" pitchFamily="34" charset="-120"/>
-              </a:rPr>
-              <a:t>around</a:t>
-            </a:r>
-            <a:endParaRPr lang="en-US" sz="1200" dirty="0"/>
-          </a:p>
-        </p:txBody>
-      </p:sp>
-      <p:sp>
-        <p:nvSpPr>
-          <p:cNvPr id="58" name="Shape 56"/>
-          <p:cNvSpPr/>
-          <p:nvPr/>
-        </p:nvSpPr>
-        <p:spPr>
-          <a:xfrm>
-            <a:off x="6894576" y="4498848"/>
-            <a:ext cx="2011680" cy="402336"/>
-          </a:xfrm>
-          <a:prstGeom prst="rect">
-            <a:avLst>
-              <a:gd name="adj" fmla="val 13636"/>
-            </a:avLst>
-          </a:prstGeom>
-          <a:solidFill>
-            <a:srgbClr val="EEF2FF"/>
-          </a:solidFill>
-          <a:ln w="12700">
-            <a:solidFill>
-              <a:srgbClr val="6366F1"/>
-            </a:solidFill>
-            <a:prstDash val="solid"/>
-          </a:ln>
-        </p:spPr>
-      </p:sp>
-      <p:sp>
-        <p:nvSpPr>
-          <p:cNvPr id="59" name="Text 57"/>
-          <p:cNvSpPr/>
-          <p:nvPr/>
-        </p:nvSpPr>
-        <p:spPr>
-          <a:xfrm>
-            <a:off x="6894576" y="4498848"/>
-            <a:ext cx="2011680" cy="402336"/>
-          </a:xfrm>
-          <a:prstGeom prst="rect">
-            <a:avLst/>
-          </a:prstGeom>
-          <a:noFill/>
-          <a:ln/>
-        </p:spPr>
-        <p:txBody>
-          <a:bodyPr wrap="square" lIns="0" tIns="0" rIns="0" bIns="0" rtlCol="0" anchor="ctr"/>
-          <a:lstStyle/>
-          <a:p>
-            <a:pPr algn="ctr" indent="0" marL="0">
-              <a:buNone/>
-            </a:pPr>
-            <a:r>
-              <a:rPr lang="en-US" sz="1200" b="1" dirty="0">
-                <a:solidFill>
-                  <a:srgbClr val="4338CA"/>
-                </a:solidFill>
-                <a:latin typeface="Trebuchet MS" pitchFamily="34" charset="0"/>
-                <a:ea typeface="Trebuchet MS" pitchFamily="34" charset="-122"/>
-                <a:cs typeface="Trebuchet MS" pitchFamily="34" charset="-120"/>
-              </a:rPr>
-              <a:t>unrounded</a:t>
+              <a:t>rounder</a:t>
             </a:r>
             <a:endParaRPr lang="en-US" sz="1200" dirty="0"/>
           </a:p>
@@ -35343,7 +34479,7 @@
                 <a:ea typeface="Calibri" pitchFamily="34" charset="-122"/>
                 <a:cs typeface="Calibri" pitchFamily="34" charset="-120"/>
               </a:rPr>
-              <a:t>Word Labs  •  wordlabs.app  •  Root: 'round' = circular shape or movement</a:t>
+              <a:t>Word Labs  •  wordlabs.app  •  Root: 'round' = shaped like a circle</a:t>
             </a:r>
             <a:endParaRPr lang="en-US" sz="800" dirty="0"/>
           </a:p>
@@ -35507,7 +34643,7 @@
                 <a:ea typeface="Calibri" pitchFamily="34" charset="-122"/>
                 <a:cs typeface="Calibri" pitchFamily="34" charset="-120"/>
               </a:rPr>
-              <a:t>The core part of a word carrying its basic meaning. For example, 'round' means 'circular shape or movement'.</a:t>
+              <a:t>The core part of a word carrying its basic meaning. For example, 'round' means 'shaped like a circle'.</a:t>
             </a:r>
             <a:endParaRPr lang="en-US" sz="1350" dirty="0"/>
           </a:p>
@@ -36127,7 +35263,7 @@
                 <a:ea typeface="Calibri" pitchFamily="34" charset="-122"/>
                 <a:cs typeface="Calibri" pitchFamily="34" charset="-120"/>
               </a:rPr>
-              <a:t>Word Labs  •  wordlabs.app  •  Root: 'round' = circular shape or movement</a:t>
+              <a:t>Word Labs  •  wordlabs.app  •  Root: 'round' = shaped like a circle</a:t>
             </a:r>
             <a:endParaRPr lang="en-US" sz="800" dirty="0"/>
           </a:p>
@@ -36239,7 +35375,7 @@
                 <a:ea typeface="Calibri" pitchFamily="34" charset="-122"/>
                 <a:cs typeface="Calibri" pitchFamily="34" charset="-120"/>
               </a:rPr>
-              <a:t>1.  The root 'round' means something sharp or pointed.</a:t>
+              <a:t>1.  'rounds' means 'sharp, straight edges on a shape'.</a:t>
             </a:r>
             <a:endParaRPr lang="en-US" sz="1300" dirty="0"/>
           </a:p>
@@ -36378,7 +35514,7 @@
                 <a:ea typeface="Calibri" pitchFamily="34" charset="-122"/>
                 <a:cs typeface="Calibri" pitchFamily="34" charset="-120"/>
               </a:rPr>
-              <a:t>2.  Adding the suffix '-ed' to 'round' makes the word 'rounded'.</a:t>
+              <a:t>2.  'round' means 'shaped like a circle'.</a:t>
             </a:r>
             <a:endParaRPr lang="en-US" sz="1300" dirty="0"/>
           </a:p>
@@ -36517,7 +35653,7 @@
                 <a:ea typeface="Calibri" pitchFamily="34" charset="-122"/>
                 <a:cs typeface="Calibri" pitchFamily="34" charset="-120"/>
               </a:rPr>
-              <a:t>3.  The word 'around' uses the prefix 'a-' added to the root 'round'.</a:t>
+              <a:t>3.  'round' means 'shaped like a circle or a ball'.</a:t>
             </a:r>
             <a:endParaRPr lang="en-US" sz="1300" dirty="0"/>
           </a:p>
@@ -36656,7 +35792,7 @@
                 <a:ea typeface="Calibri" pitchFamily="34" charset="-122"/>
                 <a:cs typeface="Calibri" pitchFamily="34" charset="-120"/>
               </a:rPr>
-              <a:t>4.  The word 'surround' contains the root 'round'.</a:t>
+              <a:t>4.  'rounds' means 'shapes like circles, or separate stages or turns in a game or competition'.</a:t>
             </a:r>
             <a:endParaRPr lang="en-US" sz="1300" dirty="0"/>
           </a:p>
@@ -36795,7 +35931,7 @@
                 <a:ea typeface="Calibri" pitchFamily="34" charset="-122"/>
                 <a:cs typeface="Calibri" pitchFamily="34" charset="-120"/>
               </a:rPr>
-              <a:t>5.  The root 'round' comes from the Greek word for circle.</a:t>
+              <a:t>5.  'round' means 'shaped like a square with sharp corners'.</a:t>
             </a:r>
             <a:endParaRPr lang="en-US" sz="1300" dirty="0"/>
           </a:p>
@@ -37153,7 +36289,7 @@
                 <a:ea typeface="Calibri" pitchFamily="34" charset="-122"/>
                 <a:cs typeface="Calibri" pitchFamily="34" charset="-120"/>
               </a:rPr>
-              <a:t>Word Labs  •  wordlabs.app  •  Root: 'round' = circular shape or movement</a:t>
+              <a:t>Word Labs  •  wordlabs.app  •  Root: 'round' = shaped like a circle</a:t>
             </a:r>
             <a:endParaRPr lang="en-US" sz="800" dirty="0"/>
           </a:p>
@@ -37290,7 +36426,7 @@
                 <a:ea typeface="Trebuchet MS" pitchFamily="34" charset="-122"/>
                 <a:cs typeface="Trebuchet MS" pitchFamily="34" charset="-120"/>
               </a:rPr>
-              <a:t>circular shape or movement</a:t>
+              <a:t>shaped like a circle</a:t>
             </a:r>
             <a:endParaRPr lang="en-US" sz="2000" dirty="0"/>
           </a:p>
@@ -37329,7 +36465,7 @@
                 <a:ea typeface="Calibri" pitchFamily="34" charset="-122"/>
                 <a:cs typeface="Calibri" pitchFamily="34" charset="-120"/>
               </a:rPr>
-              <a:t>Origin: Latin: rotundus</a:t>
+              <a:t>Origin: Anglo-Saxon (Old English) root</a:t>
             </a:r>
             <a:endParaRPr lang="en-US" sz="1100" dirty="0"/>
           </a:p>
@@ -37434,7 +36570,7 @@
                 <a:ea typeface="Trebuchet MS" pitchFamily="34" charset="-122"/>
                 <a:cs typeface="Trebuchet MS" pitchFamily="34" charset="-120"/>
               </a:rPr>
-              <a:t>surround</a:t>
+              <a:t>round</a:t>
             </a:r>
             <a:endParaRPr lang="en-US" sz="1300" dirty="0"/>
           </a:p>
@@ -37500,7 +36636,7 @@
                 <a:ea typeface="Trebuchet MS" pitchFamily="34" charset="-122"/>
                 <a:cs typeface="Trebuchet MS" pitchFamily="34" charset="-120"/>
               </a:rPr>
-              <a:t>roundabout</a:t>
+              <a:t>rounds</a:t>
             </a:r>
             <a:endParaRPr lang="en-US" sz="1300" dirty="0"/>
           </a:p>
@@ -37632,205 +36768,7 @@
                 <a:ea typeface="Trebuchet MS" pitchFamily="34" charset="-122"/>
                 <a:cs typeface="Trebuchet MS" pitchFamily="34" charset="-120"/>
               </a:rPr>
-              <a:t>surrounding</a:t>
-            </a:r>
-            <a:endParaRPr lang="en-US" sz="1300" dirty="0"/>
-          </a:p>
-        </p:txBody>
-      </p:sp>
-      <p:sp>
-        <p:nvSpPr>
-          <p:cNvPr id="24" name="Shape 22"/>
-          <p:cNvSpPr/>
-          <p:nvPr/>
-        </p:nvSpPr>
-        <p:spPr>
-          <a:xfrm>
-            <a:off x="365760" y="3401568"/>
-            <a:ext cx="2011680" cy="502920"/>
-          </a:xfrm>
-          <a:prstGeom prst="rect">
-            <a:avLst>
-              <a:gd name="adj" fmla="val 14545"/>
-            </a:avLst>
-          </a:prstGeom>
-          <a:solidFill>
-            <a:srgbClr val="EEF2FF"/>
-          </a:solidFill>
-          <a:ln w="12700">
-            <a:solidFill>
-              <a:srgbClr val="6366F1"/>
-            </a:solidFill>
-            <a:prstDash val="solid"/>
-          </a:ln>
-        </p:spPr>
-      </p:sp>
-      <p:sp>
-        <p:nvSpPr>
-          <p:cNvPr id="25" name="Text 23"/>
-          <p:cNvSpPr/>
-          <p:nvPr/>
-        </p:nvSpPr>
-        <p:spPr>
-          <a:xfrm>
-            <a:off x="365760" y="3401568"/>
-            <a:ext cx="2011680" cy="502920"/>
-          </a:xfrm>
-          <a:prstGeom prst="rect">
-            <a:avLst/>
-          </a:prstGeom>
-          <a:noFill/>
-          <a:ln/>
-        </p:spPr>
-        <p:txBody>
-          <a:bodyPr wrap="square" lIns="0" tIns="0" rIns="0" bIns="0" rtlCol="0" anchor="ctr"/>
-          <a:lstStyle/>
-          <a:p>
-            <a:pPr algn="ctr" indent="0" marL="0">
-              <a:buNone/>
-            </a:pPr>
-            <a:r>
-              <a:rPr lang="en-US" sz="1300" b="1" dirty="0">
-                <a:solidFill>
-                  <a:srgbClr val="4338CA"/>
-                </a:solidFill>
-                <a:latin typeface="Trebuchet MS" pitchFamily="34" charset="0"/>
-                <a:ea typeface="Trebuchet MS" pitchFamily="34" charset="-122"/>
-                <a:cs typeface="Trebuchet MS" pitchFamily="34" charset="-120"/>
-              </a:rPr>
-              <a:t>roundly</a:t>
-            </a:r>
-            <a:endParaRPr lang="en-US" sz="1300" dirty="0"/>
-          </a:p>
-        </p:txBody>
-      </p:sp>
-      <p:sp>
-        <p:nvSpPr>
-          <p:cNvPr id="26" name="Shape 24"/>
-          <p:cNvSpPr/>
-          <p:nvPr/>
-        </p:nvSpPr>
-        <p:spPr>
-          <a:xfrm>
-            <a:off x="2514600" y="3401568"/>
-            <a:ext cx="2011680" cy="502920"/>
-          </a:xfrm>
-          <a:prstGeom prst="rect">
-            <a:avLst>
-              <a:gd name="adj" fmla="val 14545"/>
-            </a:avLst>
-          </a:prstGeom>
-          <a:solidFill>
-            <a:srgbClr val="EEF2FF"/>
-          </a:solidFill>
-          <a:ln w="12700">
-            <a:solidFill>
-              <a:srgbClr val="6366F1"/>
-            </a:solidFill>
-            <a:prstDash val="solid"/>
-          </a:ln>
-        </p:spPr>
-      </p:sp>
-      <p:sp>
-        <p:nvSpPr>
-          <p:cNvPr id="27" name="Text 25"/>
-          <p:cNvSpPr/>
-          <p:nvPr/>
-        </p:nvSpPr>
-        <p:spPr>
-          <a:xfrm>
-            <a:off x="2514600" y="3401568"/>
-            <a:ext cx="2011680" cy="502920"/>
-          </a:xfrm>
-          <a:prstGeom prst="rect">
-            <a:avLst/>
-          </a:prstGeom>
-          <a:noFill/>
-          <a:ln/>
-        </p:spPr>
-        <p:txBody>
-          <a:bodyPr wrap="square" lIns="0" tIns="0" rIns="0" bIns="0" rtlCol="0" anchor="ctr"/>
-          <a:lstStyle/>
-          <a:p>
-            <a:pPr algn="ctr" indent="0" marL="0">
-              <a:buNone/>
-            </a:pPr>
-            <a:r>
-              <a:rPr lang="en-US" sz="1300" b="1" dirty="0">
-                <a:solidFill>
-                  <a:srgbClr val="4338CA"/>
-                </a:solidFill>
-                <a:latin typeface="Trebuchet MS" pitchFamily="34" charset="0"/>
-                <a:ea typeface="Trebuchet MS" pitchFamily="34" charset="-122"/>
-                <a:cs typeface="Trebuchet MS" pitchFamily="34" charset="-120"/>
-              </a:rPr>
-              <a:t>grounds</a:t>
-            </a:r>
-            <a:endParaRPr lang="en-US" sz="1300" dirty="0"/>
-          </a:p>
-        </p:txBody>
-      </p:sp>
-      <p:sp>
-        <p:nvSpPr>
-          <p:cNvPr id="28" name="Shape 26"/>
-          <p:cNvSpPr/>
-          <p:nvPr/>
-        </p:nvSpPr>
-        <p:spPr>
-          <a:xfrm>
-            <a:off x="4663440" y="3401568"/>
-            <a:ext cx="2011680" cy="502920"/>
-          </a:xfrm>
-          <a:prstGeom prst="rect">
-            <a:avLst>
-              <a:gd name="adj" fmla="val 14545"/>
-            </a:avLst>
-          </a:prstGeom>
-          <a:solidFill>
-            <a:srgbClr val="EEF2FF"/>
-          </a:solidFill>
-          <a:ln w="12700">
-            <a:solidFill>
-              <a:srgbClr val="6366F1"/>
-            </a:solidFill>
-            <a:prstDash val="solid"/>
-          </a:ln>
-        </p:spPr>
-      </p:sp>
-      <p:sp>
-        <p:nvSpPr>
-          <p:cNvPr id="29" name="Text 27"/>
-          <p:cNvSpPr/>
-          <p:nvPr/>
-        </p:nvSpPr>
-        <p:spPr>
-          <a:xfrm>
-            <a:off x="4663440" y="3401568"/>
-            <a:ext cx="2011680" cy="502920"/>
-          </a:xfrm>
-          <a:prstGeom prst="rect">
-            <a:avLst/>
-          </a:prstGeom>
-          <a:noFill/>
-          <a:ln/>
-        </p:spPr>
-        <p:txBody>
-          <a:bodyPr wrap="square" lIns="0" tIns="0" rIns="0" bIns="0" rtlCol="0" anchor="ctr"/>
-          <a:lstStyle/>
-          <a:p>
-            <a:pPr algn="ctr" indent="0" marL="0">
-              <a:buNone/>
-            </a:pPr>
-            <a:r>
-              <a:rPr lang="en-US" sz="1300" b="1" dirty="0">
-                <a:solidFill>
-                  <a:srgbClr val="4338CA"/>
-                </a:solidFill>
-                <a:latin typeface="Trebuchet MS" pitchFamily="34" charset="0"/>
-                <a:ea typeface="Trebuchet MS" pitchFamily="34" charset="-122"/>
-                <a:cs typeface="Trebuchet MS" pitchFamily="34" charset="-120"/>
-              </a:rPr>
-              <a:t>around</a:t>
+              <a:t>rounder</a:t>
             </a:r>
             <a:endParaRPr lang="en-US" sz="1300" dirty="0"/>
           </a:p>
@@ -38122,7 +37060,7 @@
                 <a:ea typeface="Calibri" pitchFamily="34" charset="-122"/>
                 <a:cs typeface="Calibri" pitchFamily="34" charset="-120"/>
               </a:rPr>
-              <a:t>Word Labs  •  wordlabs.app  •  Root: 'round' = circular shape or movement</a:t>
+              <a:t>Word Labs  •  wordlabs.app  •  Root: 'round' = shaped like a circle</a:t>
             </a:r>
             <a:endParaRPr lang="en-US" sz="800" dirty="0"/>
           </a:p>
@@ -38423,7 +37361,7 @@
                 <a:ea typeface="Trebuchet MS" pitchFamily="34" charset="-122"/>
                 <a:cs typeface="Trebuchet MS" pitchFamily="34" charset="-120"/>
               </a:rPr>
-              <a:t>sur-</a:t>
+              <a:t>a-</a:t>
             </a:r>
             <a:endParaRPr lang="en-US" sz="1300" dirty="0"/>
           </a:p>
@@ -38572,7 +37510,7 @@
             <a:avLst/>
           </a:prstGeom>
           <a:solidFill>
-            <a:srgbClr val="DDD6FE"/>
+            <a:srgbClr val="F1F5F9"/>
           </a:solidFill>
           <a:ln w="12700">
             <a:solidFill>
@@ -38584,18 +37522,68 @@
       </p:sp>
       <p:sp>
         <p:nvSpPr>
-          <p:cNvPr id="24" name="Text 22"/>
-          <p:cNvSpPr/>
-          <p:nvPr/>
-        </p:nvSpPr>
-        <p:spPr>
-          <a:xfrm>
-            <a:off x="640080" y="2212848"/>
+          <p:cNvPr id="24" name="Shape 22"/>
+          <p:cNvSpPr/>
+          <p:nvPr/>
+        </p:nvSpPr>
+        <p:spPr>
+          <a:xfrm>
+            <a:off x="3291840" y="2212848"/>
+            <a:ext cx="1645920" cy="420624"/>
+          </a:xfrm>
+          <a:prstGeom prst="rect">
+            <a:avLst/>
+          </a:prstGeom>
+          <a:solidFill>
+            <a:srgbClr val="F1F5F9"/>
+          </a:solidFill>
+          <a:ln w="12700">
+            <a:solidFill>
+              <a:srgbClr val="E5E7EB"/>
+            </a:solidFill>
+            <a:prstDash val="solid"/>
+          </a:ln>
+        </p:spPr>
+      </p:sp>
+      <p:sp>
+        <p:nvSpPr>
+          <p:cNvPr id="25" name="Shape 23"/>
+          <p:cNvSpPr/>
+          <p:nvPr/>
+        </p:nvSpPr>
+        <p:spPr>
+          <a:xfrm>
+            <a:off x="5943600" y="2212848"/>
             <a:ext cx="1463040" cy="420624"/>
           </a:xfrm>
           <a:prstGeom prst="rect">
             <a:avLst/>
           </a:prstGeom>
+          <a:solidFill>
+            <a:srgbClr val="FCE7F3"/>
+          </a:solidFill>
+          <a:ln w="12700">
+            <a:solidFill>
+              <a:srgbClr val="E5E7EB"/>
+            </a:solidFill>
+            <a:prstDash val="solid"/>
+          </a:ln>
+        </p:spPr>
+      </p:sp>
+      <p:sp>
+        <p:nvSpPr>
+          <p:cNvPr id="26" name="Text 24"/>
+          <p:cNvSpPr/>
+          <p:nvPr/>
+        </p:nvSpPr>
+        <p:spPr>
+          <a:xfrm>
+            <a:off x="5943600" y="2212848"/>
+            <a:ext cx="1463040" cy="420624"/>
+          </a:xfrm>
+          <a:prstGeom prst="rect">
+            <a:avLst/>
+          </a:prstGeom>
           <a:noFill/>
           <a:ln/>
         </p:spPr>
@@ -38609,13 +37597,13 @@
             <a:r>
               <a:rPr lang="en-US" sz="1300" b="1" dirty="0">
                 <a:solidFill>
-                  <a:srgbClr val="4C1D95"/>
+                  <a:srgbClr val="9D174D"/>
                 </a:solidFill>
                 <a:latin typeface="Trebuchet MS" pitchFamily="34" charset="0"/>
                 <a:ea typeface="Trebuchet MS" pitchFamily="34" charset="-122"/>
                 <a:cs typeface="Trebuchet MS" pitchFamily="34" charset="-120"/>
               </a:rPr>
-              <a:t>a-</a:t>
+              <a:t>-er</a:t>
             </a:r>
             <a:endParaRPr lang="en-US" sz="1300" dirty="0"/>
           </a:p>
@@ -38623,20 +37611,45 @@
       </p:sp>
       <p:sp>
         <p:nvSpPr>
-          <p:cNvPr id="25" name="Shape 23"/>
-          <p:cNvSpPr/>
-          <p:nvPr/>
-        </p:nvSpPr>
-        <p:spPr>
-          <a:xfrm>
-            <a:off x="3291840" y="2212848"/>
+          <p:cNvPr id="27" name="Shape 25"/>
+          <p:cNvSpPr/>
+          <p:nvPr/>
+        </p:nvSpPr>
+        <p:spPr>
+          <a:xfrm>
+            <a:off x="640080" y="2670048"/>
+            <a:ext cx="1463040" cy="420624"/>
+          </a:xfrm>
+          <a:prstGeom prst="rect">
+            <a:avLst/>
+          </a:prstGeom>
+          <a:solidFill>
+            <a:srgbClr val="F8FAFC"/>
+          </a:solidFill>
+          <a:ln w="12700">
+            <a:solidFill>
+              <a:srgbClr val="E5E7EB"/>
+            </a:solidFill>
+            <a:prstDash val="solid"/>
+          </a:ln>
+        </p:spPr>
+      </p:sp>
+      <p:sp>
+        <p:nvSpPr>
+          <p:cNvPr id="28" name="Shape 26"/>
+          <p:cNvSpPr/>
+          <p:nvPr/>
+        </p:nvSpPr>
+        <p:spPr>
+          <a:xfrm>
+            <a:off x="3291840" y="2670048"/>
             <a:ext cx="1645920" cy="420624"/>
           </a:xfrm>
           <a:prstGeom prst="rect">
             <a:avLst/>
           </a:prstGeom>
           <a:solidFill>
-            <a:srgbClr val="F1F5F9"/>
+            <a:srgbClr val="F8FAFC"/>
           </a:solidFill>
           <a:ln w="12700">
             <a:solidFill>
@@ -38648,13 +37661,13 @@
       </p:sp>
       <p:sp>
         <p:nvSpPr>
-          <p:cNvPr id="26" name="Shape 24"/>
-          <p:cNvSpPr/>
-          <p:nvPr/>
-        </p:nvSpPr>
-        <p:spPr>
-          <a:xfrm>
-            <a:off x="5943600" y="2212848"/>
+          <p:cNvPr id="29" name="Shape 27"/>
+          <p:cNvSpPr/>
+          <p:nvPr/>
+        </p:nvSpPr>
+        <p:spPr>
+          <a:xfrm>
+            <a:off x="5943600" y="2670048"/>
             <a:ext cx="1463040" cy="420624"/>
           </a:xfrm>
           <a:prstGeom prst="rect">
@@ -38673,13 +37686,13 @@
       </p:sp>
       <p:sp>
         <p:nvSpPr>
-          <p:cNvPr id="27" name="Text 25"/>
-          <p:cNvSpPr/>
-          <p:nvPr/>
-        </p:nvSpPr>
-        <p:spPr>
-          <a:xfrm>
-            <a:off x="5943600" y="2212848"/>
+          <p:cNvPr id="30" name="Text 28"/>
+          <p:cNvSpPr/>
+          <p:nvPr/>
+        </p:nvSpPr>
+        <p:spPr>
+          <a:xfrm>
+            <a:off x="5943600" y="2670048"/>
             <a:ext cx="1463040" cy="420624"/>
           </a:xfrm>
           <a:prstGeom prst="rect">
@@ -38704,7 +37717,7 @@
                 <a:ea typeface="Trebuchet MS" pitchFamily="34" charset="-122"/>
                 <a:cs typeface="Trebuchet MS" pitchFamily="34" charset="-120"/>
               </a:rPr>
-              <a:t>-ing</a:t>
+              <a:t>-est</a:t>
             </a:r>
             <a:endParaRPr lang="en-US" sz="1300" dirty="0"/>
           </a:p>
@@ -38712,20 +37725,20 @@
       </p:sp>
       <p:sp>
         <p:nvSpPr>
-          <p:cNvPr id="28" name="Shape 26"/>
-          <p:cNvSpPr/>
-          <p:nvPr/>
-        </p:nvSpPr>
-        <p:spPr>
-          <a:xfrm>
-            <a:off x="640080" y="2670048"/>
+          <p:cNvPr id="31" name="Shape 29"/>
+          <p:cNvSpPr/>
+          <p:nvPr/>
+        </p:nvSpPr>
+        <p:spPr>
+          <a:xfrm>
+            <a:off x="640080" y="3127248"/>
             <a:ext cx="1463040" cy="420624"/>
           </a:xfrm>
           <a:prstGeom prst="rect">
             <a:avLst/>
           </a:prstGeom>
           <a:solidFill>
-            <a:srgbClr val="DDD6FE"/>
+            <a:srgbClr val="F1F5F9"/>
           </a:solidFill>
           <a:ln w="12700">
             <a:solidFill>
@@ -38737,18 +37750,68 @@
       </p:sp>
       <p:sp>
         <p:nvSpPr>
-          <p:cNvPr id="29" name="Text 27"/>
-          <p:cNvSpPr/>
-          <p:nvPr/>
-        </p:nvSpPr>
-        <p:spPr>
-          <a:xfrm>
-            <a:off x="640080" y="2670048"/>
+          <p:cNvPr id="32" name="Shape 30"/>
+          <p:cNvSpPr/>
+          <p:nvPr/>
+        </p:nvSpPr>
+        <p:spPr>
+          <a:xfrm>
+            <a:off x="3291840" y="3127248"/>
+            <a:ext cx="1645920" cy="420624"/>
+          </a:xfrm>
+          <a:prstGeom prst="rect">
+            <a:avLst/>
+          </a:prstGeom>
+          <a:solidFill>
+            <a:srgbClr val="F1F5F9"/>
+          </a:solidFill>
+          <a:ln w="12700">
+            <a:solidFill>
+              <a:srgbClr val="E5E7EB"/>
+            </a:solidFill>
+            <a:prstDash val="solid"/>
+          </a:ln>
+        </p:spPr>
+      </p:sp>
+      <p:sp>
+        <p:nvSpPr>
+          <p:cNvPr id="33" name="Shape 31"/>
+          <p:cNvSpPr/>
+          <p:nvPr/>
+        </p:nvSpPr>
+        <p:spPr>
+          <a:xfrm>
+            <a:off x="5943600" y="3127248"/>
             <a:ext cx="1463040" cy="420624"/>
           </a:xfrm>
           <a:prstGeom prst="rect">
             <a:avLst/>
           </a:prstGeom>
+          <a:solidFill>
+            <a:srgbClr val="FCE7F3"/>
+          </a:solidFill>
+          <a:ln w="12700">
+            <a:solidFill>
+              <a:srgbClr val="E5E7EB"/>
+            </a:solidFill>
+            <a:prstDash val="solid"/>
+          </a:ln>
+        </p:spPr>
+      </p:sp>
+      <p:sp>
+        <p:nvSpPr>
+          <p:cNvPr id="34" name="Text 32"/>
+          <p:cNvSpPr/>
+          <p:nvPr/>
+        </p:nvSpPr>
+        <p:spPr>
+          <a:xfrm>
+            <a:off x="5943600" y="3127248"/>
+            <a:ext cx="1463040" cy="420624"/>
+          </a:xfrm>
+          <a:prstGeom prst="rect">
+            <a:avLst/>
+          </a:prstGeom>
           <a:noFill/>
           <a:ln/>
         </p:spPr>
@@ -38762,13 +37825,13 @@
             <a:r>
               <a:rPr lang="en-US" sz="1300" b="1" dirty="0">
                 <a:solidFill>
-                  <a:srgbClr val="4C1D95"/>
+                  <a:srgbClr val="9D174D"/>
                 </a:solidFill>
                 <a:latin typeface="Trebuchet MS" pitchFamily="34" charset="0"/>
                 <a:ea typeface="Trebuchet MS" pitchFamily="34" charset="-122"/>
                 <a:cs typeface="Trebuchet MS" pitchFamily="34" charset="-120"/>
               </a:rPr>
-              <a:t>un-</a:t>
+              <a:t>-ing</a:t>
             </a:r>
             <a:endParaRPr lang="en-US" sz="1300" dirty="0"/>
           </a:p>
@@ -38776,13 +37839,38 @@
       </p:sp>
       <p:sp>
         <p:nvSpPr>
-          <p:cNvPr id="30" name="Shape 28"/>
-          <p:cNvSpPr/>
-          <p:nvPr/>
-        </p:nvSpPr>
-        <p:spPr>
-          <a:xfrm>
-            <a:off x="3291840" y="2670048"/>
+          <p:cNvPr id="35" name="Shape 33"/>
+          <p:cNvSpPr/>
+          <p:nvPr/>
+        </p:nvSpPr>
+        <p:spPr>
+          <a:xfrm>
+            <a:off x="640080" y="3584448"/>
+            <a:ext cx="1463040" cy="420624"/>
+          </a:xfrm>
+          <a:prstGeom prst="rect">
+            <a:avLst/>
+          </a:prstGeom>
+          <a:solidFill>
+            <a:srgbClr val="F8FAFC"/>
+          </a:solidFill>
+          <a:ln w="12700">
+            <a:solidFill>
+              <a:srgbClr val="E5E7EB"/>
+            </a:solidFill>
+            <a:prstDash val="solid"/>
+          </a:ln>
+        </p:spPr>
+      </p:sp>
+      <p:sp>
+        <p:nvSpPr>
+          <p:cNvPr id="36" name="Shape 34"/>
+          <p:cNvSpPr/>
+          <p:nvPr/>
+        </p:nvSpPr>
+        <p:spPr>
+          <a:xfrm>
+            <a:off x="3291840" y="3584448"/>
             <a:ext cx="1645920" cy="420624"/>
           </a:xfrm>
           <a:prstGeom prst="rect">
@@ -38801,13 +37889,13 @@
       </p:sp>
       <p:sp>
         <p:nvSpPr>
-          <p:cNvPr id="31" name="Shape 29"/>
-          <p:cNvSpPr/>
-          <p:nvPr/>
-        </p:nvSpPr>
-        <p:spPr>
-          <a:xfrm>
-            <a:off x="5943600" y="2670048"/>
+          <p:cNvPr id="37" name="Shape 35"/>
+          <p:cNvSpPr/>
+          <p:nvPr/>
+        </p:nvSpPr>
+        <p:spPr>
+          <a:xfrm>
+            <a:off x="5943600" y="3584448"/>
             <a:ext cx="1463040" cy="420624"/>
           </a:xfrm>
           <a:prstGeom prst="rect">
@@ -38826,13 +37914,13 @@
       </p:sp>
       <p:sp>
         <p:nvSpPr>
-          <p:cNvPr id="32" name="Text 30"/>
-          <p:cNvSpPr/>
-          <p:nvPr/>
-        </p:nvSpPr>
-        <p:spPr>
-          <a:xfrm>
-            <a:off x="5943600" y="2670048"/>
+          <p:cNvPr id="38" name="Text 36"/>
+          <p:cNvSpPr/>
+          <p:nvPr/>
+        </p:nvSpPr>
+        <p:spPr>
+          <a:xfrm>
+            <a:off x="5943600" y="3584448"/>
             <a:ext cx="1463040" cy="420624"/>
           </a:xfrm>
           <a:prstGeom prst="rect">
@@ -38857,7 +37945,7 @@
                 <a:ea typeface="Trebuchet MS" pitchFamily="34" charset="-122"/>
                 <a:cs typeface="Trebuchet MS" pitchFamily="34" charset="-120"/>
               </a:rPr>
-              <a:t>-s</a:t>
+              <a:t>-ly</a:t>
             </a:r>
             <a:endParaRPr lang="en-US" sz="1300" dirty="0"/>
           </a:p>
@@ -38865,20 +37953,20 @@
       </p:sp>
       <p:sp>
         <p:nvSpPr>
-          <p:cNvPr id="33" name="Shape 31"/>
-          <p:cNvSpPr/>
-          <p:nvPr/>
-        </p:nvSpPr>
-        <p:spPr>
-          <a:xfrm>
-            <a:off x="640080" y="3127248"/>
+          <p:cNvPr id="39" name="Shape 37"/>
+          <p:cNvSpPr/>
+          <p:nvPr/>
+        </p:nvSpPr>
+        <p:spPr>
+          <a:xfrm>
+            <a:off x="640080" y="4041648"/>
             <a:ext cx="1463040" cy="420624"/>
           </a:xfrm>
           <a:prstGeom prst="rect">
             <a:avLst/>
           </a:prstGeom>
           <a:solidFill>
-            <a:srgbClr val="DDD6FE"/>
+            <a:srgbClr val="F1F5F9"/>
           </a:solidFill>
           <a:ln w="12700">
             <a:solidFill>
@@ -38890,18 +37978,68 @@
       </p:sp>
       <p:sp>
         <p:nvSpPr>
-          <p:cNvPr id="34" name="Text 32"/>
-          <p:cNvSpPr/>
-          <p:nvPr/>
-        </p:nvSpPr>
-        <p:spPr>
-          <a:xfrm>
-            <a:off x="640080" y="3127248"/>
+          <p:cNvPr id="40" name="Shape 38"/>
+          <p:cNvSpPr/>
+          <p:nvPr/>
+        </p:nvSpPr>
+        <p:spPr>
+          <a:xfrm>
+            <a:off x="3291840" y="4041648"/>
+            <a:ext cx="1645920" cy="420624"/>
+          </a:xfrm>
+          <a:prstGeom prst="rect">
+            <a:avLst/>
+          </a:prstGeom>
+          <a:solidFill>
+            <a:srgbClr val="F1F5F9"/>
+          </a:solidFill>
+          <a:ln w="12700">
+            <a:solidFill>
+              <a:srgbClr val="E5E7EB"/>
+            </a:solidFill>
+            <a:prstDash val="solid"/>
+          </a:ln>
+        </p:spPr>
+      </p:sp>
+      <p:sp>
+        <p:nvSpPr>
+          <p:cNvPr id="41" name="Shape 39"/>
+          <p:cNvSpPr/>
+          <p:nvPr/>
+        </p:nvSpPr>
+        <p:spPr>
+          <a:xfrm>
+            <a:off x="5943600" y="4041648"/>
             <a:ext cx="1463040" cy="420624"/>
           </a:xfrm>
           <a:prstGeom prst="rect">
             <a:avLst/>
           </a:prstGeom>
+          <a:solidFill>
+            <a:srgbClr val="FCE7F3"/>
+          </a:solidFill>
+          <a:ln w="12700">
+            <a:solidFill>
+              <a:srgbClr val="E5E7EB"/>
+            </a:solidFill>
+            <a:prstDash val="solid"/>
+          </a:ln>
+        </p:spPr>
+      </p:sp>
+      <p:sp>
+        <p:nvSpPr>
+          <p:cNvPr id="42" name="Text 40"/>
+          <p:cNvSpPr/>
+          <p:nvPr/>
+        </p:nvSpPr>
+        <p:spPr>
+          <a:xfrm>
+            <a:off x="5943600" y="4041648"/>
+            <a:ext cx="1463040" cy="420624"/>
+          </a:xfrm>
+          <a:prstGeom prst="rect">
+            <a:avLst/>
+          </a:prstGeom>
           <a:noFill/>
           <a:ln/>
         </p:spPr>
@@ -38915,13 +38053,13 @@
             <a:r>
               <a:rPr lang="en-US" sz="1300" b="1" dirty="0">
                 <a:solidFill>
-                  <a:srgbClr val="4C1D95"/>
+                  <a:srgbClr val="9D174D"/>
                 </a:solidFill>
                 <a:latin typeface="Trebuchet MS" pitchFamily="34" charset="0"/>
                 <a:ea typeface="Trebuchet MS" pitchFamily="34" charset="-122"/>
                 <a:cs typeface="Trebuchet MS" pitchFamily="34" charset="-120"/>
               </a:rPr>
-              <a:t>re-</a:t>
+              <a:t>-ness</a:t>
             </a:r>
             <a:endParaRPr lang="en-US" sz="1300" dirty="0"/>
           </a:p>
@@ -38929,255 +38067,13 @@
       </p:sp>
       <p:sp>
         <p:nvSpPr>
-          <p:cNvPr id="35" name="Shape 33"/>
-          <p:cNvSpPr/>
-          <p:nvPr/>
-        </p:nvSpPr>
-        <p:spPr>
-          <a:xfrm>
-            <a:off x="3291840" y="3127248"/>
-            <a:ext cx="1645920" cy="420624"/>
-          </a:xfrm>
-          <a:prstGeom prst="rect">
-            <a:avLst/>
-          </a:prstGeom>
-          <a:solidFill>
-            <a:srgbClr val="F1F5F9"/>
-          </a:solidFill>
-          <a:ln w="12700">
-            <a:solidFill>
-              <a:srgbClr val="E5E7EB"/>
-            </a:solidFill>
-            <a:prstDash val="solid"/>
-          </a:ln>
-        </p:spPr>
-      </p:sp>
-      <p:sp>
-        <p:nvSpPr>
-          <p:cNvPr id="36" name="Shape 34"/>
-          <p:cNvSpPr/>
-          <p:nvPr/>
-        </p:nvSpPr>
-        <p:spPr>
-          <a:xfrm>
-            <a:off x="5943600" y="3127248"/>
-            <a:ext cx="1463040" cy="420624"/>
-          </a:xfrm>
-          <a:prstGeom prst="rect">
-            <a:avLst/>
-          </a:prstGeom>
-          <a:solidFill>
-            <a:srgbClr val="FCE7F3"/>
-          </a:solidFill>
-          <a:ln w="12700">
-            <a:solidFill>
-              <a:srgbClr val="E5E7EB"/>
-            </a:solidFill>
-            <a:prstDash val="solid"/>
-          </a:ln>
-        </p:spPr>
-      </p:sp>
-      <p:sp>
-        <p:nvSpPr>
-          <p:cNvPr id="37" name="Text 35"/>
-          <p:cNvSpPr/>
-          <p:nvPr/>
-        </p:nvSpPr>
-        <p:spPr>
-          <a:xfrm>
-            <a:off x="5943600" y="3127248"/>
-            <a:ext cx="1463040" cy="420624"/>
-          </a:xfrm>
-          <a:prstGeom prst="rect">
-            <a:avLst/>
-          </a:prstGeom>
-          <a:noFill/>
-          <a:ln/>
-        </p:spPr>
-        <p:txBody>
-          <a:bodyPr wrap="square" lIns="0" tIns="0" rIns="0" bIns="0" rtlCol="0" anchor="ctr"/>
-          <a:lstStyle/>
-          <a:p>
-            <a:pPr algn="ctr" indent="0" marL="0">
-              <a:buNone/>
-            </a:pPr>
-            <a:r>
-              <a:rPr lang="en-US" sz="1300" b="1" dirty="0">
-                <a:solidFill>
-                  <a:srgbClr val="9D174D"/>
-                </a:solidFill>
-                <a:latin typeface="Trebuchet MS" pitchFamily="34" charset="0"/>
-                <a:ea typeface="Trebuchet MS" pitchFamily="34" charset="-122"/>
-                <a:cs typeface="Trebuchet MS" pitchFamily="34" charset="-120"/>
-              </a:rPr>
-              <a:t>-ly</a:t>
-            </a:r>
-            <a:endParaRPr lang="en-US" sz="1300" dirty="0"/>
-          </a:p>
-        </p:txBody>
-      </p:sp>
-      <p:sp>
-        <p:nvSpPr>
-          <p:cNvPr id="38" name="Shape 36"/>
-          <p:cNvSpPr/>
-          <p:nvPr/>
-        </p:nvSpPr>
-        <p:spPr>
-          <a:xfrm>
-            <a:off x="640080" y="3584448"/>
-            <a:ext cx="1463040" cy="420624"/>
-          </a:xfrm>
-          <a:prstGeom prst="rect">
-            <a:avLst/>
-          </a:prstGeom>
-          <a:solidFill>
-            <a:srgbClr val="DDD6FE"/>
-          </a:solidFill>
-          <a:ln w="12700">
-            <a:solidFill>
-              <a:srgbClr val="E5E7EB"/>
-            </a:solidFill>
-            <a:prstDash val="solid"/>
-          </a:ln>
-        </p:spPr>
-      </p:sp>
-      <p:sp>
-        <p:nvSpPr>
-          <p:cNvPr id="39" name="Text 37"/>
-          <p:cNvSpPr/>
-          <p:nvPr/>
-        </p:nvSpPr>
-        <p:spPr>
-          <a:xfrm>
-            <a:off x="640080" y="3584448"/>
-            <a:ext cx="1463040" cy="420624"/>
-          </a:xfrm>
-          <a:prstGeom prst="rect">
-            <a:avLst/>
-          </a:prstGeom>
-          <a:noFill/>
-          <a:ln/>
-        </p:spPr>
-        <p:txBody>
-          <a:bodyPr wrap="square" lIns="0" tIns="0" rIns="0" bIns="0" rtlCol="0" anchor="ctr"/>
-          <a:lstStyle/>
-          <a:p>
-            <a:pPr algn="ctr" indent="0" marL="0">
-              <a:buNone/>
-            </a:pPr>
-            <a:r>
-              <a:rPr lang="en-US" sz="1300" b="1" dirty="0">
-                <a:solidFill>
-                  <a:srgbClr val="4C1D95"/>
-                </a:solidFill>
-                <a:latin typeface="Trebuchet MS" pitchFamily="34" charset="0"/>
-                <a:ea typeface="Trebuchet MS" pitchFamily="34" charset="-122"/>
-                <a:cs typeface="Trebuchet MS" pitchFamily="34" charset="-120"/>
-              </a:rPr>
-              <a:t>all-</a:t>
-            </a:r>
-            <a:endParaRPr lang="en-US" sz="1300" dirty="0"/>
-          </a:p>
-        </p:txBody>
-      </p:sp>
-      <p:sp>
-        <p:nvSpPr>
-          <p:cNvPr id="40" name="Shape 38"/>
-          <p:cNvSpPr/>
-          <p:nvPr/>
-        </p:nvSpPr>
-        <p:spPr>
-          <a:xfrm>
-            <a:off x="3291840" y="3584448"/>
-            <a:ext cx="1645920" cy="420624"/>
-          </a:xfrm>
-          <a:prstGeom prst="rect">
-            <a:avLst/>
-          </a:prstGeom>
-          <a:solidFill>
-            <a:srgbClr val="F8FAFC"/>
-          </a:solidFill>
-          <a:ln w="12700">
-            <a:solidFill>
-              <a:srgbClr val="E5E7EB"/>
-            </a:solidFill>
-            <a:prstDash val="solid"/>
-          </a:ln>
-        </p:spPr>
-      </p:sp>
-      <p:sp>
-        <p:nvSpPr>
-          <p:cNvPr id="41" name="Shape 39"/>
-          <p:cNvSpPr/>
-          <p:nvPr/>
-        </p:nvSpPr>
-        <p:spPr>
-          <a:xfrm>
-            <a:off x="5943600" y="3584448"/>
-            <a:ext cx="1463040" cy="420624"/>
-          </a:xfrm>
-          <a:prstGeom prst="rect">
-            <a:avLst/>
-          </a:prstGeom>
-          <a:solidFill>
-            <a:srgbClr val="FCE7F3"/>
-          </a:solidFill>
-          <a:ln w="12700">
-            <a:solidFill>
-              <a:srgbClr val="E5E7EB"/>
-            </a:solidFill>
-            <a:prstDash val="solid"/>
-          </a:ln>
-        </p:spPr>
-      </p:sp>
-      <p:sp>
-        <p:nvSpPr>
-          <p:cNvPr id="42" name="Text 40"/>
-          <p:cNvSpPr/>
-          <p:nvPr/>
-        </p:nvSpPr>
-        <p:spPr>
-          <a:xfrm>
-            <a:off x="5943600" y="3584448"/>
-            <a:ext cx="1463040" cy="420624"/>
-          </a:xfrm>
-          <a:prstGeom prst="rect">
-            <a:avLst/>
-          </a:prstGeom>
-          <a:noFill/>
-          <a:ln/>
-        </p:spPr>
-        <p:txBody>
-          <a:bodyPr wrap="square" lIns="0" tIns="0" rIns="0" bIns="0" rtlCol="0" anchor="ctr"/>
-          <a:lstStyle/>
-          <a:p>
-            <a:pPr algn="ctr" indent="0" marL="0">
-              <a:buNone/>
-            </a:pPr>
-            <a:r>
-              <a:rPr lang="en-US" sz="1300" b="1" dirty="0">
-                <a:solidFill>
-                  <a:srgbClr val="9D174D"/>
-                </a:solidFill>
-                <a:latin typeface="Trebuchet MS" pitchFamily="34" charset="0"/>
-                <a:ea typeface="Trebuchet MS" pitchFamily="34" charset="-122"/>
-                <a:cs typeface="Trebuchet MS" pitchFamily="34" charset="-120"/>
-              </a:rPr>
-              <a:t>-about</a:t>
-            </a:r>
-            <a:endParaRPr lang="en-US" sz="1300" dirty="0"/>
-          </a:p>
-        </p:txBody>
-      </p:sp>
-      <p:sp>
-        <p:nvSpPr>
           <p:cNvPr id="43" name="Text 41"/>
           <p:cNvSpPr/>
           <p:nvPr/>
         </p:nvSpPr>
         <p:spPr>
           <a:xfrm>
-            <a:off x="365760" y="4178808"/>
+            <a:off x="365760" y="4636008"/>
             <a:ext cx="1097280" cy="420624"/>
           </a:xfrm>
           <a:prstGeom prst="rect">
@@ -39216,8 +38112,8 @@
         </p:nvSpPr>
         <p:spPr>
           <a:xfrm>
-            <a:off x="1508760" y="4178808"/>
-            <a:ext cx="950976" cy="420624"/>
+            <a:off x="1508760" y="4636008"/>
+            <a:ext cx="822960" cy="420624"/>
           </a:xfrm>
           <a:prstGeom prst="rect">
             <a:avLst>
@@ -39250,8 +38146,8 @@
         </p:nvSpPr>
         <p:spPr>
           <a:xfrm>
-            <a:off x="1508760" y="4178808"/>
-            <a:ext cx="950976" cy="420624"/>
+            <a:off x="1508760" y="4636008"/>
+            <a:ext cx="822960" cy="420624"/>
           </a:xfrm>
           <a:prstGeom prst="rect">
             <a:avLst/>
@@ -39275,7 +38171,7 @@
                 <a:ea typeface="Trebuchet MS" pitchFamily="34" charset="-122"/>
                 <a:cs typeface="Trebuchet MS" pitchFamily="34" charset="-120"/>
               </a:rPr>
-              <a:t>sur-</a:t>
+              <a:t>a-</a:t>
             </a:r>
             <a:endParaRPr lang="en-US" sz="1300" dirty="0"/>
           </a:p>
@@ -39289,7 +38185,7 @@
         </p:nvSpPr>
         <p:spPr>
           <a:xfrm>
-            <a:off x="2487168" y="4178808"/>
+            <a:off x="2359152" y="4636008"/>
             <a:ext cx="320040" cy="420624"/>
           </a:xfrm>
           <a:prstGeom prst="rect">
@@ -39328,7 +38224,7 @@
         </p:nvSpPr>
         <p:spPr>
           <a:xfrm>
-            <a:off x="2834640" y="4178808"/>
+            <a:off x="2706624" y="4636008"/>
             <a:ext cx="1389888" cy="420624"/>
           </a:xfrm>
           <a:prstGeom prst="rect">
@@ -39362,7 +38258,7 @@
         </p:nvSpPr>
         <p:spPr>
           <a:xfrm>
-            <a:off x="2834640" y="4178808"/>
+            <a:off x="2706624" y="4636008"/>
             <a:ext cx="1389888" cy="420624"/>
           </a:xfrm>
           <a:prstGeom prst="rect">
@@ -39401,7 +38297,7 @@
         </p:nvSpPr>
         <p:spPr>
           <a:xfrm>
-            <a:off x="4251960" y="4178808"/>
+            <a:off x="4123944" y="4636008"/>
             <a:ext cx="320040" cy="420624"/>
           </a:xfrm>
           <a:prstGeom prst="rect">
@@ -39440,7 +38336,7 @@
         </p:nvSpPr>
         <p:spPr>
           <a:xfrm>
-            <a:off x="4599432" y="4178808"/>
+            <a:off x="4471416" y="4636008"/>
             <a:ext cx="822960" cy="420624"/>
           </a:xfrm>
           <a:prstGeom prst="rect">
@@ -39474,7 +38370,7 @@
         </p:nvSpPr>
         <p:spPr>
           <a:xfrm>
-            <a:off x="4599432" y="4178808"/>
+            <a:off x="4471416" y="4636008"/>
             <a:ext cx="822960" cy="420624"/>
           </a:xfrm>
           <a:prstGeom prst="rect">
@@ -39513,7 +38409,7 @@
         </p:nvSpPr>
         <p:spPr>
           <a:xfrm>
-            <a:off x="5495544" y="4178808"/>
+            <a:off x="5367528" y="4636008"/>
             <a:ext cx="365760" cy="420624"/>
           </a:xfrm>
           <a:prstGeom prst="rect">
@@ -39552,7 +38448,7 @@
         </p:nvSpPr>
         <p:spPr>
           <a:xfrm>
-            <a:off x="5907024" y="4178808"/>
+            <a:off x="5779008" y="4636008"/>
             <a:ext cx="2194560" cy="420624"/>
           </a:xfrm>
           <a:prstGeom prst="rect">
@@ -39579,7 +38475,7 @@
         </p:nvSpPr>
         <p:spPr>
           <a:xfrm>
-            <a:off x="5907024" y="4178808"/>
+            <a:off x="5779008" y="4636008"/>
             <a:ext cx="2194560" cy="420624"/>
           </a:xfrm>
           <a:prstGeom prst="rect">
@@ -39604,7 +38500,7 @@
                 <a:ea typeface="Trebuchet MS" pitchFamily="34" charset="-122"/>
                 <a:cs typeface="Trebuchet MS" pitchFamily="34" charset="-120"/>
               </a:rPr>
-              <a:t>surround</a:t>
+              <a:t>round</a:t>
             </a:r>
             <a:endParaRPr lang="en-US" sz="1400" dirty="0"/>
           </a:p>
@@ -39896,7 +38792,7 @@
                 <a:ea typeface="Calibri" pitchFamily="34" charset="-122"/>
                 <a:cs typeface="Calibri" pitchFamily="34" charset="-120"/>
               </a:rPr>
-              <a:t>Word Labs  •  wordlabs.app  •  Root: 'round' = circular shape or movement</a:t>
+              <a:t>Word Labs  •  wordlabs.app  •  Root: 'round' = shaped like a circle</a:t>
             </a:r>
             <a:endParaRPr lang="en-US" sz="800" dirty="0"/>
           </a:p>
@@ -40008,7 +38904,7 @@
                 <a:ea typeface="Trebuchet MS" pitchFamily="34" charset="-122"/>
                 <a:cs typeface="Trebuchet MS" pitchFamily="34" charset="-120"/>
               </a:rPr>
-              <a:t>surround</a:t>
+              <a:t>round</a:t>
             </a:r>
             <a:endParaRPr lang="en-US" sz="1200" dirty="0"/>
           </a:p>
@@ -40074,7 +38970,7 @@
                 <a:ea typeface="Calibri" pitchFamily="34" charset="-122"/>
                 <a:cs typeface="Calibri" pitchFamily="34" charset="-120"/>
               </a:rPr>
-              <a:t>Completely or thoroughly, often used when someone is strongly criticised.</a:t>
+              <a:t>shaped like a circle or a ball</a:t>
             </a:r>
             <a:endParaRPr lang="en-US" sz="1200" dirty="0"/>
           </a:p>
@@ -40147,7 +39043,7 @@
                 <a:ea typeface="Trebuchet MS" pitchFamily="34" charset="-122"/>
                 <a:cs typeface="Trebuchet MS" pitchFamily="34" charset="-120"/>
               </a:rPr>
-              <a:t>roundabout</a:t>
+              <a:t>rounds</a:t>
             </a:r>
             <a:endParaRPr lang="en-US" sz="1200" dirty="0"/>
           </a:p>
@@ -40213,7 +39109,7 @@
                 <a:ea typeface="Calibri" pitchFamily="34" charset="-122"/>
                 <a:cs typeface="Calibri" pitchFamily="34" charset="-120"/>
               </a:rPr>
-              <a:t>Everything that is on all sides of something or someone.</a:t>
+              <a:t>more circular or curved in shape than something else</a:t>
             </a:r>
             <a:endParaRPr lang="en-US" sz="1200" dirty="0"/>
           </a:p>
@@ -40352,7 +39248,7 @@
                 <a:ea typeface="Calibri" pitchFamily="34" charset="-122"/>
                 <a:cs typeface="Calibri" pitchFamily="34" charset="-120"/>
               </a:rPr>
-              <a:t>Having a smooth, curved shape with no sharp edges or corners.</a:t>
+              <a:t>made into a curved or circular shape</a:t>
             </a:r>
             <a:endParaRPr lang="en-US" sz="1200" dirty="0"/>
           </a:p>
@@ -40425,7 +39321,7 @@
                 <a:ea typeface="Trebuchet MS" pitchFamily="34" charset="-122"/>
                 <a:cs typeface="Trebuchet MS" pitchFamily="34" charset="-120"/>
               </a:rPr>
-              <a:t>surrounding</a:t>
+              <a:t>rounder</a:t>
             </a:r>
             <a:endParaRPr lang="en-US" sz="1200" dirty="0"/>
           </a:p>
@@ -40491,424 +39387,7 @@
                 <a:ea typeface="Calibri" pitchFamily="34" charset="-122"/>
                 <a:cs typeface="Calibri" pitchFamily="34" charset="-120"/>
               </a:rPr>
-              <a:t>Moving in a circle or on all sides of something.</a:t>
-            </a:r>
-            <a:endParaRPr lang="en-US" sz="1200" dirty="0"/>
-          </a:p>
-        </p:txBody>
-      </p:sp>
-      <p:sp>
-        <p:nvSpPr>
-          <p:cNvPr id="27" name="Shape 25"/>
-          <p:cNvSpPr/>
-          <p:nvPr/>
-        </p:nvSpPr>
-        <p:spPr>
-          <a:xfrm>
-            <a:off x="365760" y="3310128"/>
-            <a:ext cx="2011680" cy="457200"/>
-          </a:xfrm>
-          <a:prstGeom prst="rect">
-            <a:avLst>
-              <a:gd name="adj" fmla="val 12000"/>
-            </a:avLst>
-          </a:prstGeom>
-          <a:solidFill>
-            <a:srgbClr val="EEF2FF"/>
-          </a:solidFill>
-          <a:ln w="12700">
-            <a:solidFill>
-              <a:srgbClr val="6366F1"/>
-            </a:solidFill>
-            <a:prstDash val="solid"/>
-          </a:ln>
-          <a:effectLst>
-            <a:outerShdw sx="100000" sy="100000" kx="0" ky="0" algn="bl" rotWithShape="0" blurRad="101600" dist="38100" dir="8100000">
-              <a:srgbClr val="000000">
-                <a:alpha val="12000"/>
-              </a:srgbClr>
-            </a:outerShdw>
-          </a:effectLst>
-        </p:spPr>
-      </p:sp>
-      <p:sp>
-        <p:nvSpPr>
-          <p:cNvPr id="28" name="Text 26"/>
-          <p:cNvSpPr/>
-          <p:nvPr/>
-        </p:nvSpPr>
-        <p:spPr>
-          <a:xfrm>
-            <a:off x="365760" y="3310128"/>
-            <a:ext cx="2011680" cy="457200"/>
-          </a:xfrm>
-          <a:prstGeom prst="rect">
-            <a:avLst/>
-          </a:prstGeom>
-          <a:noFill/>
-          <a:ln/>
-        </p:spPr>
-        <p:txBody>
-          <a:bodyPr wrap="square" lIns="0" tIns="0" rIns="0" bIns="0" rtlCol="0" anchor="ctr"/>
-          <a:lstStyle/>
-          <a:p>
-            <a:pPr algn="ctr" indent="0" marL="0">
-              <a:buNone/>
-            </a:pPr>
-            <a:r>
-              <a:rPr lang="en-US" sz="1200" b="1" dirty="0">
-                <a:solidFill>
-                  <a:srgbClr val="4338CA"/>
-                </a:solidFill>
-                <a:latin typeface="Trebuchet MS" pitchFamily="34" charset="0"/>
-                <a:ea typeface="Trebuchet MS" pitchFamily="34" charset="-122"/>
-                <a:cs typeface="Trebuchet MS" pitchFamily="34" charset="-120"/>
-              </a:rPr>
-              <a:t>roundly</a:t>
-            </a:r>
-            <a:endParaRPr lang="en-US" sz="1200" dirty="0"/>
-          </a:p>
-        </p:txBody>
-      </p:sp>
-      <p:sp>
-        <p:nvSpPr>
-          <p:cNvPr id="29" name="Shape 27"/>
-          <p:cNvSpPr/>
-          <p:nvPr/>
-        </p:nvSpPr>
-        <p:spPr>
-          <a:xfrm>
-            <a:off x="2514600" y="3310128"/>
-            <a:ext cx="6263640" cy="457200"/>
-          </a:xfrm>
-          <a:prstGeom prst="rect">
-            <a:avLst>
-              <a:gd name="adj" fmla="val 12000"/>
-            </a:avLst>
-          </a:prstGeom>
-          <a:solidFill>
-            <a:srgbClr val="F8FAFC"/>
-          </a:solidFill>
-          <a:ln w="12700">
-            <a:solidFill>
-              <a:srgbClr val="E2E8F0"/>
-            </a:solidFill>
-            <a:prstDash val="solid"/>
-          </a:ln>
-        </p:spPr>
-      </p:sp>
-      <p:sp>
-        <p:nvSpPr>
-          <p:cNvPr id="30" name="Text 28"/>
-          <p:cNvSpPr/>
-          <p:nvPr/>
-        </p:nvSpPr>
-        <p:spPr>
-          <a:xfrm>
-            <a:off x="2651760" y="3310128"/>
-            <a:ext cx="6035040" cy="457200"/>
-          </a:xfrm>
-          <a:prstGeom prst="rect">
-            <a:avLst/>
-          </a:prstGeom>
-          <a:noFill/>
-          <a:ln/>
-        </p:spPr>
-        <p:txBody>
-          <a:bodyPr wrap="square" rtlCol="0" anchor="ctr"/>
-          <a:lstStyle/>
-          <a:p>
-            <a:pPr algn="l" indent="0" marL="0">
-              <a:buNone/>
-            </a:pPr>
-            <a:r>
-              <a:rPr lang="en-US" sz="1200" dirty="0">
-                <a:solidFill>
-                  <a:srgbClr val="0F172A"/>
-                </a:solidFill>
-                <a:latin typeface="Calibri" pitchFamily="34" charset="0"/>
-                <a:ea typeface="Calibri" pitchFamily="34" charset="-122"/>
-                <a:cs typeface="Calibri" pitchFamily="34" charset="-120"/>
-              </a:rPr>
-              <a:t>To be all the way around something on every side.</a:t>
-            </a:r>
-            <a:endParaRPr lang="en-US" sz="1200" dirty="0"/>
-          </a:p>
-        </p:txBody>
-      </p:sp>
-      <p:sp>
-        <p:nvSpPr>
-          <p:cNvPr id="31" name="Shape 29"/>
-          <p:cNvSpPr/>
-          <p:nvPr/>
-        </p:nvSpPr>
-        <p:spPr>
-          <a:xfrm>
-            <a:off x="365760" y="3840480"/>
-            <a:ext cx="2011680" cy="457200"/>
-          </a:xfrm>
-          <a:prstGeom prst="rect">
-            <a:avLst>
-              <a:gd name="adj" fmla="val 12000"/>
-            </a:avLst>
-          </a:prstGeom>
-          <a:solidFill>
-            <a:srgbClr val="EEF2FF"/>
-          </a:solidFill>
-          <a:ln w="12700">
-            <a:solidFill>
-              <a:srgbClr val="6366F1"/>
-            </a:solidFill>
-            <a:prstDash val="solid"/>
-          </a:ln>
-          <a:effectLst>
-            <a:outerShdw sx="100000" sy="100000" kx="0" ky="0" algn="bl" rotWithShape="0" blurRad="101600" dist="38100" dir="8100000">
-              <a:srgbClr val="000000">
-                <a:alpha val="12000"/>
-              </a:srgbClr>
-            </a:outerShdw>
-          </a:effectLst>
-        </p:spPr>
-      </p:sp>
-      <p:sp>
-        <p:nvSpPr>
-          <p:cNvPr id="32" name="Text 30"/>
-          <p:cNvSpPr/>
-          <p:nvPr/>
-        </p:nvSpPr>
-        <p:spPr>
-          <a:xfrm>
-            <a:off x="365760" y="3840480"/>
-            <a:ext cx="2011680" cy="457200"/>
-          </a:xfrm>
-          <a:prstGeom prst="rect">
-            <a:avLst/>
-          </a:prstGeom>
-          <a:noFill/>
-          <a:ln/>
-        </p:spPr>
-        <p:txBody>
-          <a:bodyPr wrap="square" lIns="0" tIns="0" rIns="0" bIns="0" rtlCol="0" anchor="ctr"/>
-          <a:lstStyle/>
-          <a:p>
-            <a:pPr algn="ctr" indent="0" marL="0">
-              <a:buNone/>
-            </a:pPr>
-            <a:r>
-              <a:rPr lang="en-US" sz="1200" b="1" dirty="0">
-                <a:solidFill>
-                  <a:srgbClr val="4338CA"/>
-                </a:solidFill>
-                <a:latin typeface="Trebuchet MS" pitchFamily="34" charset="0"/>
-                <a:ea typeface="Trebuchet MS" pitchFamily="34" charset="-122"/>
-                <a:cs typeface="Trebuchet MS" pitchFamily="34" charset="-120"/>
-              </a:rPr>
-              <a:t>grounds</a:t>
-            </a:r>
-            <a:endParaRPr lang="en-US" sz="1200" dirty="0"/>
-          </a:p>
-        </p:txBody>
-      </p:sp>
-      <p:sp>
-        <p:nvSpPr>
-          <p:cNvPr id="33" name="Shape 31"/>
-          <p:cNvSpPr/>
-          <p:nvPr/>
-        </p:nvSpPr>
-        <p:spPr>
-          <a:xfrm>
-            <a:off x="2514600" y="3840480"/>
-            <a:ext cx="6263640" cy="457200"/>
-          </a:xfrm>
-          <a:prstGeom prst="rect">
-            <a:avLst>
-              <a:gd name="adj" fmla="val 12000"/>
-            </a:avLst>
-          </a:prstGeom>
-          <a:solidFill>
-            <a:srgbClr val="F8FAFC"/>
-          </a:solidFill>
-          <a:ln w="12700">
-            <a:solidFill>
-              <a:srgbClr val="E2E8F0"/>
-            </a:solidFill>
-            <a:prstDash val="solid"/>
-          </a:ln>
-        </p:spPr>
-      </p:sp>
-      <p:sp>
-        <p:nvSpPr>
-          <p:cNvPr id="34" name="Text 32"/>
-          <p:cNvSpPr/>
-          <p:nvPr/>
-        </p:nvSpPr>
-        <p:spPr>
-          <a:xfrm>
-            <a:off x="2651760" y="3840480"/>
-            <a:ext cx="6035040" cy="457200"/>
-          </a:xfrm>
-          <a:prstGeom prst="rect">
-            <a:avLst/>
-          </a:prstGeom>
-          <a:noFill/>
-          <a:ln/>
-        </p:spPr>
-        <p:txBody>
-          <a:bodyPr wrap="square" rtlCol="0" anchor="ctr"/>
-          <a:lstStyle/>
-          <a:p>
-            <a:pPr algn="l" indent="0" marL="0">
-              <a:buNone/>
-            </a:pPr>
-            <a:r>
-              <a:rPr lang="en-US" sz="1200" dirty="0">
-                <a:solidFill>
-                  <a:srgbClr val="0F172A"/>
-                </a:solidFill>
-                <a:latin typeface="Calibri" pitchFamily="34" charset="0"/>
-                <a:ea typeface="Calibri" pitchFamily="34" charset="-122"/>
-                <a:cs typeface="Calibri" pitchFamily="34" charset="-120"/>
-              </a:rPr>
-              <a:t>The area of land surrounding a building, like a school or park.</a:t>
-            </a:r>
-            <a:endParaRPr lang="en-US" sz="1200" dirty="0"/>
-          </a:p>
-        </p:txBody>
-      </p:sp>
-      <p:sp>
-        <p:nvSpPr>
-          <p:cNvPr id="35" name="Shape 33"/>
-          <p:cNvSpPr/>
-          <p:nvPr/>
-        </p:nvSpPr>
-        <p:spPr>
-          <a:xfrm>
-            <a:off x="365760" y="4370832"/>
-            <a:ext cx="2011680" cy="457200"/>
-          </a:xfrm>
-          <a:prstGeom prst="rect">
-            <a:avLst>
-              <a:gd name="adj" fmla="val 12000"/>
-            </a:avLst>
-          </a:prstGeom>
-          <a:solidFill>
-            <a:srgbClr val="EEF2FF"/>
-          </a:solidFill>
-          <a:ln w="12700">
-            <a:solidFill>
-              <a:srgbClr val="6366F1"/>
-            </a:solidFill>
-            <a:prstDash val="solid"/>
-          </a:ln>
-          <a:effectLst>
-            <a:outerShdw sx="100000" sy="100000" kx="0" ky="0" algn="bl" rotWithShape="0" blurRad="101600" dist="38100" dir="8100000">
-              <a:srgbClr val="000000">
-                <a:alpha val="12000"/>
-              </a:srgbClr>
-            </a:outerShdw>
-          </a:effectLst>
-        </p:spPr>
-      </p:sp>
-      <p:sp>
-        <p:nvSpPr>
-          <p:cNvPr id="36" name="Text 34"/>
-          <p:cNvSpPr/>
-          <p:nvPr/>
-        </p:nvSpPr>
-        <p:spPr>
-          <a:xfrm>
-            <a:off x="365760" y="4370832"/>
-            <a:ext cx="2011680" cy="457200"/>
-          </a:xfrm>
-          <a:prstGeom prst="rect">
-            <a:avLst/>
-          </a:prstGeom>
-          <a:noFill/>
-          <a:ln/>
-        </p:spPr>
-        <p:txBody>
-          <a:bodyPr wrap="square" lIns="0" tIns="0" rIns="0" bIns="0" rtlCol="0" anchor="ctr"/>
-          <a:lstStyle/>
-          <a:p>
-            <a:pPr algn="ctr" indent="0" marL="0">
-              <a:buNone/>
-            </a:pPr>
-            <a:r>
-              <a:rPr lang="en-US" sz="1200" b="1" dirty="0">
-                <a:solidFill>
-                  <a:srgbClr val="4338CA"/>
-                </a:solidFill>
-                <a:latin typeface="Trebuchet MS" pitchFamily="34" charset="0"/>
-                <a:ea typeface="Trebuchet MS" pitchFamily="34" charset="-122"/>
-                <a:cs typeface="Trebuchet MS" pitchFamily="34" charset="-120"/>
-              </a:rPr>
-              <a:t>around</a:t>
-            </a:r>
-            <a:endParaRPr lang="en-US" sz="1200" dirty="0"/>
-          </a:p>
-        </p:txBody>
-      </p:sp>
-      <p:sp>
-        <p:nvSpPr>
-          <p:cNvPr id="37" name="Shape 35"/>
-          <p:cNvSpPr/>
-          <p:nvPr/>
-        </p:nvSpPr>
-        <p:spPr>
-          <a:xfrm>
-            <a:off x="2514600" y="4370832"/>
-            <a:ext cx="6263640" cy="457200"/>
-          </a:xfrm>
-          <a:prstGeom prst="rect">
-            <a:avLst>
-              <a:gd name="adj" fmla="val 12000"/>
-            </a:avLst>
-          </a:prstGeom>
-          <a:solidFill>
-            <a:srgbClr val="F8FAFC"/>
-          </a:solidFill>
-          <a:ln w="12700">
-            <a:solidFill>
-              <a:srgbClr val="E2E8F0"/>
-            </a:solidFill>
-            <a:prstDash val="solid"/>
-          </a:ln>
-        </p:spPr>
-      </p:sp>
-      <p:sp>
-        <p:nvSpPr>
-          <p:cNvPr id="38" name="Text 36"/>
-          <p:cNvSpPr/>
-          <p:nvPr/>
-        </p:nvSpPr>
-        <p:spPr>
-          <a:xfrm>
-            <a:off x="2651760" y="4370832"/>
-            <a:ext cx="6035040" cy="457200"/>
-          </a:xfrm>
-          <a:prstGeom prst="rect">
-            <a:avLst/>
-          </a:prstGeom>
-          <a:noFill/>
-          <a:ln/>
-        </p:spPr>
-        <p:txBody>
-          <a:bodyPr wrap="square" rtlCol="0" anchor="ctr"/>
-          <a:lstStyle/>
-          <a:p>
-            <a:pPr algn="l" indent="0" marL="0">
-              <a:buNone/>
-            </a:pPr>
-            <a:r>
-              <a:rPr lang="en-US" sz="1200" dirty="0">
-                <a:solidFill>
-                  <a:srgbClr val="0F172A"/>
-                </a:solidFill>
-                <a:latin typeface="Calibri" pitchFamily="34" charset="0"/>
-                <a:ea typeface="Calibri" pitchFamily="34" charset="-122"/>
-                <a:cs typeface="Calibri" pitchFamily="34" charset="-120"/>
-              </a:rPr>
-              <a:t>A circular road junction where traffic goes around a central island, or a spinning playground ride.</a:t>
+              <a:t>shapes like circles, or separate stages or turns in a game or competition</a:t>
             </a:r>
             <a:endParaRPr lang="en-US" sz="1200" dirty="0"/>
           </a:p>
@@ -41200,7 +39679,7 @@
                 <a:ea typeface="Calibri" pitchFamily="34" charset="-122"/>
                 <a:cs typeface="Calibri" pitchFamily="34" charset="-120"/>
               </a:rPr>
-              <a:t>Word Labs  •  wordlabs.app  •  Root: 'round' = circular shape or movement</a:t>
+              <a:t>Word Labs  •  wordlabs.app  •  Root: 'round' = shaped like a circle</a:t>
             </a:r>
             <a:endParaRPr lang="en-US" sz="800" dirty="0"/>
           </a:p>
@@ -41403,7 +39882,7 @@
                 <a:ea typeface="Calibri" pitchFamily="34" charset="-122"/>
                 <a:cs typeface="Calibri" pitchFamily="34" charset="-120"/>
               </a:rPr>
-              <a:t>The tall trees surround the playground, giving us shade on hot days.</a:t>
+              <a:t>The ball is perfectly round so it rolls easily.</a:t>
             </a:r>
             <a:endParaRPr lang="en-US" sz="1500" dirty="0"/>
           </a:p>
@@ -41567,7 +40046,7 @@
                 <a:ea typeface="Calibri" pitchFamily="34" charset="-122"/>
                 <a:cs typeface="Calibri" pitchFamily="34" charset="-120"/>
               </a:rPr>
-              <a:t>We drove around the roundabout twice because we missed our turn.</a:t>
+              <a:t>The competition has three rounds before the final winner is chosen.</a:t>
             </a:r>
             <a:endParaRPr lang="en-US" sz="1500" dirty="0"/>
           </a:p>
@@ -41731,7 +40210,7 @@
                 <a:ea typeface="Calibri" pitchFamily="34" charset="-122"/>
                 <a:cs typeface="Calibri" pitchFamily="34" charset="-120"/>
               </a:rPr>
-              <a:t>The teacher rounded up all the students before they walked to the oval.</a:t>
+              <a:t>The carpenter rounded the edges of the table so no one would get hurt.</a:t>
             </a:r>
             <a:endParaRPr lang="en-US" sz="1500" dirty="0"/>
           </a:p>
